--- a/09-budget-aggregation/slides.pptx
+++ b/09-budget-aggregation/slides.pptx
@@ -9,10 +9,10 @@
     <p:sldMasterId id="2147483696" r:id="rId5"/>
   </p:sldMasterIdLst>
   <p:notesMasterIdLst>
-    <p:notesMasterId r:id="rId26"/>
+    <p:notesMasterId r:id="rId27"/>
   </p:notesMasterIdLst>
   <p:handoutMasterIdLst>
-    <p:handoutMasterId r:id="rId27"/>
+    <p:handoutMasterId r:id="rId28"/>
   </p:handoutMasterIdLst>
   <p:sldIdLst>
     <p:sldId id="256" r:id="rId6"/>
@@ -26,15 +26,16 @@
     <p:sldId id="264" r:id="rId14"/>
     <p:sldId id="265" r:id="rId15"/>
     <p:sldId id="266" r:id="rId16"/>
-    <p:sldId id="267" r:id="rId17"/>
-    <p:sldId id="268" r:id="rId18"/>
-    <p:sldId id="269" r:id="rId19"/>
-    <p:sldId id="270" r:id="rId20"/>
-    <p:sldId id="271" r:id="rId21"/>
-    <p:sldId id="272" r:id="rId22"/>
-    <p:sldId id="273" r:id="rId23"/>
-    <p:sldId id="274" r:id="rId24"/>
-    <p:sldId id="275" r:id="rId25"/>
+    <p:sldId id="276" r:id="rId17"/>
+    <p:sldId id="267" r:id="rId18"/>
+    <p:sldId id="268" r:id="rId19"/>
+    <p:sldId id="269" r:id="rId20"/>
+    <p:sldId id="270" r:id="rId21"/>
+    <p:sldId id="271" r:id="rId22"/>
+    <p:sldId id="272" r:id="rId23"/>
+    <p:sldId id="273" r:id="rId24"/>
+    <p:sldId id="274" r:id="rId25"/>
+    <p:sldId id="275" r:id="rId26"/>
   </p:sldIdLst>
   <p:sldSz cx="10080625" cy="7559675"/>
   <p:notesSz cx="7772400" cy="10058400"/>
@@ -1124,6 +1125,138 @@
   <p:cSld>
     <p:spTree>
       <p:nvGrpSpPr>
+        <p:cNvPr id="1" name="">
+          <a:extLst>
+            <a:ext uri="{FF2B5EF4-FFF2-40B4-BE49-F238E27FC236}">
+              <a16:creationId xmlns:a16="http://schemas.microsoft.com/office/drawing/2014/main" id="{6730348D-D0C3-DEC6-8297-E87EC2FBB77D}"/>
+            </a:ext>
+          </a:extLst>
+        </p:cNvPr>
+        <p:cNvGrpSpPr/>
+        <p:nvPr/>
+      </p:nvGrpSpPr>
+      <p:grpSpPr>
+        <a:xfrm>
+          <a:off x="0" y="0"/>
+          <a:ext cx="0" cy="0"/>
+          <a:chOff x="0" y="0"/>
+          <a:chExt cx="0" cy="0"/>
+        </a:xfrm>
+      </p:grpSpPr>
+      <p:sp>
+        <p:nvSpPr>
+          <p:cNvPr id="7" name="Slide Number Placeholder 6">
+            <a:extLst>
+              <a:ext uri="{FF2B5EF4-FFF2-40B4-BE49-F238E27FC236}">
+                <a16:creationId xmlns:a16="http://schemas.microsoft.com/office/drawing/2014/main" id="{307EB651-FFEA-2563-C287-9F9B57698EA3}"/>
+              </a:ext>
+            </a:extLst>
+          </p:cNvPr>
+          <p:cNvSpPr txBox="1">
+            <a:spLocks noGrp="1"/>
+          </p:cNvSpPr>
+          <p:nvPr>
+            <p:ph type="sldNum" sz="quarter" idx="5"/>
+          </p:nvPr>
+        </p:nvSpPr>
+        <p:spPr>
+          <a:ln/>
+        </p:spPr>
+        <p:txBody>
+          <a:bodyPr vert="horz" lIns="0" tIns="0" rIns="0" bIns="0" anchor="b" anchorCtr="0">
+            <a:noAutofit/>
+          </a:bodyPr>
+          <a:lstStyle/>
+          <a:p>
+            <a:pPr lvl="0"/>
+            <a:fld id="{28543F1D-3A81-4CCC-A703-C99EA3F62278}" type="slidenum">
+              <a:t>12</a:t>
+            </a:fld>
+            <a:endParaRPr lang="en-US"/>
+          </a:p>
+        </p:txBody>
+      </p:sp>
+      <p:sp>
+        <p:nvSpPr>
+          <p:cNvPr id="2" name="Slide Image Placeholder 1">
+            <a:extLst>
+              <a:ext uri="{FF2B5EF4-FFF2-40B4-BE49-F238E27FC236}">
+                <a16:creationId xmlns:a16="http://schemas.microsoft.com/office/drawing/2014/main" id="{D138AD57-BD9C-7B3C-29F6-765A59DF2551}"/>
+              </a:ext>
+            </a:extLst>
+          </p:cNvPr>
+          <p:cNvSpPr>
+            <a:spLocks noGrp="1" noRot="1" noChangeAspect="1" noResize="1"/>
+          </p:cNvSpPr>
+          <p:nvPr>
+            <p:ph type="sldImg"/>
+          </p:nvPr>
+        </p:nvSpPr>
+        <p:spPr>
+          <a:xfrm>
+            <a:off x="1371600" y="763588"/>
+            <a:ext cx="5029200" cy="3771900"/>
+          </a:xfrm>
+          <a:solidFill>
+            <a:srgbClr val="729FCF"/>
+          </a:solidFill>
+          <a:ln w="25400">
+            <a:solidFill>
+              <a:srgbClr val="3465A4"/>
+            </a:solidFill>
+            <a:prstDash val="solid"/>
+          </a:ln>
+        </p:spPr>
+      </p:sp>
+      <p:sp>
+        <p:nvSpPr>
+          <p:cNvPr id="3" name="Notes Placeholder 2">
+            <a:extLst>
+              <a:ext uri="{FF2B5EF4-FFF2-40B4-BE49-F238E27FC236}">
+                <a16:creationId xmlns:a16="http://schemas.microsoft.com/office/drawing/2014/main" id="{F595E463-3D75-288F-9007-FAF058FDCDAB}"/>
+              </a:ext>
+            </a:extLst>
+          </p:cNvPr>
+          <p:cNvSpPr txBox="1">
+            <a:spLocks noGrp="1"/>
+          </p:cNvSpPr>
+          <p:nvPr>
+            <p:ph type="body" sz="quarter" idx="1"/>
+          </p:nvPr>
+        </p:nvSpPr>
+        <p:spPr>
+          <a:xfrm>
+            <a:off x="777239" y="4777560"/>
+            <a:ext cx="6217560" cy="4525920"/>
+          </a:xfrm>
+        </p:spPr>
+        <p:txBody>
+          <a:bodyPr vert="horz"/>
+          <a:lstStyle/>
+          <a:p>
+            <a:pPr rtl="0"/>
+            <a:endParaRPr lang="en-US"/>
+          </a:p>
+        </p:txBody>
+      </p:sp>
+    </p:spTree>
+    <p:extLst>
+      <p:ext uri="{BB962C8B-B14F-4D97-AF65-F5344CB8AC3E}">
+        <p14:creationId xmlns:p14="http://schemas.microsoft.com/office/powerpoint/2010/main" val="1992485360"/>
+      </p:ext>
+    </p:extLst>
+  </p:cSld>
+  <p:clrMapOvr>
+    <a:masterClrMapping/>
+  </p:clrMapOvr>
+</p:notes>
+</file>
+
+<file path=ppt/notesSlides/notesSlide13.xml><?xml version="1.0" encoding="utf-8"?>
+<p:notes xmlns:a="http://schemas.openxmlformats.org/drawingml/2006/main" xmlns:r="http://schemas.openxmlformats.org/officeDocument/2006/relationships" xmlns:p="http://schemas.openxmlformats.org/presentationml/2006/main">
+  <p:cSld>
+    <p:spTree>
+      <p:nvGrpSpPr>
         <p:cNvPr id="1" name=""/>
         <p:cNvGrpSpPr/>
         <p:nvPr/>
@@ -1163,7 +1296,7 @@
           <a:p>
             <a:pPr lvl="0"/>
             <a:fld id="{09442EBF-D784-443B-BAB6-4022FBCC5BE8}" type="slidenum">
-              <a:t>12</a:t>
+              <a:t>13</a:t>
             </a:fld>
             <a:endParaRPr lang="en-US"/>
           </a:p>
@@ -1240,7 +1373,7 @@
 </p:notes>
 </file>
 
-<file path=ppt/notesSlides/notesSlide13.xml><?xml version="1.0" encoding="utf-8"?>
+<file path=ppt/notesSlides/notesSlide14.xml><?xml version="1.0" encoding="utf-8"?>
 <p:notes xmlns:a="http://schemas.openxmlformats.org/drawingml/2006/main" xmlns:r="http://schemas.openxmlformats.org/officeDocument/2006/relationships" xmlns:p="http://schemas.openxmlformats.org/presentationml/2006/main">
   <p:cSld>
     <p:spTree>
@@ -1284,7 +1417,7 @@
           <a:p>
             <a:pPr lvl="0"/>
             <a:fld id="{AF19337C-9A59-476E-99BE-B74FB8B35399}" type="slidenum">
-              <a:t>13</a:t>
+              <a:t>14</a:t>
             </a:fld>
             <a:endParaRPr lang="en-US"/>
           </a:p>
@@ -1361,7 +1494,7 @@
 </p:notes>
 </file>
 
-<file path=ppt/notesSlides/notesSlide14.xml><?xml version="1.0" encoding="utf-8"?>
+<file path=ppt/notesSlides/notesSlide15.xml><?xml version="1.0" encoding="utf-8"?>
 <p:notes xmlns:a="http://schemas.openxmlformats.org/drawingml/2006/main" xmlns:r="http://schemas.openxmlformats.org/officeDocument/2006/relationships" xmlns:p="http://schemas.openxmlformats.org/presentationml/2006/main">
   <p:cSld>
     <p:spTree>
@@ -1405,7 +1538,7 @@
           <a:p>
             <a:pPr lvl="0"/>
             <a:fld id="{90C85C5A-E7AD-4BDB-9DCC-A9230EBC58EA}" type="slidenum">
-              <a:t>14</a:t>
+              <a:t>15</a:t>
             </a:fld>
             <a:endParaRPr lang="en-US"/>
           </a:p>
@@ -1482,7 +1615,7 @@
 </p:notes>
 </file>
 
-<file path=ppt/notesSlides/notesSlide15.xml><?xml version="1.0" encoding="utf-8"?>
+<file path=ppt/notesSlides/notesSlide16.xml><?xml version="1.0" encoding="utf-8"?>
 <p:notes xmlns:a="http://schemas.openxmlformats.org/drawingml/2006/main" xmlns:r="http://schemas.openxmlformats.org/officeDocument/2006/relationships" xmlns:p="http://schemas.openxmlformats.org/presentationml/2006/main">
   <p:cSld>
     <p:spTree>
@@ -1526,7 +1659,7 @@
           <a:p>
             <a:pPr lvl="0"/>
             <a:fld id="{56542D89-ECDD-43CB-AAEB-C44992BAE715}" type="slidenum">
-              <a:t>15</a:t>
+              <a:t>16</a:t>
             </a:fld>
             <a:endParaRPr lang="en-US"/>
           </a:p>
@@ -1603,7 +1736,7 @@
 </p:notes>
 </file>
 
-<file path=ppt/notesSlides/notesSlide16.xml><?xml version="1.0" encoding="utf-8"?>
+<file path=ppt/notesSlides/notesSlide17.xml><?xml version="1.0" encoding="utf-8"?>
 <p:notes xmlns:a="http://schemas.openxmlformats.org/drawingml/2006/main" xmlns:r="http://schemas.openxmlformats.org/officeDocument/2006/relationships" xmlns:p="http://schemas.openxmlformats.org/presentationml/2006/main">
   <p:cSld>
     <p:spTree>
@@ -1647,7 +1780,7 @@
           <a:p>
             <a:pPr lvl="0"/>
             <a:fld id="{06D25475-5487-4ADB-A1A0-824DE55F04FB}" type="slidenum">
-              <a:t>16</a:t>
+              <a:t>17</a:t>
             </a:fld>
             <a:endParaRPr lang="en-US"/>
           </a:p>
@@ -1724,7 +1857,7 @@
 </p:notes>
 </file>
 
-<file path=ppt/notesSlides/notesSlide17.xml><?xml version="1.0" encoding="utf-8"?>
+<file path=ppt/notesSlides/notesSlide18.xml><?xml version="1.0" encoding="utf-8"?>
 <p:notes xmlns:a="http://schemas.openxmlformats.org/drawingml/2006/main" xmlns:r="http://schemas.openxmlformats.org/officeDocument/2006/relationships" xmlns:p="http://schemas.openxmlformats.org/presentationml/2006/main">
   <p:cSld>
     <p:spTree>
@@ -1768,7 +1901,7 @@
           <a:p>
             <a:pPr lvl="0"/>
             <a:fld id="{EFD08987-E07B-4A70-9D76-E15E59BB3D97}" type="slidenum">
-              <a:t>17</a:t>
+              <a:t>18</a:t>
             </a:fld>
             <a:endParaRPr lang="en-US"/>
           </a:p>
@@ -1845,7 +1978,7 @@
 </p:notes>
 </file>
 
-<file path=ppt/notesSlides/notesSlide18.xml><?xml version="1.0" encoding="utf-8"?>
+<file path=ppt/notesSlides/notesSlide19.xml><?xml version="1.0" encoding="utf-8"?>
 <p:notes xmlns:a="http://schemas.openxmlformats.org/drawingml/2006/main" xmlns:r="http://schemas.openxmlformats.org/officeDocument/2006/relationships" xmlns:p="http://schemas.openxmlformats.org/presentationml/2006/main">
   <p:cSld>
     <p:spTree>
@@ -1889,7 +2022,7 @@
           <a:p>
             <a:pPr lvl="0"/>
             <a:fld id="{B2074228-9180-49BA-B717-7D98AAC868AD}" type="slidenum">
-              <a:t>18</a:t>
+              <a:t>19</a:t>
             </a:fld>
             <a:endParaRPr lang="en-US"/>
           </a:p>
@@ -1966,7 +2099,128 @@
 </p:notes>
 </file>
 
-<file path=ppt/notesSlides/notesSlide19.xml><?xml version="1.0" encoding="utf-8"?>
+<file path=ppt/notesSlides/notesSlide2.xml><?xml version="1.0" encoding="utf-8"?>
+<p:notes xmlns:a="http://schemas.openxmlformats.org/drawingml/2006/main" xmlns:r="http://schemas.openxmlformats.org/officeDocument/2006/relationships" xmlns:p="http://schemas.openxmlformats.org/presentationml/2006/main">
+  <p:cSld>
+    <p:spTree>
+      <p:nvGrpSpPr>
+        <p:cNvPr id="1" name=""/>
+        <p:cNvGrpSpPr/>
+        <p:nvPr/>
+      </p:nvGrpSpPr>
+      <p:grpSpPr>
+        <a:xfrm>
+          <a:off x="0" y="0"/>
+          <a:ext cx="0" cy="0"/>
+          <a:chOff x="0" y="0"/>
+          <a:chExt cx="0" cy="0"/>
+        </a:xfrm>
+      </p:grpSpPr>
+      <p:sp>
+        <p:nvSpPr>
+          <p:cNvPr id="7" name="Slide Number Placeholder 6">
+            <a:extLst>
+              <a:ext uri="{FF2B5EF4-FFF2-40B4-BE49-F238E27FC236}">
+                <a16:creationId xmlns:a16="http://schemas.microsoft.com/office/drawing/2014/main" id="{0608E78A-BD54-4D3A-BC3F-F3570A10B55D}"/>
+              </a:ext>
+            </a:extLst>
+          </p:cNvPr>
+          <p:cNvSpPr txBox="1">
+            <a:spLocks noGrp="1"/>
+          </p:cNvSpPr>
+          <p:nvPr>
+            <p:ph type="sldNum" sz="quarter" idx="5"/>
+          </p:nvPr>
+        </p:nvSpPr>
+        <p:spPr>
+          <a:ln/>
+        </p:spPr>
+        <p:txBody>
+          <a:bodyPr vert="horz" lIns="0" tIns="0" rIns="0" bIns="0" anchor="b" anchorCtr="0">
+            <a:noAutofit/>
+          </a:bodyPr>
+          <a:lstStyle/>
+          <a:p>
+            <a:pPr lvl="0"/>
+            <a:fld id="{58025FEB-B264-438F-B42E-DA86FA49ADB9}" type="slidenum">
+              <a:t>2</a:t>
+            </a:fld>
+            <a:endParaRPr lang="en-US"/>
+          </a:p>
+        </p:txBody>
+      </p:sp>
+      <p:sp>
+        <p:nvSpPr>
+          <p:cNvPr id="2" name="Slide Image Placeholder 1">
+            <a:extLst>
+              <a:ext uri="{FF2B5EF4-FFF2-40B4-BE49-F238E27FC236}">
+                <a16:creationId xmlns:a16="http://schemas.microsoft.com/office/drawing/2014/main" id="{2EEB6CD2-EDB4-6EA5-013F-9203BBE956F2}"/>
+              </a:ext>
+            </a:extLst>
+          </p:cNvPr>
+          <p:cNvSpPr>
+            <a:spLocks noGrp="1" noRot="1" noChangeAspect="1" noResize="1"/>
+          </p:cNvSpPr>
+          <p:nvPr>
+            <p:ph type="sldImg"/>
+          </p:nvPr>
+        </p:nvSpPr>
+        <p:spPr>
+          <a:xfrm>
+            <a:off x="1371600" y="763588"/>
+            <a:ext cx="5029200" cy="3771900"/>
+          </a:xfrm>
+          <a:solidFill>
+            <a:srgbClr val="729FCF"/>
+          </a:solidFill>
+          <a:ln w="25400">
+            <a:solidFill>
+              <a:srgbClr val="3465A4"/>
+            </a:solidFill>
+            <a:prstDash val="solid"/>
+          </a:ln>
+        </p:spPr>
+      </p:sp>
+      <p:sp>
+        <p:nvSpPr>
+          <p:cNvPr id="3" name="Notes Placeholder 2">
+            <a:extLst>
+              <a:ext uri="{FF2B5EF4-FFF2-40B4-BE49-F238E27FC236}">
+                <a16:creationId xmlns:a16="http://schemas.microsoft.com/office/drawing/2014/main" id="{B214F38E-2E7D-9D82-53D3-684AC10D1F1B}"/>
+              </a:ext>
+            </a:extLst>
+          </p:cNvPr>
+          <p:cNvSpPr txBox="1">
+            <a:spLocks noGrp="1"/>
+          </p:cNvSpPr>
+          <p:nvPr>
+            <p:ph type="body" sz="quarter" idx="1"/>
+          </p:nvPr>
+        </p:nvSpPr>
+        <p:spPr>
+          <a:xfrm>
+            <a:off x="777239" y="4777560"/>
+            <a:ext cx="6217560" cy="4525920"/>
+          </a:xfrm>
+        </p:spPr>
+        <p:txBody>
+          <a:bodyPr vert="horz"/>
+          <a:lstStyle/>
+          <a:p>
+            <a:pPr rtl="0"/>
+            <a:endParaRPr lang="en-US"/>
+          </a:p>
+        </p:txBody>
+      </p:sp>
+    </p:spTree>
+  </p:cSld>
+  <p:clrMapOvr>
+    <a:masterClrMapping/>
+  </p:clrMapOvr>
+</p:notes>
+</file>
+
+<file path=ppt/notesSlides/notesSlide20.xml><?xml version="1.0" encoding="utf-8"?>
 <p:notes xmlns:a="http://schemas.openxmlformats.org/drawingml/2006/main" xmlns:r="http://schemas.openxmlformats.org/officeDocument/2006/relationships" xmlns:p="http://schemas.openxmlformats.org/presentationml/2006/main">
   <p:cSld>
     <p:spTree>
@@ -2010,7 +2264,7 @@
           <a:p>
             <a:pPr lvl="0"/>
             <a:fld id="{C4ABC53E-206D-43EB-9389-4FFE4E5558D9}" type="slidenum">
-              <a:t>19</a:t>
+              <a:t>20</a:t>
             </a:fld>
             <a:endParaRPr lang="en-US"/>
           </a:p>
@@ -2087,128 +2341,7 @@
 </p:notes>
 </file>
 
-<file path=ppt/notesSlides/notesSlide2.xml><?xml version="1.0" encoding="utf-8"?>
-<p:notes xmlns:a="http://schemas.openxmlformats.org/drawingml/2006/main" xmlns:r="http://schemas.openxmlformats.org/officeDocument/2006/relationships" xmlns:p="http://schemas.openxmlformats.org/presentationml/2006/main">
-  <p:cSld>
-    <p:spTree>
-      <p:nvGrpSpPr>
-        <p:cNvPr id="1" name=""/>
-        <p:cNvGrpSpPr/>
-        <p:nvPr/>
-      </p:nvGrpSpPr>
-      <p:grpSpPr>
-        <a:xfrm>
-          <a:off x="0" y="0"/>
-          <a:ext cx="0" cy="0"/>
-          <a:chOff x="0" y="0"/>
-          <a:chExt cx="0" cy="0"/>
-        </a:xfrm>
-      </p:grpSpPr>
-      <p:sp>
-        <p:nvSpPr>
-          <p:cNvPr id="7" name="Slide Number Placeholder 6">
-            <a:extLst>
-              <a:ext uri="{FF2B5EF4-FFF2-40B4-BE49-F238E27FC236}">
-                <a16:creationId xmlns:a16="http://schemas.microsoft.com/office/drawing/2014/main" id="{0608E78A-BD54-4D3A-BC3F-F3570A10B55D}"/>
-              </a:ext>
-            </a:extLst>
-          </p:cNvPr>
-          <p:cNvSpPr txBox="1">
-            <a:spLocks noGrp="1"/>
-          </p:cNvSpPr>
-          <p:nvPr>
-            <p:ph type="sldNum" sz="quarter" idx="5"/>
-          </p:nvPr>
-        </p:nvSpPr>
-        <p:spPr>
-          <a:ln/>
-        </p:spPr>
-        <p:txBody>
-          <a:bodyPr vert="horz" lIns="0" tIns="0" rIns="0" bIns="0" anchor="b" anchorCtr="0">
-            <a:noAutofit/>
-          </a:bodyPr>
-          <a:lstStyle/>
-          <a:p>
-            <a:pPr lvl="0"/>
-            <a:fld id="{58025FEB-B264-438F-B42E-DA86FA49ADB9}" type="slidenum">
-              <a:t>2</a:t>
-            </a:fld>
-            <a:endParaRPr lang="en-US"/>
-          </a:p>
-        </p:txBody>
-      </p:sp>
-      <p:sp>
-        <p:nvSpPr>
-          <p:cNvPr id="2" name="Slide Image Placeholder 1">
-            <a:extLst>
-              <a:ext uri="{FF2B5EF4-FFF2-40B4-BE49-F238E27FC236}">
-                <a16:creationId xmlns:a16="http://schemas.microsoft.com/office/drawing/2014/main" id="{2EEB6CD2-EDB4-6EA5-013F-9203BBE956F2}"/>
-              </a:ext>
-            </a:extLst>
-          </p:cNvPr>
-          <p:cNvSpPr>
-            <a:spLocks noGrp="1" noRot="1" noChangeAspect="1" noResize="1"/>
-          </p:cNvSpPr>
-          <p:nvPr>
-            <p:ph type="sldImg"/>
-          </p:nvPr>
-        </p:nvSpPr>
-        <p:spPr>
-          <a:xfrm>
-            <a:off x="1371600" y="763588"/>
-            <a:ext cx="5029200" cy="3771900"/>
-          </a:xfrm>
-          <a:solidFill>
-            <a:srgbClr val="729FCF"/>
-          </a:solidFill>
-          <a:ln w="25400">
-            <a:solidFill>
-              <a:srgbClr val="3465A4"/>
-            </a:solidFill>
-            <a:prstDash val="solid"/>
-          </a:ln>
-        </p:spPr>
-      </p:sp>
-      <p:sp>
-        <p:nvSpPr>
-          <p:cNvPr id="3" name="Notes Placeholder 2">
-            <a:extLst>
-              <a:ext uri="{FF2B5EF4-FFF2-40B4-BE49-F238E27FC236}">
-                <a16:creationId xmlns:a16="http://schemas.microsoft.com/office/drawing/2014/main" id="{B214F38E-2E7D-9D82-53D3-684AC10D1F1B}"/>
-              </a:ext>
-            </a:extLst>
-          </p:cNvPr>
-          <p:cNvSpPr txBox="1">
-            <a:spLocks noGrp="1"/>
-          </p:cNvSpPr>
-          <p:nvPr>
-            <p:ph type="body" sz="quarter" idx="1"/>
-          </p:nvPr>
-        </p:nvSpPr>
-        <p:spPr>
-          <a:xfrm>
-            <a:off x="777239" y="4777560"/>
-            <a:ext cx="6217560" cy="4525920"/>
-          </a:xfrm>
-        </p:spPr>
-        <p:txBody>
-          <a:bodyPr vert="horz"/>
-          <a:lstStyle/>
-          <a:p>
-            <a:pPr rtl="0"/>
-            <a:endParaRPr lang="en-US"/>
-          </a:p>
-        </p:txBody>
-      </p:sp>
-    </p:spTree>
-  </p:cSld>
-  <p:clrMapOvr>
-    <a:masterClrMapping/>
-  </p:clrMapOvr>
-</p:notes>
-</file>
-
-<file path=ppt/notesSlides/notesSlide20.xml><?xml version="1.0" encoding="utf-8"?>
+<file path=ppt/notesSlides/notesSlide21.xml><?xml version="1.0" encoding="utf-8"?>
 <p:notes xmlns:a="http://schemas.openxmlformats.org/drawingml/2006/main" xmlns:r="http://schemas.openxmlformats.org/officeDocument/2006/relationships" xmlns:p="http://schemas.openxmlformats.org/presentationml/2006/main">
   <p:cSld>
     <p:spTree>
@@ -2252,7 +2385,7 @@
           <a:p>
             <a:pPr lvl="0"/>
             <a:fld id="{EFAD62D9-196D-4640-9667-818AFAFDECFF}" type="slidenum">
-              <a:t>20</a:t>
+              <a:t>21</a:t>
             </a:fld>
             <a:endParaRPr lang="en-US"/>
           </a:p>
@@ -8737,7 +8870,7 @@
           <a:p>
             <a:fld id="{98742427-F07F-4004-869E-31B27D62AE65}" type="datetimeFigureOut">
               <a:rPr lang="he-IL" smtClean="0"/>
-              <a:t>י"ט/סיון/תשפ"ה</a:t>
+              <a:t>ג'/טבת/תשפ"ו</a:t>
             </a:fld>
             <a:endParaRPr lang="he-IL"/>
           </a:p>
@@ -8936,7 +9069,7 @@
           <a:p>
             <a:fld id="{98742427-F07F-4004-869E-31B27D62AE65}" type="datetimeFigureOut">
               <a:rPr lang="he-IL" smtClean="0"/>
-              <a:t>י"ט/סיון/תשפ"ה</a:t>
+              <a:t>ג'/טבת/תשפ"ו</a:t>
             </a:fld>
             <a:endParaRPr lang="he-IL"/>
           </a:p>
@@ -9211,7 +9344,7 @@
           <a:p>
             <a:fld id="{98742427-F07F-4004-869E-31B27D62AE65}" type="datetimeFigureOut">
               <a:rPr lang="he-IL" smtClean="0"/>
-              <a:t>י"ט/סיון/תשפ"ה</a:t>
+              <a:t>ג'/טבת/תשפ"ו</a:t>
             </a:fld>
             <a:endParaRPr lang="he-IL"/>
           </a:p>
@@ -9478,7 +9611,7 @@
           <a:p>
             <a:fld id="{98742427-F07F-4004-869E-31B27D62AE65}" type="datetimeFigureOut">
               <a:rPr lang="he-IL" smtClean="0"/>
-              <a:t>י"ט/סיון/תשפ"ה</a:t>
+              <a:t>ג'/טבת/תשפ"ו</a:t>
             </a:fld>
             <a:endParaRPr lang="he-IL"/>
           </a:p>
@@ -9892,7 +10025,7 @@
           <a:p>
             <a:fld id="{98742427-F07F-4004-869E-31B27D62AE65}" type="datetimeFigureOut">
               <a:rPr lang="he-IL" smtClean="0"/>
-              <a:t>י"ט/סיון/תשפ"ה</a:t>
+              <a:t>ג'/טבת/תשפ"ו</a:t>
             </a:fld>
             <a:endParaRPr lang="he-IL"/>
           </a:p>
@@ -10033,7 +10166,7 @@
           <a:p>
             <a:fld id="{98742427-F07F-4004-869E-31B27D62AE65}" type="datetimeFigureOut">
               <a:rPr lang="he-IL" smtClean="0"/>
-              <a:t>י"ט/סיון/תשפ"ה</a:t>
+              <a:t>ג'/טבת/תשפ"ו</a:t>
             </a:fld>
             <a:endParaRPr lang="he-IL"/>
           </a:p>
@@ -10408,7 +10541,7 @@
           <a:p>
             <a:fld id="{98742427-F07F-4004-869E-31B27D62AE65}" type="datetimeFigureOut">
               <a:rPr lang="he-IL" smtClean="0"/>
-              <a:t>י"ט/סיון/תשפ"ה</a:t>
+              <a:t>ג'/טבת/תשפ"ו</a:t>
             </a:fld>
             <a:endParaRPr lang="he-IL"/>
           </a:p>
@@ -10720,7 +10853,7 @@
           <a:p>
             <a:fld id="{98742427-F07F-4004-869E-31B27D62AE65}" type="datetimeFigureOut">
               <a:rPr lang="he-IL" smtClean="0"/>
-              <a:t>י"ט/סיון/תשפ"ה</a:t>
+              <a:t>ג'/טבת/תשפ"ו</a:t>
             </a:fld>
             <a:endParaRPr lang="he-IL"/>
           </a:p>
@@ -11008,7 +11141,7 @@
           <a:p>
             <a:fld id="{98742427-F07F-4004-869E-31B27D62AE65}" type="datetimeFigureOut">
               <a:rPr lang="he-IL" smtClean="0"/>
-              <a:t>י"ט/סיון/תשפ"ה</a:t>
+              <a:t>ג'/טבת/תשפ"ו</a:t>
             </a:fld>
             <a:endParaRPr lang="he-IL"/>
           </a:p>
@@ -11207,7 +11340,7 @@
           <a:p>
             <a:fld id="{98742427-F07F-4004-869E-31B27D62AE65}" type="datetimeFigureOut">
               <a:rPr lang="he-IL" smtClean="0"/>
-              <a:t>י"ט/סיון/תשפ"ה</a:t>
+              <a:t>ג'/טבת/תשפ"ו</a:t>
             </a:fld>
             <a:endParaRPr lang="he-IL"/>
           </a:p>
@@ -11416,7 +11549,7 @@
           <a:p>
             <a:fld id="{98742427-F07F-4004-869E-31B27D62AE65}" type="datetimeFigureOut">
               <a:rPr lang="he-IL" smtClean="0"/>
-              <a:t>י"ט/סיון/תשפ"ה</a:t>
+              <a:t>ג'/טבת/תשפ"ו</a:t>
             </a:fld>
             <a:endParaRPr lang="he-IL"/>
           </a:p>
@@ -16632,7 +16765,7 @@
           <a:p>
             <a:fld id="{98742427-F07F-4004-869E-31B27D62AE65}" type="datetimeFigureOut">
               <a:rPr lang="he-IL" smtClean="0"/>
-              <a:t>י"ט/סיון/תשפ"ה</a:t>
+              <a:t>ג'/טבת/תשפ"ו</a:t>
             </a:fld>
             <a:endParaRPr lang="he-IL"/>
           </a:p>
@@ -19337,8 +19470,8 @@
         </p:nvSpPr>
         <p:spPr>
           <a:xfrm>
-            <a:off x="0" y="1097280"/>
-            <a:ext cx="10080720" cy="6579130"/>
+            <a:off x="-95" y="1188719"/>
+            <a:ext cx="10080720" cy="6225763"/>
           </a:xfrm>
           <a:prstGeom prst="rect">
             <a:avLst/>
@@ -19421,7 +19554,7 @@
                 <a:ea typeface="Liberation Serif" pitchFamily="18"/>
                 <a:cs typeface="Liberation Sans" pitchFamily="34"/>
               </a:rPr>
-              <a:t>, החציון המוכלל הוא אנונימי ומגלה-אמת.</a:t>
+              <a:t>, אלגוריתם החציון המוכלל הוא מגלה-אמת.</a:t>
             </a:r>
           </a:p>
           <a:p>
@@ -19439,7 +19572,7 @@
               <a:tabLst/>
             </a:pPr>
             <a:r>
-              <a:rPr lang="he-IL" sz="4000" b="0" i="1" u="none" strike="noStrike" kern="1200" cap="none">
+              <a:rPr lang="he-IL" sz="2800" b="1" u="none" strike="noStrike" kern="1200" cap="none">
                 <a:ln>
                   <a:noFill/>
                 </a:ln>
@@ -19450,7 +19583,7 @@
               <a:t>הוכחה</a:t>
             </a:r>
             <a:r>
-              <a:rPr lang="he-IL" sz="4000" b="0" i="0" u="none" strike="noStrike" kern="1200" cap="none">
+              <a:rPr lang="he-IL" sz="2800" b="0" i="0" u="none" strike="noStrike" kern="1200" cap="none">
                 <a:ln>
                   <a:noFill/>
                 </a:ln>
@@ -19461,7 +19594,7 @@
               <a:t>. </a:t>
             </a:r>
             <a:r>
-              <a:rPr lang="en-US" sz="4000" b="0" i="0" u="none" strike="noStrike" kern="1200" cap="none">
+              <a:rPr lang="en-US" sz="2800" b="0" i="0" u="none" strike="noStrike" kern="1200" cap="none">
                 <a:ln>
                   <a:noFill/>
                 </a:ln>
@@ -19472,7 +19605,7 @@
               <a:t>זהה לאלגוריתם החציון הרגיל</a:t>
             </a:r>
             <a:r>
-              <a:rPr lang="he-IL" sz="4000" b="0" i="0" u="none" strike="noStrike" kern="1200" cap="none">
+              <a:rPr lang="he-IL" sz="2800" b="0" i="0" u="none" strike="noStrike" kern="1200" cap="none">
                 <a:ln>
                   <a:noFill/>
                 </a:ln>
@@ -19481,17 +19614,6 @@
                 <a:cs typeface="Liberation Sans" pitchFamily="34"/>
               </a:rPr>
               <a:t>. </a:t>
-            </a:r>
-            <a:r>
-              <a:rPr lang="en-US" sz="4000" b="0" i="0" u="none" strike="noStrike" kern="1200" cap="none">
-                <a:ln>
-                  <a:noFill/>
-                </a:ln>
-                <a:latin typeface="Liberation Sans" pitchFamily="34"/>
-                <a:ea typeface="Liberation Serif" pitchFamily="18"/>
-                <a:cs typeface="Liberation Sans" pitchFamily="34"/>
-              </a:rPr>
-              <a:t> ***</a:t>
             </a:r>
           </a:p>
           <a:p>
@@ -19508,15 +19630,819 @@
               <a:buNone/>
               <a:tabLst/>
             </a:pPr>
-            <a:endParaRPr lang="en-US" sz="4000" b="0" i="0" u="none" strike="noStrike" kern="1200" cap="none">
+            <a:r>
+              <a:rPr lang="he-IL" sz="2800">
+                <a:solidFill>
+                  <a:schemeClr val="tx2">
+                    <a:lumMod val="75000"/>
+                    <a:lumOff val="25000"/>
+                  </a:schemeClr>
+                </a:solidFill>
+                <a:latin typeface="Liberation Sans" panose="020B0604020202020204" pitchFamily="34" charset="0"/>
+                <a:ea typeface="Liberation Sans" panose="020B0604020202020204" pitchFamily="34" charset="0"/>
+                <a:cs typeface="Liberation Sans" panose="020B0604020202020204" pitchFamily="34" charset="0"/>
+              </a:rPr>
+              <a:t>נוכיח טענה חזקה יותר: האלגוריתם מגלה</a:t>
+            </a:r>
+            <a:r>
+              <a:rPr lang="en-US" sz="2800">
+                <a:solidFill>
+                  <a:schemeClr val="tx2">
+                    <a:lumMod val="75000"/>
+                    <a:lumOff val="25000"/>
+                  </a:schemeClr>
+                </a:solidFill>
+                <a:latin typeface="Liberation Sans" panose="020B0604020202020204" pitchFamily="34" charset="0"/>
+                <a:ea typeface="Liberation Sans" panose="020B0604020202020204" pitchFamily="34" charset="0"/>
+                <a:cs typeface="Liberation Sans" panose="020B0604020202020204" pitchFamily="34" charset="0"/>
+              </a:rPr>
+              <a:t>-</a:t>
+            </a:r>
+            <a:r>
+              <a:rPr lang="he-IL" sz="2800">
+                <a:solidFill>
+                  <a:schemeClr val="tx2">
+                    <a:lumMod val="75000"/>
+                    <a:lumOff val="25000"/>
+                  </a:schemeClr>
+                </a:solidFill>
+                <a:latin typeface="Liberation Sans" panose="020B0604020202020204" pitchFamily="34" charset="0"/>
+                <a:ea typeface="Liberation Sans" panose="020B0604020202020204" pitchFamily="34" charset="0"/>
+                <a:cs typeface="Liberation Sans" panose="020B0604020202020204" pitchFamily="34" charset="0"/>
+              </a:rPr>
+              <a:t>אמת לא רק ליחידים אלא גם </a:t>
+            </a:r>
+            <a:r>
+              <a:rPr lang="he-IL" sz="2800" i="1">
+                <a:solidFill>
+                  <a:schemeClr val="tx2">
+                    <a:lumMod val="75000"/>
+                    <a:lumOff val="25000"/>
+                  </a:schemeClr>
+                </a:solidFill>
+                <a:latin typeface="Liberation Sans" panose="020B0604020202020204" pitchFamily="34" charset="0"/>
+                <a:ea typeface="Liberation Sans" panose="020B0604020202020204" pitchFamily="34" charset="0"/>
+                <a:cs typeface="Liberation Sans" panose="020B0604020202020204" pitchFamily="34" charset="0"/>
+              </a:rPr>
+              <a:t>לקבוצות (</a:t>
+            </a:r>
+            <a:r>
+              <a:rPr lang="en-US" sz="2800">
+                <a:solidFill>
+                  <a:schemeClr val="tx2">
+                    <a:lumMod val="75000"/>
+                    <a:lumOff val="25000"/>
+                  </a:schemeClr>
+                </a:solidFill>
+                <a:latin typeface="Liberation Sans" panose="020B0604020202020204" pitchFamily="34" charset="0"/>
+                <a:ea typeface="Liberation Sans" panose="020B0604020202020204" pitchFamily="34" charset="0"/>
+                <a:cs typeface="Liberation Sans" panose="020B0604020202020204" pitchFamily="34" charset="0"/>
+              </a:rPr>
+              <a:t>group strategyproof</a:t>
+            </a:r>
+            <a:r>
+              <a:rPr lang="he-IL" sz="2800">
+                <a:solidFill>
+                  <a:schemeClr val="tx2">
+                    <a:lumMod val="75000"/>
+                    <a:lumOff val="25000"/>
+                  </a:schemeClr>
+                </a:solidFill>
+                <a:latin typeface="Liberation Sans" panose="020B0604020202020204" pitchFamily="34" charset="0"/>
+                <a:ea typeface="Liberation Sans" panose="020B0604020202020204" pitchFamily="34" charset="0"/>
+                <a:cs typeface="Liberation Sans" panose="020B0604020202020204" pitchFamily="34" charset="0"/>
+              </a:rPr>
+              <a:t>):</a:t>
+            </a:r>
+            <a:r>
+              <a:rPr lang="en-US" sz="2800">
+                <a:solidFill>
+                  <a:schemeClr val="tx2">
+                    <a:lumMod val="75000"/>
+                    <a:lumOff val="25000"/>
+                  </a:schemeClr>
+                </a:solidFill>
+                <a:latin typeface="Liberation Sans" panose="020B0604020202020204" pitchFamily="34" charset="0"/>
+                <a:ea typeface="Liberation Sans" panose="020B0604020202020204" pitchFamily="34" charset="0"/>
+                <a:cs typeface="Liberation Sans" panose="020B0604020202020204" pitchFamily="34" charset="0"/>
+              </a:rPr>
+              <a:t> </a:t>
+            </a:r>
+            <a:r>
+              <a:rPr lang="he-IL" sz="2800">
+                <a:solidFill>
+                  <a:schemeClr val="tx2">
+                    <a:lumMod val="75000"/>
+                    <a:lumOff val="25000"/>
+                  </a:schemeClr>
+                </a:solidFill>
+                <a:latin typeface="Liberation Sans" panose="020B0604020202020204" pitchFamily="34" charset="0"/>
+                <a:ea typeface="Liberation Sans" panose="020B0604020202020204" pitchFamily="34" charset="0"/>
+                <a:cs typeface="Liberation Sans" panose="020B0604020202020204" pitchFamily="34" charset="0"/>
+              </a:rPr>
+              <a:t>אין קבוצה של אזרחים, היכולים לתאם ביניהם הצבעות, כך שהתוצאה תהיה טובה יותר לכולם</a:t>
+            </a:r>
+            <a:r>
+              <a:rPr lang="en-US" sz="2800">
+                <a:solidFill>
+                  <a:schemeClr val="tx2">
+                    <a:lumMod val="75000"/>
+                    <a:lumOff val="25000"/>
+                  </a:schemeClr>
+                </a:solidFill>
+                <a:latin typeface="Liberation Sans" panose="020B0604020202020204" pitchFamily="34" charset="0"/>
+                <a:ea typeface="Liberation Sans" panose="020B0604020202020204" pitchFamily="34" charset="0"/>
+                <a:cs typeface="Liberation Sans" panose="020B0604020202020204" pitchFamily="34" charset="0"/>
+              </a:rPr>
+              <a:t>.</a:t>
+            </a:r>
+            <a:endParaRPr lang="he-IL" sz="2800">
+              <a:solidFill>
+                <a:schemeClr val="tx2">
+                  <a:lumMod val="75000"/>
+                  <a:lumOff val="25000"/>
+                </a:schemeClr>
+              </a:solidFill>
+              <a:latin typeface="Liberation Sans" panose="020B0604020202020204" pitchFamily="34" charset="0"/>
+              <a:ea typeface="Liberation Sans" panose="020B0604020202020204" pitchFamily="34" charset="0"/>
+              <a:cs typeface="Liberation Sans" panose="020B0604020202020204" pitchFamily="34" charset="0"/>
+            </a:endParaRPr>
+          </a:p>
+          <a:p>
+            <a:pPr algn="r" rtl="1"/>
+            <a:r>
+              <a:rPr lang="he-IL" sz="2800">
+                <a:latin typeface="Liberation Sans" panose="020B0604020202020204" pitchFamily="34" charset="0"/>
+                <a:ea typeface="Liberation Sans" panose="020B0604020202020204" pitchFamily="34" charset="0"/>
+                <a:cs typeface="Liberation Sans" panose="020B0604020202020204" pitchFamily="34" charset="0"/>
+              </a:rPr>
+              <a:t>נסמן </a:t>
+            </a:r>
+            <a:r>
+              <a:rPr lang="en-US" sz="2800">
+                <a:latin typeface="Liberation Sans" panose="020B0604020202020204" pitchFamily="34" charset="0"/>
+                <a:ea typeface="Liberation Sans" panose="020B0604020202020204" pitchFamily="34" charset="0"/>
+                <a:cs typeface="Liberation Sans" panose="020B0604020202020204" pitchFamily="34" charset="0"/>
+              </a:rPr>
+              <a:t>x</a:t>
+            </a:r>
+            <a:r>
+              <a:rPr lang="he-IL" sz="2800">
+                <a:latin typeface="Liberation Sans" panose="020B0604020202020204" pitchFamily="34" charset="0"/>
+                <a:ea typeface="Liberation Sans" panose="020B0604020202020204" pitchFamily="34" charset="0"/>
+                <a:cs typeface="Liberation Sans" panose="020B0604020202020204" pitchFamily="34" charset="0"/>
+              </a:rPr>
+              <a:t> := הערך הנבחר כשכולם דוברי</a:t>
+            </a:r>
+            <a:r>
+              <a:rPr lang="en-US" sz="2800">
+                <a:latin typeface="Liberation Sans" panose="020B0604020202020204" pitchFamily="34" charset="0"/>
+                <a:ea typeface="Liberation Sans" panose="020B0604020202020204" pitchFamily="34" charset="0"/>
+                <a:cs typeface="Liberation Sans" panose="020B0604020202020204" pitchFamily="34" charset="0"/>
+              </a:rPr>
+              <a:t>-</a:t>
+            </a:r>
+            <a:r>
+              <a:rPr lang="he-IL" sz="2800">
+                <a:latin typeface="Liberation Sans" panose="020B0604020202020204" pitchFamily="34" charset="0"/>
+                <a:ea typeface="Liberation Sans" panose="020B0604020202020204" pitchFamily="34" charset="0"/>
+                <a:cs typeface="Liberation Sans" panose="020B0604020202020204" pitchFamily="34" charset="0"/>
+              </a:rPr>
+              <a:t>אמת. </a:t>
+            </a:r>
+            <a:r>
+              <a:rPr lang="he-IL" sz="2800">
+                <a:solidFill>
+                  <a:srgbClr val="7030A0"/>
+                </a:solidFill>
+                <a:latin typeface="Liberation Sans" panose="020B0604020202020204" pitchFamily="34" charset="0"/>
+                <a:ea typeface="Liberation Sans" panose="020B0604020202020204" pitchFamily="34" charset="0"/>
+                <a:cs typeface="Liberation Sans" panose="020B0604020202020204" pitchFamily="34" charset="0"/>
+              </a:rPr>
+              <a:t>קבוצה כלשהי </a:t>
+            </a:r>
+            <a:r>
+              <a:rPr lang="en-US" sz="2800">
+                <a:solidFill>
+                  <a:srgbClr val="7030A0"/>
+                </a:solidFill>
+                <a:latin typeface="Liberation Sans" panose="020B0604020202020204" pitchFamily="34" charset="0"/>
+                <a:ea typeface="Liberation Sans" panose="020B0604020202020204" pitchFamily="34" charset="0"/>
+                <a:cs typeface="Liberation Sans" panose="020B0604020202020204" pitchFamily="34" charset="0"/>
+              </a:rPr>
+              <a:t>S</a:t>
+            </a:r>
+            <a:r>
+              <a:rPr lang="he-IL" sz="2800">
+                <a:solidFill>
+                  <a:srgbClr val="7030A0"/>
+                </a:solidFill>
+                <a:latin typeface="Liberation Sans" panose="020B0604020202020204" pitchFamily="34" charset="0"/>
+                <a:ea typeface="Liberation Sans" panose="020B0604020202020204" pitchFamily="34" charset="0"/>
+                <a:cs typeface="Liberation Sans" panose="020B0604020202020204" pitchFamily="34" charset="0"/>
+              </a:rPr>
+              <a:t> שוקלת לתאם את ההצבעות כדי לשנות את </a:t>
+            </a:r>
+            <a:r>
+              <a:rPr lang="en-US" sz="2800">
+                <a:solidFill>
+                  <a:srgbClr val="7030A0"/>
+                </a:solidFill>
+                <a:latin typeface="Liberation Sans" panose="020B0604020202020204" pitchFamily="34" charset="0"/>
+                <a:ea typeface="Liberation Sans" panose="020B0604020202020204" pitchFamily="34" charset="0"/>
+                <a:cs typeface="Liberation Sans" panose="020B0604020202020204" pitchFamily="34" charset="0"/>
+              </a:rPr>
+              <a:t>x</a:t>
+            </a:r>
+            <a:r>
+              <a:rPr lang="he-IL" sz="2800">
+                <a:solidFill>
+                  <a:srgbClr val="7030A0"/>
+                </a:solidFill>
+                <a:latin typeface="Liberation Sans" panose="020B0604020202020204" pitchFamily="34" charset="0"/>
+                <a:ea typeface="Liberation Sans" panose="020B0604020202020204" pitchFamily="34" charset="0"/>
+                <a:cs typeface="Liberation Sans" panose="020B0604020202020204" pitchFamily="34" charset="0"/>
+              </a:rPr>
+              <a:t>. הם חייבים להסכים על כיוון השינוי. נניח בה"כ שהם מסכימים שצריך להגדיל את </a:t>
+            </a:r>
+            <a:r>
+              <a:rPr lang="en-US" sz="2800">
+                <a:solidFill>
+                  <a:srgbClr val="7030A0"/>
+                </a:solidFill>
+                <a:latin typeface="Liberation Sans" panose="020B0604020202020204" pitchFamily="34" charset="0"/>
+                <a:ea typeface="Liberation Sans" panose="020B0604020202020204" pitchFamily="34" charset="0"/>
+                <a:cs typeface="Liberation Sans" panose="020B0604020202020204" pitchFamily="34" charset="0"/>
+              </a:rPr>
+              <a:t>x</a:t>
+            </a:r>
+            <a:r>
+              <a:rPr lang="he-IL" sz="2800">
+                <a:solidFill>
+                  <a:srgbClr val="7030A0"/>
+                </a:solidFill>
+                <a:latin typeface="Liberation Sans" panose="020B0604020202020204" pitchFamily="34" charset="0"/>
+                <a:ea typeface="Liberation Sans" panose="020B0604020202020204" pitchFamily="34" charset="0"/>
+                <a:cs typeface="Liberation Sans" panose="020B0604020202020204" pitchFamily="34" charset="0"/>
+              </a:rPr>
+              <a:t> – כלומר ערכי האמת של כולם גדולים מ-</a:t>
+            </a:r>
+            <a:r>
+              <a:rPr lang="en-US" sz="2800">
+                <a:solidFill>
+                  <a:srgbClr val="7030A0"/>
+                </a:solidFill>
+                <a:latin typeface="Liberation Sans" panose="020B0604020202020204" pitchFamily="34" charset="0"/>
+                <a:ea typeface="Liberation Sans" panose="020B0604020202020204" pitchFamily="34" charset="0"/>
+                <a:cs typeface="Liberation Sans" panose="020B0604020202020204" pitchFamily="34" charset="0"/>
+              </a:rPr>
+              <a:t>x</a:t>
+            </a:r>
+            <a:r>
+              <a:rPr lang="he-IL" sz="2800">
+                <a:solidFill>
+                  <a:srgbClr val="7030A0"/>
+                </a:solidFill>
+                <a:latin typeface="Liberation Sans" panose="020B0604020202020204" pitchFamily="34" charset="0"/>
+                <a:ea typeface="Liberation Sans" panose="020B0604020202020204" pitchFamily="34" charset="0"/>
+                <a:cs typeface="Liberation Sans" panose="020B0604020202020204" pitchFamily="34" charset="0"/>
+              </a:rPr>
+              <a:t>.</a:t>
+            </a:r>
+          </a:p>
+          <a:p>
+            <a:pPr algn="r" rtl="1"/>
+            <a:r>
+              <a:rPr lang="en-US" sz="2800">
+                <a:solidFill>
+                  <a:schemeClr val="accent2">
+                    <a:lumMod val="75000"/>
+                  </a:schemeClr>
+                </a:solidFill>
+                <a:latin typeface="Liberation Sans" panose="020B0604020202020204" pitchFamily="34" charset="0"/>
+                <a:ea typeface="Liberation Sans" panose="020B0604020202020204" pitchFamily="34" charset="0"/>
+                <a:cs typeface="Liberation Sans" panose="020B0604020202020204" pitchFamily="34" charset="0"/>
+              </a:rPr>
+              <a:t>x</a:t>
+            </a:r>
+            <a:r>
+              <a:rPr lang="he-IL" sz="2800">
+                <a:solidFill>
+                  <a:schemeClr val="accent2">
+                    <a:lumMod val="75000"/>
+                  </a:schemeClr>
+                </a:solidFill>
+                <a:latin typeface="Liberation Sans" panose="020B0604020202020204" pitchFamily="34" charset="0"/>
+                <a:ea typeface="Liberation Sans" panose="020B0604020202020204" pitchFamily="34" charset="0"/>
+                <a:cs typeface="Liberation Sans" panose="020B0604020202020204" pitchFamily="34" charset="0"/>
+              </a:rPr>
+              <a:t> הוא חציון בקבוצה של </a:t>
+            </a:r>
+            <a:r>
+              <a:rPr lang="en-US" sz="2800">
+                <a:solidFill>
+                  <a:schemeClr val="accent2">
+                    <a:lumMod val="75000"/>
+                  </a:schemeClr>
+                </a:solidFill>
+                <a:latin typeface="Liberation Sans" panose="020B0604020202020204" pitchFamily="34" charset="0"/>
+                <a:ea typeface="Liberation Sans" panose="020B0604020202020204" pitchFamily="34" charset="0"/>
+                <a:cs typeface="Liberation Sans" panose="020B0604020202020204" pitchFamily="34" charset="0"/>
+              </a:rPr>
+              <a:t>n+k</a:t>
+            </a:r>
+            <a:r>
+              <a:rPr lang="he-IL" sz="2800">
+                <a:solidFill>
+                  <a:schemeClr val="accent2">
+                    <a:lumMod val="75000"/>
+                  </a:schemeClr>
+                </a:solidFill>
+                <a:latin typeface="Liberation Sans" panose="020B0604020202020204" pitchFamily="34" charset="0"/>
+                <a:ea typeface="Liberation Sans" panose="020B0604020202020204" pitchFamily="34" charset="0"/>
+                <a:cs typeface="Liberation Sans" panose="020B0604020202020204" pitchFamily="34" charset="0"/>
+              </a:rPr>
+              <a:t> הצבעות. לכן יש לפחות </a:t>
+            </a:r>
+            <a:r>
+              <a:rPr lang="en-US" sz="2800">
+                <a:solidFill>
+                  <a:schemeClr val="accent2">
+                    <a:lumMod val="75000"/>
+                  </a:schemeClr>
+                </a:solidFill>
+                <a:latin typeface="Liberation Sans" panose="020B0604020202020204" pitchFamily="34" charset="0"/>
+                <a:ea typeface="Liberation Sans" panose="020B0604020202020204" pitchFamily="34" charset="0"/>
+                <a:cs typeface="Liberation Sans" panose="020B0604020202020204" pitchFamily="34" charset="0"/>
+              </a:rPr>
+              <a:t>(n+k)/2</a:t>
+            </a:r>
+            <a:r>
+              <a:rPr lang="he-IL" sz="2800">
+                <a:solidFill>
+                  <a:schemeClr val="accent2">
+                    <a:lumMod val="75000"/>
+                  </a:schemeClr>
+                </a:solidFill>
+                <a:latin typeface="Liberation Sans" panose="020B0604020202020204" pitchFamily="34" charset="0"/>
+                <a:ea typeface="Liberation Sans" panose="020B0604020202020204" pitchFamily="34" charset="0"/>
+                <a:cs typeface="Liberation Sans" panose="020B0604020202020204" pitchFamily="34" charset="0"/>
+              </a:rPr>
+              <a:t> הצבעות </a:t>
+            </a:r>
+            <a:r>
+              <a:rPr lang="he-IL">
+                <a:solidFill>
+                  <a:schemeClr val="accent2">
+                    <a:lumMod val="75000"/>
+                  </a:schemeClr>
+                </a:solidFill>
+                <a:latin typeface="Liberation Sans" panose="020B0604020202020204" pitchFamily="34" charset="0"/>
+                <a:ea typeface="Liberation Sans" panose="020B0604020202020204" pitchFamily="34" charset="0"/>
+                <a:cs typeface="Liberation Sans" panose="020B0604020202020204" pitchFamily="34" charset="0"/>
+              </a:rPr>
+              <a:t>(של אזרחים אחרים, או קבועות)</a:t>
+            </a:r>
+            <a:r>
+              <a:rPr lang="en-US">
+                <a:solidFill>
+                  <a:schemeClr val="accent2">
+                    <a:lumMod val="75000"/>
+                  </a:schemeClr>
+                </a:solidFill>
+                <a:latin typeface="Liberation Sans" panose="020B0604020202020204" pitchFamily="34" charset="0"/>
+                <a:ea typeface="Liberation Sans" panose="020B0604020202020204" pitchFamily="34" charset="0"/>
+                <a:cs typeface="Liberation Sans" panose="020B0604020202020204" pitchFamily="34" charset="0"/>
+              </a:rPr>
+              <a:t> </a:t>
+            </a:r>
+            <a:r>
+              <a:rPr lang="he-IL" sz="2800">
+                <a:solidFill>
+                  <a:schemeClr val="accent2">
+                    <a:lumMod val="75000"/>
+                  </a:schemeClr>
+                </a:solidFill>
+                <a:latin typeface="Liberation Sans" panose="020B0604020202020204" pitchFamily="34" charset="0"/>
+                <a:ea typeface="Liberation Sans" panose="020B0604020202020204" pitchFamily="34" charset="0"/>
+                <a:cs typeface="Liberation Sans" panose="020B0604020202020204" pitchFamily="34" charset="0"/>
+              </a:rPr>
+              <a:t>שהן &lt;= </a:t>
+            </a:r>
+            <a:r>
+              <a:rPr lang="en-US" sz="2800">
+                <a:solidFill>
+                  <a:schemeClr val="accent2">
+                    <a:lumMod val="75000"/>
+                  </a:schemeClr>
+                </a:solidFill>
+                <a:latin typeface="Liberation Sans" panose="020B0604020202020204" pitchFamily="34" charset="0"/>
+                <a:ea typeface="Liberation Sans" panose="020B0604020202020204" pitchFamily="34" charset="0"/>
+                <a:cs typeface="Liberation Sans" panose="020B0604020202020204" pitchFamily="34" charset="0"/>
+              </a:rPr>
+              <a:t>x</a:t>
+            </a:r>
+            <a:r>
+              <a:rPr lang="he-IL" sz="2800">
+                <a:solidFill>
+                  <a:schemeClr val="accent2">
+                    <a:lumMod val="75000"/>
+                  </a:schemeClr>
+                </a:solidFill>
+                <a:latin typeface="Liberation Sans" panose="020B0604020202020204" pitchFamily="34" charset="0"/>
+                <a:ea typeface="Liberation Sans" panose="020B0604020202020204" pitchFamily="34" charset="0"/>
+                <a:cs typeface="Liberation Sans" panose="020B0604020202020204" pitchFamily="34" charset="0"/>
+              </a:rPr>
+              <a:t>. ההצבעות הללו </a:t>
+            </a:r>
+            <a:r>
+              <a:rPr lang="he-IL" sz="2800" i="1">
+                <a:solidFill>
+                  <a:schemeClr val="accent2">
+                    <a:lumMod val="75000"/>
+                  </a:schemeClr>
+                </a:solidFill>
+                <a:latin typeface="Liberation Sans" panose="020B0604020202020204" pitchFamily="34" charset="0"/>
+                <a:ea typeface="Liberation Sans" panose="020B0604020202020204" pitchFamily="34" charset="0"/>
+                <a:cs typeface="Liberation Sans" panose="020B0604020202020204" pitchFamily="34" charset="0"/>
+              </a:rPr>
+              <a:t>אינן</a:t>
+            </a:r>
+            <a:r>
+              <a:rPr lang="he-IL" sz="2800">
+                <a:solidFill>
+                  <a:schemeClr val="accent2">
+                    <a:lumMod val="75000"/>
+                  </a:schemeClr>
+                </a:solidFill>
+                <a:latin typeface="Liberation Sans" panose="020B0604020202020204" pitchFamily="34" charset="0"/>
+                <a:ea typeface="Liberation Sans" panose="020B0604020202020204" pitchFamily="34" charset="0"/>
+                <a:cs typeface="Liberation Sans" panose="020B0604020202020204" pitchFamily="34" charset="0"/>
+              </a:rPr>
+              <a:t> של חברי</a:t>
+            </a:r>
+            <a:r>
+              <a:rPr lang="en-US" sz="2800">
+                <a:solidFill>
+                  <a:schemeClr val="accent2">
+                    <a:lumMod val="75000"/>
+                  </a:schemeClr>
+                </a:solidFill>
+                <a:latin typeface="Liberation Sans" panose="020B0604020202020204" pitchFamily="34" charset="0"/>
+                <a:ea typeface="Liberation Sans" panose="020B0604020202020204" pitchFamily="34" charset="0"/>
+                <a:cs typeface="Liberation Sans" panose="020B0604020202020204" pitchFamily="34" charset="0"/>
+              </a:rPr>
+              <a:t>S </a:t>
+            </a:r>
+            <a:r>
+              <a:rPr lang="he-IL" sz="2800">
+                <a:solidFill>
+                  <a:schemeClr val="accent2">
+                    <a:lumMod val="75000"/>
+                  </a:schemeClr>
+                </a:solidFill>
+                <a:latin typeface="Liberation Sans" panose="020B0604020202020204" pitchFamily="34" charset="0"/>
+                <a:ea typeface="Liberation Sans" panose="020B0604020202020204" pitchFamily="34" charset="0"/>
+                <a:cs typeface="Liberation Sans" panose="020B0604020202020204" pitchFamily="34" charset="0"/>
+              </a:rPr>
+              <a:t>. לכן, לכל פעולה של חברי </a:t>
+            </a:r>
+            <a:r>
+              <a:rPr lang="en-US" sz="2800">
+                <a:solidFill>
+                  <a:schemeClr val="accent2">
+                    <a:lumMod val="75000"/>
+                  </a:schemeClr>
+                </a:solidFill>
+                <a:latin typeface="Liberation Sans" panose="020B0604020202020204" pitchFamily="34" charset="0"/>
+                <a:ea typeface="Liberation Sans" panose="020B0604020202020204" pitchFamily="34" charset="0"/>
+                <a:cs typeface="Liberation Sans" panose="020B0604020202020204" pitchFamily="34" charset="0"/>
+              </a:rPr>
+              <a:t>S</a:t>
+            </a:r>
+            <a:r>
+              <a:rPr lang="he-IL" sz="2800">
+                <a:solidFill>
+                  <a:schemeClr val="accent2">
+                    <a:lumMod val="75000"/>
+                  </a:schemeClr>
+                </a:solidFill>
+                <a:latin typeface="Liberation Sans" panose="020B0604020202020204" pitchFamily="34" charset="0"/>
+                <a:ea typeface="Liberation Sans" panose="020B0604020202020204" pitchFamily="34" charset="0"/>
+                <a:cs typeface="Liberation Sans" panose="020B0604020202020204" pitchFamily="34" charset="0"/>
+              </a:rPr>
+              <a:t>, עדיין יהיו לפחות </a:t>
+            </a:r>
+            <a:r>
+              <a:rPr lang="en-US" sz="2800">
+                <a:solidFill>
+                  <a:schemeClr val="accent2">
+                    <a:lumMod val="75000"/>
+                  </a:schemeClr>
+                </a:solidFill>
+                <a:latin typeface="Liberation Sans" panose="020B0604020202020204" pitchFamily="34" charset="0"/>
+                <a:ea typeface="Liberation Sans" panose="020B0604020202020204" pitchFamily="34" charset="0"/>
+                <a:cs typeface="Liberation Sans" panose="020B0604020202020204" pitchFamily="34" charset="0"/>
+              </a:rPr>
+              <a:t>(n+k)/2</a:t>
+            </a:r>
+            <a:r>
+              <a:rPr lang="he-IL" sz="2800">
+                <a:solidFill>
+                  <a:schemeClr val="accent2">
+                    <a:lumMod val="75000"/>
+                  </a:schemeClr>
+                </a:solidFill>
+                <a:latin typeface="Liberation Sans" panose="020B0604020202020204" pitchFamily="34" charset="0"/>
+                <a:ea typeface="Liberation Sans" panose="020B0604020202020204" pitchFamily="34" charset="0"/>
+                <a:cs typeface="Liberation Sans" panose="020B0604020202020204" pitchFamily="34" charset="0"/>
+              </a:rPr>
+              <a:t> הצבעות &lt;= </a:t>
+            </a:r>
+            <a:r>
+              <a:rPr lang="en-US" sz="2800">
+                <a:solidFill>
+                  <a:schemeClr val="accent2">
+                    <a:lumMod val="75000"/>
+                  </a:schemeClr>
+                </a:solidFill>
+                <a:latin typeface="Liberation Sans" panose="020B0604020202020204" pitchFamily="34" charset="0"/>
+                <a:ea typeface="Liberation Sans" panose="020B0604020202020204" pitchFamily="34" charset="0"/>
+                <a:cs typeface="Liberation Sans" panose="020B0604020202020204" pitchFamily="34" charset="0"/>
+              </a:rPr>
+              <a:t>x</a:t>
+            </a:r>
+            <a:r>
+              <a:rPr lang="he-IL" sz="2800">
+                <a:solidFill>
+                  <a:schemeClr val="accent2">
+                    <a:lumMod val="75000"/>
+                  </a:schemeClr>
+                </a:solidFill>
+                <a:latin typeface="Liberation Sans" panose="020B0604020202020204" pitchFamily="34" charset="0"/>
+                <a:ea typeface="Liberation Sans" panose="020B0604020202020204" pitchFamily="34" charset="0"/>
+                <a:cs typeface="Liberation Sans" panose="020B0604020202020204" pitchFamily="34" charset="0"/>
+              </a:rPr>
+              <a:t>.</a:t>
+            </a:r>
+            <a:r>
+              <a:rPr lang="en-US" sz="2800">
+                <a:solidFill>
+                  <a:schemeClr val="accent2">
+                    <a:lumMod val="75000"/>
+                  </a:schemeClr>
+                </a:solidFill>
+                <a:latin typeface="Liberation Sans" panose="020B0604020202020204" pitchFamily="34" charset="0"/>
+                <a:ea typeface="Liberation Sans" panose="020B0604020202020204" pitchFamily="34" charset="0"/>
+                <a:cs typeface="Liberation Sans" panose="020B0604020202020204" pitchFamily="34" charset="0"/>
+              </a:rPr>
+              <a:t> </a:t>
+            </a:r>
+            <a:r>
+              <a:rPr lang="he-IL" sz="2800">
+                <a:solidFill>
+                  <a:schemeClr val="accent2">
+                    <a:lumMod val="75000"/>
+                  </a:schemeClr>
+                </a:solidFill>
+                <a:latin typeface="Liberation Sans" panose="020B0604020202020204" pitchFamily="34" charset="0"/>
+                <a:ea typeface="Liberation Sans" panose="020B0604020202020204" pitchFamily="34" charset="0"/>
+                <a:cs typeface="Liberation Sans" panose="020B0604020202020204" pitchFamily="34" charset="0"/>
+              </a:rPr>
+              <a:t>לכן החציון יהיה &lt;= </a:t>
+            </a:r>
+            <a:r>
+              <a:rPr lang="en-US" sz="2800">
+                <a:solidFill>
+                  <a:schemeClr val="accent2">
+                    <a:lumMod val="75000"/>
+                  </a:schemeClr>
+                </a:solidFill>
+                <a:latin typeface="Liberation Sans" panose="020B0604020202020204" pitchFamily="34" charset="0"/>
+                <a:ea typeface="Liberation Sans" panose="020B0604020202020204" pitchFamily="34" charset="0"/>
+                <a:cs typeface="Liberation Sans" panose="020B0604020202020204" pitchFamily="34" charset="0"/>
+              </a:rPr>
+              <a:t>x</a:t>
+            </a:r>
+            <a:r>
+              <a:rPr lang="he-IL" sz="2800">
+                <a:solidFill>
+                  <a:schemeClr val="accent2">
+                    <a:lumMod val="75000"/>
+                  </a:schemeClr>
+                </a:solidFill>
+                <a:latin typeface="Liberation Sans" panose="020B0604020202020204" pitchFamily="34" charset="0"/>
+                <a:ea typeface="Liberation Sans" panose="020B0604020202020204" pitchFamily="34" charset="0"/>
+                <a:cs typeface="Liberation Sans" panose="020B0604020202020204" pitchFamily="34" charset="0"/>
+              </a:rPr>
+              <a:t>. </a:t>
+            </a:r>
+            <a:r>
+              <a:rPr lang="he-IL" sz="2800">
+                <a:solidFill>
+                  <a:srgbClr val="7030A0"/>
+                </a:solidFill>
+                <a:latin typeface="Liberation Sans" panose="020B0604020202020204" pitchFamily="34" charset="0"/>
+                <a:ea typeface="Liberation Sans" panose="020B0604020202020204" pitchFamily="34" charset="0"/>
+                <a:cs typeface="Liberation Sans" panose="020B0604020202020204" pitchFamily="34" charset="0"/>
+              </a:rPr>
+              <a:t>לכן חברי </a:t>
+            </a:r>
+            <a:r>
+              <a:rPr lang="en-US" sz="2800">
+                <a:solidFill>
+                  <a:srgbClr val="7030A0"/>
+                </a:solidFill>
+                <a:latin typeface="Liberation Sans" panose="020B0604020202020204" pitchFamily="34" charset="0"/>
+                <a:ea typeface="Liberation Sans" panose="020B0604020202020204" pitchFamily="34" charset="0"/>
+                <a:cs typeface="Liberation Sans" panose="020B0604020202020204" pitchFamily="34" charset="0"/>
+              </a:rPr>
+              <a:t>S</a:t>
+            </a:r>
+            <a:r>
+              <a:rPr lang="he-IL" sz="2800">
+                <a:solidFill>
+                  <a:srgbClr val="7030A0"/>
+                </a:solidFill>
+                <a:latin typeface="Liberation Sans" panose="020B0604020202020204" pitchFamily="34" charset="0"/>
+                <a:ea typeface="Liberation Sans" panose="020B0604020202020204" pitchFamily="34" charset="0"/>
+                <a:cs typeface="Liberation Sans" panose="020B0604020202020204" pitchFamily="34" charset="0"/>
+              </a:rPr>
+              <a:t> לא ירויחו. ***</a:t>
+            </a:r>
+            <a:endParaRPr lang="en-US" sz="2800">
+              <a:solidFill>
+                <a:srgbClr val="7030A0"/>
+              </a:solidFill>
+              <a:latin typeface="Liberation Sans" panose="020B0604020202020204" pitchFamily="34" charset="0"/>
+              <a:ea typeface="Liberation Sans" panose="020B0604020202020204" pitchFamily="34" charset="0"/>
+              <a:cs typeface="Liberation Sans" panose="020B0604020202020204" pitchFamily="34" charset="0"/>
+            </a:endParaRPr>
+          </a:p>
+        </p:txBody>
+      </p:sp>
+    </p:spTree>
+  </p:cSld>
+  <p:clrMapOvr>
+    <a:masterClrMapping/>
+  </p:clrMapOvr>
+</p:sld>
+</file>
+
+<file path=ppt/slides/slide12.xml><?xml version="1.0" encoding="utf-8"?>
+<p:sld xmlns:a="http://schemas.openxmlformats.org/drawingml/2006/main" xmlns:r="http://schemas.openxmlformats.org/officeDocument/2006/relationships" xmlns:p="http://schemas.openxmlformats.org/presentationml/2006/main">
+  <p:cSld>
+    <p:spTree>
+      <p:nvGrpSpPr>
+        <p:cNvPr id="1" name="">
+          <a:extLst>
+            <a:ext uri="{FF2B5EF4-FFF2-40B4-BE49-F238E27FC236}">
+              <a16:creationId xmlns:a16="http://schemas.microsoft.com/office/drawing/2014/main" id="{0FF15C3C-0E99-A8BA-AE5D-CCBF0CADD7F6}"/>
+            </a:ext>
+          </a:extLst>
+        </p:cNvPr>
+        <p:cNvGrpSpPr/>
+        <p:nvPr/>
+      </p:nvGrpSpPr>
+      <p:grpSpPr>
+        <a:xfrm>
+          <a:off x="0" y="0"/>
+          <a:ext cx="0" cy="0"/>
+          <a:chOff x="0" y="0"/>
+          <a:chExt cx="0" cy="0"/>
+        </a:xfrm>
+      </p:grpSpPr>
+      <p:sp>
+        <p:nvSpPr>
+          <p:cNvPr id="2" name="Title 1_4">
+            <a:extLst>
+              <a:ext uri="{FF2B5EF4-FFF2-40B4-BE49-F238E27FC236}">
+                <a16:creationId xmlns:a16="http://schemas.microsoft.com/office/drawing/2014/main" id="{67B3E472-7960-EB6E-4E9D-E1F6826F6727}"/>
+              </a:ext>
+            </a:extLst>
+          </p:cNvPr>
+          <p:cNvSpPr txBox="1">
+            <a:spLocks noGrp="1"/>
+          </p:cNvSpPr>
+          <p:nvPr>
+            <p:ph type="title" idx="4294967295"/>
+          </p:nvPr>
+        </p:nvSpPr>
+        <p:spPr>
+          <a:xfrm>
+            <a:off x="274320" y="-91440"/>
+            <a:ext cx="9601200" cy="1460880"/>
+          </a:xfrm>
+        </p:spPr>
+        <p:txBody>
+          <a:bodyPr vert="horz" wrap="square" lIns="91440" tIns="45720" rIns="91440" bIns="45720">
+            <a:noAutofit/>
+          </a:bodyPr>
+          <a:lstStyle/>
+          <a:p>
+            <a:pPr lvl="0" rtl="1" hangingPunct="1">
+              <a:lnSpc>
+                <a:spcPct val="90000"/>
+              </a:lnSpc>
+            </a:pPr>
+            <a:r>
+              <a:rPr lang="he-IL" sz="5400">
+                <a:solidFill>
+                  <a:srgbClr val="000000"/>
+                </a:solidFill>
+                <a:latin typeface="Liberation Sans" pitchFamily="34"/>
+                <a:cs typeface="Liberation Sans" pitchFamily="34"/>
+              </a:rPr>
+              <a:t>החציון המוכלל - תכונות</a:t>
+            </a:r>
+          </a:p>
+        </p:txBody>
+      </p:sp>
+      <p:sp>
+        <p:nvSpPr>
+          <p:cNvPr id="3" name="Content Placeholder 2_4">
+            <a:extLst>
+              <a:ext uri="{FF2B5EF4-FFF2-40B4-BE49-F238E27FC236}">
+                <a16:creationId xmlns:a16="http://schemas.microsoft.com/office/drawing/2014/main" id="{E8C4DB47-CE98-2516-11BB-DCF945C0EDAE}"/>
+              </a:ext>
+            </a:extLst>
+          </p:cNvPr>
+          <p:cNvSpPr txBox="1"/>
+          <p:nvPr/>
+        </p:nvSpPr>
+        <p:spPr>
+          <a:xfrm>
+            <a:off x="457200" y="1188719"/>
+            <a:ext cx="8694360" cy="4796280"/>
+          </a:xfrm>
+          <a:prstGeom prst="rect">
+            <a:avLst/>
+          </a:prstGeom>
+          <a:noFill/>
+          <a:ln>
+            <a:noFill/>
+          </a:ln>
+        </p:spPr>
+        <p:txBody>
+          <a:bodyPr wrap="square" lIns="91440" tIns="45720" rIns="91440" bIns="45720" anchor="t" compatLnSpc="0">
+            <a:noAutofit/>
+          </a:bodyPr>
+          <a:lstStyle/>
+          <a:p>
+            <a:pPr marL="0" marR="0" lvl="0" indent="0" algn="l" hangingPunct="0">
+              <a:spcBef>
+                <a:spcPts val="2750"/>
+              </a:spcBef>
+              <a:spcAft>
+                <a:spcPts val="0"/>
+              </a:spcAft>
+              <a:buNone/>
+              <a:tabLst/>
+            </a:pPr>
+            <a:endParaRPr lang="en-US" sz="3000" b="0" i="0" u="none" strike="noStrike" kern="1200" spc="0">
               <a:ln>
                 <a:noFill/>
               </a:ln>
-              <a:latin typeface="Liberation Sans" pitchFamily="34"/>
-              <a:ea typeface="Liberation Serif" pitchFamily="18"/>
-              <a:cs typeface="Liberation Sans" pitchFamily="34"/>
+              <a:solidFill>
+                <a:srgbClr val="000000"/>
+              </a:solidFill>
+              <a:latin typeface="ＭＳ Ｐゴシック" pitchFamily="18"/>
+              <a:ea typeface="Liberation Sans" pitchFamily="34"/>
+              <a:cs typeface="DejaVu Sans" pitchFamily="2"/>
             </a:endParaRPr>
           </a:p>
+        </p:txBody>
+      </p:sp>
+      <p:sp>
+        <p:nvSpPr>
+          <p:cNvPr id="4" name="TextBox 3">
+            <a:extLst>
+              <a:ext uri="{FF2B5EF4-FFF2-40B4-BE49-F238E27FC236}">
+                <a16:creationId xmlns:a16="http://schemas.microsoft.com/office/drawing/2014/main" id="{03E93E5E-4C7B-D75C-AE41-D626CDB49552}"/>
+              </a:ext>
+            </a:extLst>
+          </p:cNvPr>
+          <p:cNvSpPr txBox="1"/>
+          <p:nvPr/>
+        </p:nvSpPr>
+        <p:spPr>
+          <a:xfrm>
+            <a:off x="0" y="1097280"/>
+            <a:ext cx="10080720" cy="4219766"/>
+          </a:xfrm>
+          <a:prstGeom prst="rect">
+            <a:avLst/>
+          </a:prstGeom>
+          <a:noFill/>
+          <a:ln>
+            <a:noFill/>
+          </a:ln>
+        </p:spPr>
+        <p:txBody>
+          <a:bodyPr vert="horz" wrap="square" lIns="90000" tIns="45000" rIns="90000" bIns="45000" anchorCtr="0" compatLnSpc="0">
+            <a:spAutoFit/>
+          </a:bodyPr>
+          <a:lstStyle/>
           <a:p>
             <a:pPr marL="0" marR="0" lvl="0" indent="0" algn="r" rtl="1" hangingPunct="0">
               <a:lnSpc>
@@ -19924,6 +20850,11 @@
         </p:txBody>
       </p:sp>
     </p:spTree>
+    <p:extLst>
+      <p:ext uri="{BB962C8B-B14F-4D97-AF65-F5344CB8AC3E}">
+        <p14:creationId xmlns:p14="http://schemas.microsoft.com/office/powerpoint/2010/main" val="4092775674"/>
+      </p:ext>
+    </p:extLst>
   </p:cSld>
   <p:clrMapOvr>
     <a:masterClrMapping/>
@@ -19931,7 +20862,7 @@
 </p:sld>
 </file>
 
-<file path=ppt/slides/slide12.xml><?xml version="1.0" encoding="utf-8"?>
+<file path=ppt/slides/slide13.xml><?xml version="1.0" encoding="utf-8"?>
 <p:sld xmlns:a="http://schemas.openxmlformats.org/drawingml/2006/main" xmlns:r="http://schemas.openxmlformats.org/officeDocument/2006/relationships" xmlns:p="http://schemas.openxmlformats.org/presentationml/2006/main">
   <p:cSld name="page12">
     <p:spTree>
@@ -21383,7 +22314,7 @@
 </p:sld>
 </file>
 
-<file path=ppt/slides/slide13.xml><?xml version="1.0" encoding="utf-8"?>
+<file path=ppt/slides/slide14.xml><?xml version="1.0" encoding="utf-8"?>
 <p:sld xmlns:a="http://schemas.openxmlformats.org/drawingml/2006/main" xmlns:r="http://schemas.openxmlformats.org/officeDocument/2006/relationships" xmlns:p="http://schemas.openxmlformats.org/presentationml/2006/main">
   <p:cSld name="page13">
     <p:spTree>
@@ -22148,19 +23079,36 @@
                 <a:ea typeface="Noto Sans CJK SC Regular" pitchFamily="2"/>
                 <a:cs typeface="Liberation Sans" pitchFamily="34"/>
               </a:rPr>
-              <a:t>אבל האלגוריתם לא יהיה מגלה-אמת.</a:t>
-            </a:r>
-            <a:endParaRPr lang="he-IL" sz="4000" b="0" i="0" u="none" strike="noStrike" kern="1200" cap="none">
-              <a:ln>
-                <a:noFill/>
-              </a:ln>
-              <a:solidFill>
-                <a:srgbClr val="FF8000"/>
-              </a:solidFill>
-              <a:latin typeface="Liberation Sans" pitchFamily="34"/>
-              <a:ea typeface="Noto Sans CJK SC Regular" pitchFamily="2"/>
-              <a:cs typeface="Liberation Sans" pitchFamily="34"/>
-            </a:endParaRPr>
+              <a:t>אבל האלגוריתם לא יהיה מגלה-אמת</a:t>
+            </a:r>
+            <a:r>
+              <a:rPr lang="he-IL" sz="4000" b="0" i="0" u="none" strike="noStrike" kern="1200" cap="none">
+                <a:ln>
+                  <a:noFill/>
+                </a:ln>
+                <a:solidFill>
+                  <a:srgbClr val="FF8000"/>
+                </a:solidFill>
+                <a:latin typeface="Liberation Sans" pitchFamily="34"/>
+                <a:ea typeface="Noto Sans CJK SC Regular" pitchFamily="2"/>
+                <a:cs typeface="Liberation Sans" pitchFamily="34"/>
+              </a:rPr>
+              <a:t> </a:t>
+            </a:r>
+            <a:r>
+              <a:rPr lang="he-IL" sz="2000" b="0" i="0" u="none" strike="noStrike" kern="1200" cap="none">
+                <a:ln>
+                  <a:noFill/>
+                </a:ln>
+                <a:solidFill>
+                  <a:srgbClr val="FF8000"/>
+                </a:solidFill>
+                <a:latin typeface="Liberation Sans" pitchFamily="34"/>
+                <a:ea typeface="Noto Sans CJK SC Regular" pitchFamily="2"/>
+                <a:cs typeface="Liberation Sans" pitchFamily="34"/>
+              </a:rPr>
+              <a:t>[הוכחה מתחת לשקף]</a:t>
+            </a:r>
           </a:p>
           <a:p>
             <a:pPr marL="0" marR="0" lvl="0" indent="0" algn="r" rtl="1" hangingPunct="0">
@@ -22649,6 +23597,20 @@
                 <a:cs typeface="Liberation Sans" pitchFamily="34"/>
               </a:rPr>
               <a:t>5/6 + 45/6 + 50/6 = 100/6 ~ 16.7</a:t>
+            </a:r>
+            <a:r>
+              <a:rPr lang="he-IL" sz="2400" b="0" i="0" u="none" strike="noStrike" kern="1200" cap="none">
+                <a:ln>
+                  <a:noFill/>
+                </a:ln>
+                <a:solidFill>
+                  <a:srgbClr val="00A933"/>
+                </a:solidFill>
+                <a:latin typeface="Liberation Sans" pitchFamily="34"/>
+                <a:ea typeface="Noto Sans CJK SC Regular" pitchFamily="2"/>
+                <a:cs typeface="Liberation Sans" pitchFamily="34"/>
+              </a:rPr>
+              <a:t>.</a:t>
             </a:r>
             <a:endParaRPr lang="en-US" sz="2400" b="0" i="0" u="none" strike="noStrike" kern="1200" cap="none">
               <a:ln>
@@ -23118,7 +24080,7 @@
 </p:sld>
 </file>
 
-<file path=ppt/slides/slide14.xml><?xml version="1.0" encoding="utf-8"?>
+<file path=ppt/slides/slide15.xml><?xml version="1.0" encoding="utf-8"?>
 <p:sld xmlns:a="http://schemas.openxmlformats.org/drawingml/2006/main" xmlns:r="http://schemas.openxmlformats.org/officeDocument/2006/relationships" xmlns:p="http://schemas.openxmlformats.org/presentationml/2006/main">
   <p:cSld name="page14">
     <p:spTree>
@@ -23176,8 +24138,34 @@
                 <a:latin typeface="Liberation Sans" pitchFamily="34"/>
                 <a:cs typeface="Liberation Sans" pitchFamily="34"/>
               </a:rPr>
-              <a:t>חציון מוכלל עם פונקציות עולות</a:t>
-            </a:r>
+              <a:t>אלגוריתם הפנטומים הזזים</a:t>
+            </a:r>
+            <a:br>
+              <a:rPr lang="he-IL" sz="5400">
+                <a:solidFill>
+                  <a:srgbClr val="000000"/>
+                </a:solidFill>
+                <a:latin typeface="Liberation Sans" pitchFamily="34"/>
+                <a:cs typeface="Liberation Sans" pitchFamily="34"/>
+              </a:rPr>
+            </a:br>
+            <a:r>
+              <a:rPr lang="en-US" sz="3600">
+                <a:solidFill>
+                  <a:srgbClr val="000000"/>
+                </a:solidFill>
+                <a:latin typeface="Liberation Sans" pitchFamily="34"/>
+                <a:cs typeface="Liberation Sans" pitchFamily="34"/>
+              </a:rPr>
+              <a:t>(moving phantoms)</a:t>
+            </a:r>
+            <a:endParaRPr lang="he-IL" sz="5400">
+              <a:solidFill>
+                <a:srgbClr val="000000"/>
+              </a:solidFill>
+              <a:latin typeface="Liberation Sans" pitchFamily="34"/>
+              <a:cs typeface="Liberation Sans" pitchFamily="34"/>
+            </a:endParaRPr>
           </a:p>
         </p:txBody>
       </p:sp>
@@ -23250,8 +24238,8 @@
         </p:nvSpPr>
         <p:spPr>
           <a:xfrm>
-            <a:off x="-24523" y="971568"/>
-            <a:ext cx="10080720" cy="6588107"/>
+            <a:off x="-95" y="1369440"/>
+            <a:ext cx="10080720" cy="5938762"/>
           </a:xfrm>
           <a:prstGeom prst="rect">
             <a:avLst/>
@@ -23283,7 +24271,7 @@
               <a:tabLst/>
             </a:pPr>
             <a:r>
-              <a:rPr lang="he-IL" sz="4000" b="0" i="0" u="none" strike="noStrike" kern="1200" cap="none">
+              <a:rPr lang="he-IL" sz="3600" b="0" i="0" u="none" strike="noStrike" kern="1200" cap="none">
                 <a:ln>
                   <a:noFill/>
                 </a:ln>
@@ -23294,7 +24282,7 @@
               <a:t>בחר מראש קבוצה של </a:t>
             </a:r>
             <a:r>
-              <a:rPr lang="he-IL" sz="4000" b="0" i="1" u="none" strike="noStrike" kern="1200" cap="none">
+              <a:rPr lang="he-IL" sz="3600" b="0" i="1" u="none" strike="noStrike" kern="1200" cap="none">
                 <a:ln>
                   <a:noFill/>
                 </a:ln>
@@ -23305,7 +24293,7 @@
               <a:t>פונקציות</a:t>
             </a:r>
             <a:r>
-              <a:rPr lang="en-US" sz="4000" b="0" i="0" u="none" strike="noStrike" kern="1200" cap="none">
+              <a:rPr lang="en-US" sz="3600" b="0" i="0" u="none" strike="noStrike" kern="1200" cap="none">
                 <a:ln>
                   <a:noFill/>
                 </a:ln>
@@ -23331,7 +24319,7 @@
               <a:tabLst/>
             </a:pPr>
             <a:r>
-              <a:rPr lang="en-US" sz="4000" b="0" i="0" u="none" strike="noStrike" kern="1200" cap="none">
+              <a:rPr lang="en-US" sz="3600" b="0" i="0" u="none" strike="noStrike" kern="1200" cap="none">
                 <a:ln>
                   <a:noFill/>
                 </a:ln>
@@ -23342,7 +24330,7 @@
               <a:t>f</a:t>
             </a:r>
             <a:r>
-              <a:rPr lang="en-US" sz="4000" b="0" i="0" u="none" strike="noStrike" kern="1200" cap="none" baseline="-8000">
+              <a:rPr lang="en-US" sz="3600" b="0" i="0" u="none" strike="noStrike" kern="1200" cap="none" baseline="-8000">
                 <a:ln>
                   <a:noFill/>
                 </a:ln>
@@ -23353,7 +24341,7 @@
               <a:t>1</a:t>
             </a:r>
             <a:r>
-              <a:rPr lang="en-US" sz="4000" b="0" i="0" u="none" strike="noStrike" kern="1200" cap="none" baseline="0">
+              <a:rPr lang="en-US" sz="3600" b="0" i="0" u="none" strike="noStrike" kern="1200" cap="none" baseline="0">
                 <a:ln>
                   <a:noFill/>
                 </a:ln>
@@ -23364,7 +24352,7 @@
               <a:t>(t)</a:t>
             </a:r>
             <a:r>
-              <a:rPr lang="en-US" sz="4000" b="0" i="0" u="none" strike="noStrike" kern="1200" cap="none">
+              <a:rPr lang="en-US" sz="3600" b="0" i="0" u="none" strike="noStrike" kern="1200" cap="none">
                 <a:ln>
                   <a:noFill/>
                 </a:ln>
@@ -23375,7 +24363,7 @@
               <a:t>, …, f</a:t>
             </a:r>
             <a:r>
-              <a:rPr lang="en-US" sz="4000" b="0" i="0" u="none" strike="noStrike" kern="1200" cap="none" baseline="-8000">
+              <a:rPr lang="en-US" sz="3600" b="0" i="0" u="none" strike="noStrike" kern="1200" cap="none" baseline="-8000">
                 <a:ln>
                   <a:noFill/>
                 </a:ln>
@@ -23386,7 +24374,7 @@
               <a:t>n-1</a:t>
             </a:r>
             <a:r>
-              <a:rPr lang="en-US" sz="4000" b="0" i="0" u="none" strike="noStrike" kern="1200" cap="none" baseline="0">
+              <a:rPr lang="en-US" sz="3600" b="0" i="0" u="none" strike="noStrike" kern="1200" cap="none" baseline="0">
                 <a:ln>
                   <a:noFill/>
                 </a:ln>
@@ -23414,7 +24402,7 @@
               <a:tabLst/>
             </a:pPr>
             <a:r>
-              <a:rPr lang="he-IL" sz="4000" b="0" i="0" u="none" strike="noStrike" kern="1200" cap="none" baseline="0">
+              <a:rPr lang="he-IL" sz="3600" b="0" i="0" u="none" strike="noStrike" kern="1200" cap="none" baseline="0">
                 <a:ln>
                   <a:noFill/>
                 </a:ln>
@@ -23425,7 +24413,7 @@
               <a:t>כל הפונקציות </a:t>
             </a:r>
             <a:r>
-              <a:rPr lang="he-IL" sz="4000" b="0" i="1" u="none" strike="noStrike" kern="1200" cap="none" baseline="0">
+              <a:rPr lang="he-IL" sz="3600" b="0" i="1" u="none" strike="noStrike" kern="1200" cap="none" baseline="0">
                 <a:ln>
                   <a:noFill/>
                 </a:ln>
@@ -23436,7 +24424,7 @@
               <a:t>רציפות </a:t>
             </a:r>
             <a:r>
-              <a:rPr lang="he-IL" sz="4000" b="0" i="0" u="none" strike="noStrike" kern="1200" cap="none" baseline="0">
+              <a:rPr lang="he-IL" sz="3600" b="0" i="0" u="none" strike="noStrike" kern="1200" cap="none" baseline="0">
                 <a:ln>
                   <a:noFill/>
                 </a:ln>
@@ -23447,7 +24435,7 @@
               <a:t>ו</a:t>
             </a:r>
             <a:r>
-              <a:rPr lang="he-IL" sz="4000" b="0" i="1" u="none" strike="noStrike" kern="1200" cap="none" baseline="0">
+              <a:rPr lang="he-IL" sz="3600" b="0" i="1" u="none" strike="noStrike" kern="1200" cap="none" baseline="0">
                 <a:ln>
                   <a:noFill/>
                 </a:ln>
@@ -23458,7 +24446,7 @@
               <a:t>עולות</a:t>
             </a:r>
             <a:r>
-              <a:rPr lang="en-US" sz="4000" b="0" i="0" u="none" strike="noStrike" kern="1200" cap="none" baseline="0">
+              <a:rPr lang="en-US" sz="3600" b="0" i="0" u="none" strike="noStrike" kern="1200" cap="none" baseline="0">
                 <a:ln>
                   <a:noFill/>
                 </a:ln>
@@ -23484,7 +24472,7 @@
               <a:tabLst/>
             </a:pPr>
             <a:r>
-              <a:rPr lang="en-US" sz="4000" b="0" i="0" u="none" strike="noStrike" kern="1200" cap="none" baseline="0">
+              <a:rPr lang="en-US" sz="3600" b="0" i="0" u="none" strike="noStrike" kern="1200" cap="none" baseline="0">
                 <a:ln>
                   <a:noFill/>
                 </a:ln>
@@ -23495,7 +24483,7 @@
               <a:t>f</a:t>
             </a:r>
             <a:r>
-              <a:rPr lang="en-US" sz="4000" b="0" i="0" u="none" strike="noStrike" kern="1200" cap="none" baseline="-8000">
+              <a:rPr lang="en-US" sz="3600" b="0" i="0" u="none" strike="noStrike" kern="1200" cap="none" baseline="-8000">
                 <a:ln>
                   <a:noFill/>
                 </a:ln>
@@ -23506,7 +24494,7 @@
               <a:t>i</a:t>
             </a:r>
             <a:r>
-              <a:rPr lang="en-US" sz="4000" b="0" i="0" u="none" strike="noStrike" kern="1200" cap="none" baseline="0">
+              <a:rPr lang="en-US" sz="3600" b="0" i="0" u="none" strike="noStrike" kern="1200" cap="none" baseline="0">
                 <a:ln>
                   <a:noFill/>
                 </a:ln>
@@ -23517,7 +24505,7 @@
               <a:t>(0) = 0;               f</a:t>
             </a:r>
             <a:r>
-              <a:rPr lang="en-US" sz="4000" b="0" i="0" u="none" strike="noStrike" kern="1200" cap="none" baseline="-8000">
+              <a:rPr lang="en-US" sz="3600" b="0" i="0" u="none" strike="noStrike" kern="1200" cap="none" baseline="-8000">
                 <a:ln>
                   <a:noFill/>
                 </a:ln>
@@ -23528,7 +24516,7 @@
               <a:t>i</a:t>
             </a:r>
             <a:r>
-              <a:rPr lang="en-US" sz="4000" b="0" i="0" u="none" strike="noStrike" kern="1200" cap="none" baseline="0">
+              <a:rPr lang="en-US" sz="3600" b="0" i="0" u="none" strike="noStrike" kern="1200" cap="none" baseline="0">
                 <a:ln>
                   <a:noFill/>
                 </a:ln>
@@ -23554,7 +24542,7 @@
               <a:tabLst/>
             </a:pPr>
             <a:r>
-              <a:rPr lang="he-IL" sz="4000" b="0" i="0" u="none" strike="noStrike" kern="1200" cap="none">
+              <a:rPr lang="he-IL" sz="3600" b="0" i="0" u="none" strike="noStrike" kern="1200" cap="none">
                 <a:ln>
                   <a:noFill/>
                 </a:ln>
@@ -23568,7 +24556,7 @@
               <a:t>לכל </a:t>
             </a:r>
             <a:r>
-              <a:rPr lang="en-US" sz="4000" b="0" i="0" u="none" strike="noStrike" kern="1200" cap="none">
+              <a:rPr lang="en-US" sz="3600" b="0" i="0" u="none" strike="noStrike" kern="1200" cap="none">
                 <a:ln>
                   <a:noFill/>
                 </a:ln>
@@ -23582,7 +24570,7 @@
               <a:t>t</a:t>
             </a:r>
             <a:r>
-              <a:rPr lang="he-IL" sz="4000" b="0" i="0" u="none" strike="noStrike" kern="1200" cap="none">
+              <a:rPr lang="he-IL" sz="3600" b="0" i="0" u="none" strike="noStrike" kern="1200" cap="none">
                 <a:ln>
                   <a:noFill/>
                 </a:ln>
@@ -23596,7 +24584,7 @@
               <a:t> </a:t>
             </a:r>
             <a:r>
-              <a:rPr lang="en-US" sz="4000" b="0" i="0" u="none" strike="noStrike" kern="1200" cap="none">
+              <a:rPr lang="en-US" sz="3600" b="0" i="0" u="none" strike="noStrike" kern="1200" cap="none">
                 <a:ln>
                   <a:noFill/>
                 </a:ln>
@@ -23610,7 +24598,7 @@
               <a:t>בין</a:t>
             </a:r>
             <a:r>
-              <a:rPr lang="he-IL" sz="4000" b="0" i="0" u="none" strike="noStrike" kern="1200" cap="none">
+              <a:rPr lang="he-IL" sz="3600" b="0" i="0" u="none" strike="noStrike" kern="1200" cap="none">
                 <a:ln>
                   <a:noFill/>
                 </a:ln>
@@ -23624,7 +24612,7 @@
               <a:t> 0 </a:t>
             </a:r>
             <a:r>
-              <a:rPr lang="en-US" sz="4000" b="0" i="0" u="none" strike="noStrike" kern="1200" cap="none">
+              <a:rPr lang="en-US" sz="3600" b="0" i="0" u="none" strike="noStrike" kern="1200" cap="none">
                 <a:ln>
                   <a:noFill/>
                 </a:ln>
@@ -23638,7 +24626,7 @@
               <a:t>ל</a:t>
             </a:r>
             <a:r>
-              <a:rPr lang="he-IL" sz="4000" b="0" i="0" u="none" strike="noStrike" kern="1200" cap="none">
+              <a:rPr lang="he-IL" sz="3600" b="0" i="0" u="none" strike="noStrike" kern="1200" cap="none">
                 <a:ln>
                   <a:noFill/>
                 </a:ln>
@@ -23652,7 +24640,7 @@
               <a:t>-1, </a:t>
             </a:r>
             <a:r>
-              <a:rPr lang="en-US" sz="4000" b="0" i="0" u="none" strike="noStrike" kern="1200" cap="none">
+              <a:rPr lang="en-US" sz="3600" b="0" i="0" u="none" strike="noStrike" kern="1200" cap="none">
                 <a:ln>
                   <a:noFill/>
                 </a:ln>
@@ -23666,7 +24654,7 @@
               <a:t>אפשר לחשב לכל נושא</a:t>
             </a:r>
             <a:r>
-              <a:rPr lang="he-IL" sz="4000" b="0" i="0" u="none" strike="noStrike" kern="1200" cap="none">
+              <a:rPr lang="he-IL" sz="3600" b="0" i="0" u="none" strike="noStrike" kern="1200" cap="none">
                 <a:ln>
                   <a:noFill/>
                 </a:ln>
@@ -23680,7 +24668,7 @@
               <a:t>, </a:t>
             </a:r>
             <a:r>
-              <a:rPr lang="en-US" sz="4000" b="0" i="0" u="none" strike="noStrike" kern="1200" cap="none">
+              <a:rPr lang="en-US" sz="3600" b="0" i="0" u="none" strike="noStrike" kern="1200" cap="none">
                 <a:ln>
                   <a:noFill/>
                 </a:ln>
@@ -23694,7 +24682,7 @@
               <a:t>חציון מוכלל עם הצבעות קבועות  </a:t>
             </a:r>
             <a:r>
-              <a:rPr lang="en-US" sz="4000" b="0" i="0" u="none" strike="noStrike" kern="1200" cap="none">
+              <a:rPr lang="en-US" sz="3600" b="0" i="0" u="none" strike="noStrike" kern="1200" cap="none">
                 <a:ln>
                   <a:noFill/>
                 </a:ln>
@@ -23708,7 +24696,7 @@
               <a:t> f</a:t>
             </a:r>
             <a:r>
-              <a:rPr lang="en-US" sz="4000" b="0" i="0" u="none" strike="noStrike" kern="1200" cap="none" baseline="-8000">
+              <a:rPr lang="en-US" sz="3600" b="0" i="0" u="none" strike="noStrike" kern="1200" cap="none" baseline="-8000">
                 <a:ln>
                   <a:noFill/>
                 </a:ln>
@@ -23722,7 +24710,7 @@
               <a:t>1</a:t>
             </a:r>
             <a:r>
-              <a:rPr lang="en-US" sz="4000" b="0" i="0" u="none" strike="noStrike" kern="1200" cap="none" baseline="0">
+              <a:rPr lang="en-US" sz="3600" b="0" i="0" u="none" strike="noStrike" kern="1200" cap="none" baseline="0">
                 <a:ln>
                   <a:noFill/>
                 </a:ln>
@@ -23736,7 +24724,7 @@
               <a:t>(t)</a:t>
             </a:r>
             <a:r>
-              <a:rPr lang="en-US" sz="4000" b="0" i="0" u="none" strike="noStrike" kern="1200" cap="none">
+              <a:rPr lang="en-US" sz="3600" b="0" i="0" u="none" strike="noStrike" kern="1200" cap="none">
                 <a:ln>
                   <a:noFill/>
                 </a:ln>
@@ -23750,7 +24738,7 @@
               <a:t>,…,f</a:t>
             </a:r>
             <a:r>
-              <a:rPr lang="en-US" sz="4000" b="0" i="0" u="none" strike="noStrike" kern="1200" cap="none" baseline="-8000">
+              <a:rPr lang="en-US" sz="3600" b="0" i="0" u="none" strike="noStrike" kern="1200" cap="none" baseline="-8000">
                 <a:ln>
                   <a:noFill/>
                 </a:ln>
@@ -23764,7 +24752,7 @@
               <a:t>n-1</a:t>
             </a:r>
             <a:r>
-              <a:rPr lang="en-US" sz="4000" b="0" i="0" u="none" strike="noStrike" kern="1200" cap="none" baseline="0">
+              <a:rPr lang="en-US" sz="3600" b="0" i="0" u="none" strike="noStrike" kern="1200" cap="none" baseline="0">
                 <a:ln>
                   <a:noFill/>
                 </a:ln>
@@ -23778,7 +24766,7 @@
               <a:t>(t)</a:t>
             </a:r>
             <a:r>
-              <a:rPr lang="he-IL" sz="4000">
+              <a:rPr lang="he-IL" sz="3600">
                 <a:solidFill>
                   <a:srgbClr val="2A6099"/>
                 </a:solidFill>
@@ -23788,7 +24776,7 @@
               </a:rPr>
               <a:t>.</a:t>
             </a:r>
-            <a:endParaRPr lang="en-US" sz="4000" b="0" i="0" u="none" strike="noStrike" kern="1200" cap="none" baseline="0">
+            <a:endParaRPr lang="en-US" sz="3600" b="0" i="0" u="none" strike="noStrike" kern="1200" cap="none" baseline="0">
               <a:ln>
                 <a:noFill/>
               </a:ln>
@@ -23807,7 +24795,7 @@
               <a:buChar char="•"/>
             </a:pPr>
             <a:r>
-              <a:rPr lang="he-IL" sz="4000" b="0" i="0" u="none" strike="noStrike" kern="1200" cap="none" baseline="0">
+              <a:rPr lang="he-IL" sz="3600" b="0" i="0" u="none" strike="noStrike" kern="1200" cap="none" baseline="0">
                 <a:ln>
                   <a:noFill/>
                 </a:ln>
@@ -23821,7 +24809,7 @@
               <a:t>עבור </a:t>
             </a:r>
             <a:r>
-              <a:rPr lang="en-US" sz="4000" b="0" i="0" u="none" strike="noStrike" kern="1200" cap="none" baseline="0">
+              <a:rPr lang="en-US" sz="3600" b="0" i="0" u="none" strike="noStrike" kern="1200" cap="none" baseline="0">
                 <a:ln>
                   <a:noFill/>
                 </a:ln>
@@ -23835,7 +24823,7 @@
               <a:t>t=0</a:t>
             </a:r>
             <a:r>
-              <a:rPr lang="he-IL" sz="4000" b="0" i="0" u="none" strike="noStrike" kern="1200" cap="none" baseline="0">
+              <a:rPr lang="he-IL" sz="3600" b="0" i="0" u="none" strike="noStrike" kern="1200" cap="none" baseline="0">
                 <a:ln>
                   <a:noFill/>
                 </a:ln>
@@ -23849,7 +24837,7 @@
               <a:t>, </a:t>
             </a:r>
             <a:r>
-              <a:rPr lang="en-US" sz="4000" b="0" i="0" u="none" strike="noStrike" kern="1200" cap="none" baseline="0">
+              <a:rPr lang="en-US" sz="3600" b="0" i="0" u="none" strike="noStrike" kern="1200" cap="none" baseline="0">
                 <a:ln>
                   <a:noFill/>
                 </a:ln>
@@ -23863,7 +24851,7 @@
               <a:t>החציון =</a:t>
             </a:r>
             <a:r>
-              <a:rPr lang="he-IL" sz="4000" b="0" i="0" u="none" strike="noStrike" kern="1200" cap="none" baseline="0">
+              <a:rPr lang="he-IL" sz="3600" b="0" i="0" u="none" strike="noStrike" kern="1200" cap="none" baseline="0">
                 <a:ln>
                   <a:noFill/>
                 </a:ln>
@@ -23877,7 +24865,7 @@
               <a:t> </a:t>
             </a:r>
             <a:r>
-              <a:rPr lang="en-US" sz="4000" b="0" i="0" u="none" strike="noStrike" kern="1200" cap="none" baseline="0">
+              <a:rPr lang="en-US" sz="3600" b="0" i="0" u="none" strike="noStrike" kern="1200" cap="none" baseline="0">
                 <a:ln>
                   <a:noFill/>
                 </a:ln>
@@ -23891,7 +24879,7 @@
               <a:t>המינימום</a:t>
             </a:r>
             <a:r>
-              <a:rPr lang="he-IL" sz="4000" b="0" i="0" u="none" strike="noStrike" kern="1200" cap="none" baseline="0">
+              <a:rPr lang="he-IL" sz="3600" b="0" i="0" u="none" strike="noStrike" kern="1200" cap="none" baseline="0">
                 <a:ln>
                   <a:noFill/>
                 </a:ln>
@@ -23905,7 +24893,7 @@
               <a:t>; </a:t>
             </a:r>
             <a:r>
-              <a:rPr lang="en-US" sz="4000" b="0" i="0" u="none" strike="noStrike" kern="1200" cap="none" baseline="0">
+              <a:rPr lang="en-US" sz="3600" b="0" i="0" u="none" strike="noStrike" kern="1200" cap="none" baseline="0">
                 <a:ln>
                   <a:noFill/>
                 </a:ln>
@@ -23919,7 +24907,7 @@
               <a:t>הסכום</a:t>
             </a:r>
             <a:r>
-              <a:rPr lang="he-IL" sz="4000" b="0" i="0" u="none" strike="noStrike" kern="1200" cap="none" baseline="0">
+              <a:rPr lang="he-IL" sz="3600" b="0" i="0" u="none" strike="noStrike" kern="1200" cap="none" baseline="0">
                 <a:ln>
                   <a:noFill/>
                 </a:ln>
@@ -23933,7 +24921,7 @@
               <a:t> </a:t>
             </a:r>
             <a:r>
-              <a:rPr lang="en-US" sz="4000">
+              <a:rPr lang="en-US" sz="3600">
                 <a:solidFill>
                   <a:srgbClr val="FF0000"/>
                 </a:solidFill>
@@ -23944,7 +24932,7 @@
               <a:t>≥</a:t>
             </a:r>
             <a:r>
-              <a:rPr lang="he-IL" sz="4000">
+              <a:rPr lang="he-IL" sz="3600">
                 <a:solidFill>
                   <a:srgbClr val="FF0000"/>
                 </a:solidFill>
@@ -23955,7 +24943,7 @@
               <a:t> </a:t>
             </a:r>
             <a:r>
-              <a:rPr lang="en-US" sz="4000" b="0" i="0" u="none" strike="noStrike" kern="1200" cap="none" baseline="0">
+              <a:rPr lang="en-US" sz="3600" b="0" i="0" u="none" strike="noStrike" kern="1200" cap="none" baseline="0">
                 <a:ln>
                   <a:noFill/>
                 </a:ln>
@@ -23969,7 +24957,7 @@
               <a:t>C</a:t>
             </a:r>
             <a:r>
-              <a:rPr lang="he-IL" sz="4000" b="0" i="0" u="none" strike="noStrike" kern="1200" cap="none" baseline="0">
+              <a:rPr lang="he-IL" sz="3600" b="0" i="0" u="none" strike="noStrike" kern="1200" cap="none" baseline="0">
                 <a:ln>
                   <a:noFill/>
                 </a:ln>
@@ -23982,7 +24970,7 @@
               </a:rPr>
               <a:t>.</a:t>
             </a:r>
-            <a:endParaRPr lang="en-US" sz="4000" b="0" i="0" u="none" strike="noStrike" kern="1200" cap="none" baseline="0">
+            <a:endParaRPr lang="en-US" sz="3600" b="0" i="0" u="none" strike="noStrike" kern="1200" cap="none" baseline="0">
               <a:ln>
                 <a:noFill/>
               </a:ln>
@@ -24001,7 +24989,7 @@
               <a:buChar char="•"/>
             </a:pPr>
             <a:r>
-              <a:rPr lang="he-IL" sz="4000" b="0" i="0" u="none" strike="noStrike" kern="1200" cap="none" baseline="0">
+              <a:rPr lang="he-IL" sz="3600" b="0" i="0" u="none" strike="noStrike" kern="1200" cap="none" baseline="0">
                 <a:ln>
                   <a:noFill/>
                 </a:ln>
@@ -24015,7 +25003,7 @@
               <a:t>עבור </a:t>
             </a:r>
             <a:r>
-              <a:rPr lang="en-US" sz="4000" b="0" i="0" u="none" strike="noStrike" kern="1200" cap="none" baseline="0">
+              <a:rPr lang="en-US" sz="3600" b="0" i="0" u="none" strike="noStrike" kern="1200" cap="none" baseline="0">
                 <a:ln>
                   <a:noFill/>
                 </a:ln>
@@ -24029,7 +25017,7 @@
               <a:t>t=1</a:t>
             </a:r>
             <a:r>
-              <a:rPr lang="he-IL" sz="4000" b="0" i="0" u="none" strike="noStrike" kern="1200" cap="none" baseline="0">
+              <a:rPr lang="he-IL" sz="3600" b="0" i="0" u="none" strike="noStrike" kern="1200" cap="none" baseline="0">
                 <a:ln>
                   <a:noFill/>
                 </a:ln>
@@ -24043,7 +25031,7 @@
               <a:t>, </a:t>
             </a:r>
             <a:r>
-              <a:rPr lang="en-US" sz="4000" b="0" i="0" u="none" strike="noStrike" kern="1200" cap="none" baseline="0">
+              <a:rPr lang="en-US" sz="3600" b="0" i="0" u="none" strike="noStrike" kern="1200" cap="none" baseline="0">
                 <a:ln>
                   <a:noFill/>
                 </a:ln>
@@ -24057,7 +25045,7 @@
               <a:t>החציון =</a:t>
             </a:r>
             <a:r>
-              <a:rPr lang="he-IL" sz="4000" b="0" i="0" u="none" strike="noStrike" kern="1200" cap="none" baseline="0">
+              <a:rPr lang="he-IL" sz="3600" b="0" i="0" u="none" strike="noStrike" kern="1200" cap="none" baseline="0">
                 <a:ln>
                   <a:noFill/>
                 </a:ln>
@@ -24071,7 +25059,7 @@
               <a:t> </a:t>
             </a:r>
             <a:r>
-              <a:rPr lang="en-US" sz="4000" b="0" i="0" u="none" strike="noStrike" kern="1200" cap="none" baseline="0">
+              <a:rPr lang="en-US" sz="3600" b="0" i="0" u="none" strike="noStrike" kern="1200" cap="none" baseline="0">
                 <a:ln>
                   <a:noFill/>
                 </a:ln>
@@ -24085,7 +25073,7 @@
               <a:t>המקסימום</a:t>
             </a:r>
             <a:r>
-              <a:rPr lang="he-IL" sz="4000" b="0" i="0" u="none" strike="noStrike" kern="1200" cap="none" baseline="0">
+              <a:rPr lang="he-IL" sz="3600" b="0" i="0" u="none" strike="noStrike" kern="1200" cap="none" baseline="0">
                 <a:ln>
                   <a:noFill/>
                 </a:ln>
@@ -24099,7 +25087,7 @@
               <a:t>; </a:t>
             </a:r>
             <a:r>
-              <a:rPr lang="en-US" sz="4000" b="0" i="0" u="none" strike="noStrike" kern="1200" cap="none" baseline="0">
+              <a:rPr lang="en-US" sz="3600" b="0" i="0" u="none" strike="noStrike" kern="1200" cap="none" baseline="0">
                 <a:ln>
                   <a:noFill/>
                 </a:ln>
@@ -24113,7 +25101,7 @@
               <a:t>הסכום</a:t>
             </a:r>
             <a:r>
-              <a:rPr lang="he-IL" sz="4000" b="0" i="0" u="none" strike="noStrike" kern="1200" cap="none" baseline="0">
+              <a:rPr lang="he-IL" sz="3600" b="0" i="0" u="none" strike="noStrike" kern="1200" cap="none" baseline="0">
                 <a:ln>
                   <a:noFill/>
                 </a:ln>
@@ -24127,7 +25115,7 @@
               <a:t> </a:t>
             </a:r>
             <a:r>
-              <a:rPr lang="en-US" sz="4000">
+              <a:rPr lang="en-US" sz="3600">
                 <a:solidFill>
                   <a:schemeClr val="accent2"/>
                 </a:solidFill>
@@ -24138,7 +25126,7 @@
               <a:t>≤</a:t>
             </a:r>
             <a:r>
-              <a:rPr lang="he-IL" sz="4000">
+              <a:rPr lang="he-IL" sz="3600">
                 <a:solidFill>
                   <a:schemeClr val="accent2"/>
                 </a:solidFill>
@@ -24149,7 +25137,7 @@
               <a:t> </a:t>
             </a:r>
             <a:r>
-              <a:rPr lang="en-US" sz="4000" b="0" i="0" u="none" strike="noStrike" kern="1200" cap="none" baseline="0">
+              <a:rPr lang="en-US" sz="3600" b="0" i="0" u="none" strike="noStrike" kern="1200" cap="none" baseline="0">
                 <a:ln>
                   <a:noFill/>
                 </a:ln>
@@ -24163,7 +25151,7 @@
               <a:t>C</a:t>
             </a:r>
             <a:r>
-              <a:rPr lang="he-IL" sz="4000" b="0" i="0" u="none" strike="noStrike" kern="1200" cap="none" baseline="0">
+              <a:rPr lang="he-IL" sz="3600" b="0" i="0" u="none" strike="noStrike" kern="1200" cap="none" baseline="0">
                 <a:ln>
                   <a:noFill/>
                 </a:ln>
@@ -24176,7 +25164,7 @@
               </a:rPr>
               <a:t>.</a:t>
             </a:r>
-            <a:endParaRPr lang="en-US" sz="4000" b="0" i="0" u="none" strike="noStrike" kern="1200" cap="none" baseline="0">
+            <a:endParaRPr lang="en-US" sz="3600" b="0" i="0" u="none" strike="noStrike" kern="1200" cap="none" baseline="0">
               <a:ln>
                 <a:noFill/>
               </a:ln>
@@ -24205,7 +25193,7 @@
               <a:tabLst/>
             </a:pPr>
             <a:r>
-              <a:rPr lang="he-IL" sz="4000" b="0" i="0" u="none" strike="noStrike" kern="1200" cap="none" baseline="0">
+              <a:rPr lang="he-IL" sz="3600" b="0" i="0" u="none" strike="noStrike" kern="1200" cap="none" baseline="0">
                 <a:ln>
                   <a:noFill/>
                 </a:ln>
@@ -24219,7 +25207,7 @@
               <a:t>לפי משפט ערך הביניים, קיים *</a:t>
             </a:r>
             <a:r>
-              <a:rPr lang="en-US" sz="4000" b="0" i="0" u="none" strike="noStrike" kern="1200" cap="none" baseline="0">
+              <a:rPr lang="en-US" sz="3600" b="0" i="0" u="none" strike="noStrike" kern="1200" cap="none" baseline="0">
                 <a:ln>
                   <a:noFill/>
                 </a:ln>
@@ -24233,7 +25221,7 @@
               <a:t>t</a:t>
             </a:r>
             <a:r>
-              <a:rPr lang="he-IL" sz="4000" b="0" i="0" u="none" strike="noStrike" kern="1200" cap="none" baseline="0">
+              <a:rPr lang="he-IL" sz="3600" b="0" i="0" u="none" strike="noStrike" kern="1200" cap="none" baseline="0">
                 <a:ln>
                   <a:noFill/>
                 </a:ln>
@@ -24247,7 +25235,7 @@
               <a:t> </a:t>
             </a:r>
             <a:r>
-              <a:rPr lang="en-US" sz="4000" b="0" i="0" u="none" strike="noStrike" kern="1200" cap="none" baseline="0">
+              <a:rPr lang="en-US" sz="3600" b="0" i="0" u="none" strike="noStrike" kern="1200" cap="none" baseline="0">
                 <a:ln>
                   <a:noFill/>
                 </a:ln>
@@ -24261,7 +25249,7 @@
               <a:t>שעבורו סכום הסעיפים</a:t>
             </a:r>
             <a:r>
-              <a:rPr lang="he-IL" sz="4000" b="0" i="0" u="none" strike="noStrike" kern="1200" cap="none" baseline="0">
+              <a:rPr lang="he-IL" sz="3600" b="0" i="0" u="none" strike="noStrike" kern="1200" cap="none" baseline="0">
                 <a:ln>
                   <a:noFill/>
                 </a:ln>
@@ -24275,7 +25263,7 @@
               <a:t> = </a:t>
             </a:r>
             <a:r>
-              <a:rPr lang="en-US" sz="4000" b="0" i="1" u="none" strike="noStrike" kern="1200" cap="none" baseline="0">
+              <a:rPr lang="en-US" sz="3600" b="0" i="1" u="none" strike="noStrike" kern="1200" cap="none" baseline="0">
                 <a:ln>
                   <a:noFill/>
                 </a:ln>
@@ -24289,7 +25277,7 @@
               <a:t>C</a:t>
             </a:r>
             <a:r>
-              <a:rPr lang="he-IL" sz="4000" b="0" i="1" u="none" strike="noStrike" kern="1200" cap="none" baseline="0">
+              <a:rPr lang="he-IL" sz="3600" b="0" i="1" u="none" strike="noStrike" kern="1200" cap="none" baseline="0">
                 <a:ln>
                   <a:noFill/>
                 </a:ln>
@@ -24303,7 +25291,7 @@
               <a:t> </a:t>
             </a:r>
             <a:r>
-              <a:rPr lang="he-IL" sz="3200" b="0" u="none" strike="noStrike" kern="1200" cap="none" baseline="0">
+              <a:rPr lang="he-IL" sz="3600" b="0" u="none" strike="noStrike" kern="1200" cap="none" baseline="0">
                 <a:ln>
                   <a:noFill/>
                 </a:ln>
@@ -24317,7 +25305,7 @@
               <a:t>(</a:t>
             </a:r>
             <a:r>
-              <a:rPr lang="en-US" sz="3200" b="0" i="0" u="none" strike="noStrike" kern="1200" cap="none" baseline="0">
+              <a:rPr lang="en-US" sz="3600" b="0" i="0" u="none" strike="noStrike" kern="1200" cap="none" baseline="0">
                 <a:ln>
                   <a:noFill/>
                 </a:ln>
@@ -24331,7 +25319,7 @@
               <a:t>ניתן למצוא ע"י חיפוש בינארי</a:t>
             </a:r>
             <a:r>
-              <a:rPr lang="he-IL" sz="3200" b="0" i="0" u="none" strike="noStrike" kern="1200" cap="none" baseline="0">
+              <a:rPr lang="he-IL" sz="3600" b="0" i="0" u="none" strike="noStrike" kern="1200" cap="none" baseline="0">
                 <a:ln>
                   <a:noFill/>
                 </a:ln>
@@ -24344,7 +25332,7 @@
               </a:rPr>
               <a:t>).</a:t>
             </a:r>
-            <a:endParaRPr lang="en-US" sz="4000" b="0" i="0" u="none" strike="noStrike" kern="1200" cap="none" baseline="0">
+            <a:endParaRPr lang="en-US" sz="3600" b="0" i="0" u="none" strike="noStrike" kern="1200" cap="none" baseline="0">
               <a:ln>
                 <a:noFill/>
               </a:ln>
@@ -24371,7 +25359,7 @@
               <a:tabLst/>
             </a:pPr>
             <a:r>
-              <a:rPr lang="he-IL" sz="4000" b="1" i="0" u="none" strike="noStrike" kern="1200" cap="none" baseline="0">
+              <a:rPr lang="he-IL" sz="3600" b="1" i="0" u="none" strike="noStrike" kern="1200" cap="none" baseline="0">
                 <a:ln>
                   <a:noFill/>
                 </a:ln>
@@ -24385,7 +25373,7 @@
               <a:t>התקציב</a:t>
             </a:r>
             <a:r>
-              <a:rPr lang="he-IL" sz="4000" b="0" i="0" u="none" strike="noStrike" kern="1200" cap="none" baseline="0">
+              <a:rPr lang="he-IL" sz="3600" b="0" i="0" u="none" strike="noStrike" kern="1200" cap="none" baseline="0">
                 <a:ln>
                   <a:noFill/>
                 </a:ln>
@@ -24399,7 +25387,7 @@
               <a:t> = חציון מוכלל עם: </a:t>
             </a:r>
             <a:r>
-              <a:rPr lang="en-US" sz="4000" b="0" i="0" u="none" strike="noStrike" kern="1200" cap="none" baseline="0">
+              <a:rPr lang="en-US" sz="3600" b="0" i="0" u="none" strike="noStrike" kern="1200" cap="none" baseline="0">
                 <a:ln>
                   <a:noFill/>
                 </a:ln>
@@ -24413,7 +25401,7 @@
               <a:t>f</a:t>
             </a:r>
             <a:r>
-              <a:rPr lang="en-US" sz="4000" b="0" i="0" u="none" strike="noStrike" kern="1200" cap="none" baseline="-8000">
+              <a:rPr lang="en-US" sz="3600" b="0" i="0" u="none" strike="noStrike" kern="1200" cap="none" baseline="-8000">
                 <a:ln>
                   <a:noFill/>
                 </a:ln>
@@ -24427,7 +25415,7 @@
               <a:t>1</a:t>
             </a:r>
             <a:r>
-              <a:rPr lang="en-US" sz="4000" b="0" i="0" u="none" strike="noStrike" kern="1200" cap="none" baseline="0">
+              <a:rPr lang="en-US" sz="3600" b="0" i="0" u="none" strike="noStrike" kern="1200" cap="none" baseline="0">
                 <a:ln>
                   <a:noFill/>
                 </a:ln>
@@ -24441,7 +25429,7 @@
               <a:t>(t*), …, f</a:t>
             </a:r>
             <a:r>
-              <a:rPr lang="en-US" sz="4000" b="0" i="0" u="none" strike="noStrike" kern="1200" cap="none" baseline="-8000">
+              <a:rPr lang="en-US" sz="3600" b="0" i="0" u="none" strike="noStrike" kern="1200" cap="none" baseline="-8000">
                 <a:ln>
                   <a:noFill/>
                 </a:ln>
@@ -24455,7 +25443,7 @@
               <a:t>n-1</a:t>
             </a:r>
             <a:r>
-              <a:rPr lang="en-US" sz="4000" b="0" i="0" u="none" strike="noStrike" kern="1200" cap="none" baseline="0">
+              <a:rPr lang="en-US" sz="3600" b="0" i="0" u="none" strike="noStrike" kern="1200" cap="none" baseline="0">
                 <a:ln>
                   <a:noFill/>
                 </a:ln>
@@ -24469,7 +25457,7 @@
               <a:t>(t*) </a:t>
             </a:r>
             <a:r>
-              <a:rPr lang="he-IL" sz="4000" b="0" i="0" u="none" strike="noStrike" kern="1200" cap="none" baseline="0">
+              <a:rPr lang="he-IL" sz="3600" b="0" i="0" u="none" strike="noStrike" kern="1200" cap="none" baseline="0">
                 <a:ln>
                   <a:noFill/>
                 </a:ln>
@@ -24482,7 +25470,7 @@
               </a:rPr>
               <a:t>.</a:t>
             </a:r>
-            <a:endParaRPr lang="en-US" sz="4000" b="0" i="0" u="none" strike="noStrike" kern="1200" cap="none" baseline="0">
+            <a:endParaRPr lang="en-US" sz="3600" b="0" i="0" u="none" strike="noStrike" kern="1200" cap="none" baseline="0">
               <a:ln>
                 <a:noFill/>
               </a:ln>
@@ -24978,7 +25966,7 @@
 </p:sld>
 </file>
 
-<file path=ppt/slides/slide15.xml><?xml version="1.0" encoding="utf-8"?>
+<file path=ppt/slides/slide16.xml><?xml version="1.0" encoding="utf-8"?>
 <p:sld xmlns:a="http://schemas.openxmlformats.org/drawingml/2006/main" xmlns:r="http://schemas.openxmlformats.org/officeDocument/2006/relationships" xmlns:p="http://schemas.openxmlformats.org/presentationml/2006/main">
   <p:cSld name="page15">
     <p:spTree>
@@ -25036,7 +26024,7 @@
                 <a:latin typeface="Liberation Sans" pitchFamily="34"/>
                 <a:cs typeface="Liberation Sans" pitchFamily="34"/>
               </a:rPr>
-              <a:t>חציון מוכלל עם פונקציות עולות</a:t>
+              <a:t>אלגוריתם הפנטומים הזזים</a:t>
             </a:r>
           </a:p>
         </p:txBody>
@@ -25934,7 +26922,7 @@
 </p:sld>
 </file>
 
-<file path=ppt/slides/slide16.xml><?xml version="1.0" encoding="utf-8"?>
+<file path=ppt/slides/slide17.xml><?xml version="1.0" encoding="utf-8"?>
 <p:sld xmlns:a="http://schemas.openxmlformats.org/drawingml/2006/main" xmlns:r="http://schemas.openxmlformats.org/officeDocument/2006/relationships" xmlns:p="http://schemas.openxmlformats.org/presentationml/2006/main">
   <p:cSld name="page16">
     <p:spTree>
@@ -26412,7 +27400,7 @@
                 <a:latin typeface="Liberation Sans" pitchFamily="34"/>
                 <a:cs typeface="Liberation Sans" pitchFamily="34"/>
               </a:rPr>
-              <a:t>חציון מוכלל עם פונקציות ליניאריות</a:t>
+              <a:t>פנטומים זזים ליניאריים</a:t>
             </a:r>
           </a:p>
         </p:txBody>
@@ -26425,7 +27413,7 @@
 </p:sld>
 </file>
 
-<file path=ppt/slides/slide17.xml><?xml version="1.0" encoding="utf-8"?>
+<file path=ppt/slides/slide18.xml><?xml version="1.0" encoding="utf-8"?>
 <p:sld xmlns:a="http://schemas.openxmlformats.org/drawingml/2006/main" xmlns:r="http://schemas.openxmlformats.org/officeDocument/2006/relationships" xmlns:p="http://schemas.openxmlformats.org/presentationml/2006/main">
   <p:cSld name="page17">
     <p:spTree>
@@ -26483,7 +27471,7 @@
                 <a:latin typeface="Liberation Sans" pitchFamily="34"/>
                 <a:cs typeface="Liberation Sans" pitchFamily="34"/>
               </a:rPr>
-              <a:t>חציון מוכלל עם פונקציות ליניאריות</a:t>
+              <a:t>פנטומים זזים ליניאריים</a:t>
             </a:r>
           </a:p>
         </p:txBody>
@@ -27821,7 +28809,7 @@
 </p:sld>
 </file>
 
-<file path=ppt/slides/slide18.xml><?xml version="1.0" encoding="utf-8"?>
+<file path=ppt/slides/slide19.xml><?xml version="1.0" encoding="utf-8"?>
 <p:sld xmlns:a="http://schemas.openxmlformats.org/drawingml/2006/main" xmlns:r="http://schemas.openxmlformats.org/officeDocument/2006/relationships" xmlns:p="http://schemas.openxmlformats.org/presentationml/2006/main">
   <p:cSld name="page18">
     <p:spTree>
@@ -27879,7 +28867,7 @@
                 <a:latin typeface="Liberation Sans" pitchFamily="34"/>
                 <a:cs typeface="Liberation Sans" pitchFamily="34"/>
               </a:rPr>
-              <a:t>חציון מוכלל עם פונקציות ליניאריות</a:t>
+              <a:t>פנטומים זזים ליניאריים</a:t>
             </a:r>
           </a:p>
         </p:txBody>
@@ -29348,7 +30336,1350 @@
 </p:sld>
 </file>
 
-<file path=ppt/slides/slide19.xml><?xml version="1.0" encoding="utf-8"?>
+<file path=ppt/slides/slide2.xml><?xml version="1.0" encoding="utf-8"?>
+<p:sld xmlns:a="http://schemas.openxmlformats.org/drawingml/2006/main" xmlns:r="http://schemas.openxmlformats.org/officeDocument/2006/relationships" xmlns:p="http://schemas.openxmlformats.org/presentationml/2006/main">
+  <p:cSld name="page2">
+    <p:spTree>
+      <p:nvGrpSpPr>
+        <p:cNvPr id="1" name=""/>
+        <p:cNvGrpSpPr/>
+        <p:nvPr/>
+      </p:nvGrpSpPr>
+      <p:grpSpPr>
+        <a:xfrm>
+          <a:off x="0" y="0"/>
+          <a:ext cx="0" cy="0"/>
+          <a:chOff x="0" y="0"/>
+          <a:chExt cx="0" cy="0"/>
+        </a:xfrm>
+      </p:grpSpPr>
+      <p:sp>
+        <p:nvSpPr>
+          <p:cNvPr id="2" name="Title 1">
+            <a:extLst>
+              <a:ext uri="{FF2B5EF4-FFF2-40B4-BE49-F238E27FC236}">
+                <a16:creationId xmlns:a16="http://schemas.microsoft.com/office/drawing/2014/main" id="{B62C061A-F4E6-01BD-26E4-CA2E842B404A}"/>
+              </a:ext>
+            </a:extLst>
+          </p:cNvPr>
+          <p:cNvSpPr txBox="1">
+            <a:spLocks noGrp="1"/>
+          </p:cNvSpPr>
+          <p:nvPr>
+            <p:ph type="title" idx="4294967295"/>
+          </p:nvPr>
+        </p:nvSpPr>
+        <p:spPr>
+          <a:xfrm>
+            <a:off x="274320" y="-91440"/>
+            <a:ext cx="9601200" cy="1460880"/>
+          </a:xfrm>
+        </p:spPr>
+        <p:txBody>
+          <a:bodyPr vert="horz" wrap="square" lIns="91440" tIns="45720" rIns="91440" bIns="45720">
+            <a:noAutofit/>
+          </a:bodyPr>
+          <a:lstStyle/>
+          <a:p>
+            <a:pPr lvl="0" rtl="1" hangingPunct="1">
+              <a:lnSpc>
+                <a:spcPct val="90000"/>
+              </a:lnSpc>
+            </a:pPr>
+            <a:r>
+              <a:rPr lang="he-IL" sz="5400">
+                <a:solidFill>
+                  <a:srgbClr val="000000"/>
+                </a:solidFill>
+                <a:latin typeface="Liberation Sans" pitchFamily="34"/>
+                <a:cs typeface="Liberation Sans" pitchFamily="34"/>
+              </a:rPr>
+              <a:t>הקלט:</a:t>
+            </a:r>
+          </a:p>
+        </p:txBody>
+      </p:sp>
+      <p:sp>
+        <p:nvSpPr>
+          <p:cNvPr id="3" name="Content Placeholder 2">
+            <a:extLst>
+              <a:ext uri="{FF2B5EF4-FFF2-40B4-BE49-F238E27FC236}">
+                <a16:creationId xmlns:a16="http://schemas.microsoft.com/office/drawing/2014/main" id="{CB9C90E4-71ED-0C71-53AD-D5737E3DD942}"/>
+              </a:ext>
+            </a:extLst>
+          </p:cNvPr>
+          <p:cNvSpPr txBox="1"/>
+          <p:nvPr/>
+        </p:nvSpPr>
+        <p:spPr>
+          <a:xfrm>
+            <a:off x="457200" y="1188719"/>
+            <a:ext cx="8694360" cy="4796280"/>
+          </a:xfrm>
+          <a:prstGeom prst="rect">
+            <a:avLst/>
+          </a:prstGeom>
+          <a:noFill/>
+          <a:ln>
+            <a:noFill/>
+          </a:ln>
+        </p:spPr>
+        <p:txBody>
+          <a:bodyPr wrap="square" lIns="91440" tIns="45720" rIns="91440" bIns="45720" anchor="t" compatLnSpc="0">
+            <a:noAutofit/>
+          </a:bodyPr>
+          <a:lstStyle/>
+          <a:p>
+            <a:pPr marL="0" marR="0" lvl="0" indent="0" algn="l" hangingPunct="0">
+              <a:spcBef>
+                <a:spcPts val="2750"/>
+              </a:spcBef>
+              <a:spcAft>
+                <a:spcPts val="0"/>
+              </a:spcAft>
+              <a:buNone/>
+              <a:tabLst/>
+            </a:pPr>
+            <a:endParaRPr lang="en-US" sz="3000" b="0" i="0" u="none" strike="noStrike" kern="1200" spc="0">
+              <a:ln>
+                <a:noFill/>
+              </a:ln>
+              <a:solidFill>
+                <a:srgbClr val="000000"/>
+              </a:solidFill>
+              <a:latin typeface="ＭＳ Ｐゴシック" pitchFamily="18"/>
+              <a:ea typeface="Liberation Sans" pitchFamily="34"/>
+              <a:cs typeface="DejaVu Sans" pitchFamily="2"/>
+            </a:endParaRPr>
+          </a:p>
+        </p:txBody>
+      </p:sp>
+      <p:sp>
+        <p:nvSpPr>
+          <p:cNvPr id="4" name="TextBox 3">
+            <a:extLst>
+              <a:ext uri="{FF2B5EF4-FFF2-40B4-BE49-F238E27FC236}">
+                <a16:creationId xmlns:a16="http://schemas.microsoft.com/office/drawing/2014/main" id="{B50FAF53-F7CB-4218-592E-AB11D40D6F10}"/>
+              </a:ext>
+            </a:extLst>
+          </p:cNvPr>
+          <p:cNvSpPr txBox="1"/>
+          <p:nvPr/>
+        </p:nvSpPr>
+        <p:spPr>
+          <a:xfrm>
+            <a:off x="180709" y="695849"/>
+            <a:ext cx="9694811" cy="3305541"/>
+          </a:xfrm>
+          <a:prstGeom prst="rect">
+            <a:avLst/>
+          </a:prstGeom>
+          <a:noFill/>
+          <a:ln>
+            <a:noFill/>
+          </a:ln>
+        </p:spPr>
+        <p:txBody>
+          <a:bodyPr vert="horz" wrap="none" lIns="90000" tIns="45000" rIns="90000" bIns="45000" anchorCtr="0" compatLnSpc="0">
+            <a:spAutoFit/>
+          </a:bodyPr>
+          <a:lstStyle/>
+          <a:p>
+            <a:pPr marL="0" marR="0" lvl="0" indent="0" algn="r" rtl="1" hangingPunct="0">
+              <a:lnSpc>
+                <a:spcPct val="100000"/>
+              </a:lnSpc>
+              <a:spcBef>
+                <a:spcPts val="0"/>
+              </a:spcBef>
+              <a:spcAft>
+                <a:spcPts val="0"/>
+              </a:spcAft>
+              <a:buSzPct val="45000"/>
+              <a:buFont typeface="StarSymbol"/>
+              <a:buChar char="●"/>
+              <a:tabLst/>
+            </a:pPr>
+            <a:r>
+              <a:rPr lang="he-IL" sz="4000" b="0" i="0" u="none" strike="noStrike" kern="1200" cap="none">
+                <a:ln>
+                  <a:noFill/>
+                </a:ln>
+                <a:latin typeface="Liberation Sans" pitchFamily="34"/>
+                <a:ea typeface="Noto Sans CJK SC Regular" pitchFamily="2"/>
+                <a:cs typeface="Liberation Sans" pitchFamily="34"/>
+              </a:rPr>
+              <a:t>כסף בקופה: </a:t>
+            </a:r>
+            <a:r>
+              <a:rPr lang="en-US" sz="4000" b="0" i="0" u="none" strike="noStrike" kern="1200" cap="none">
+                <a:ln>
+                  <a:noFill/>
+                </a:ln>
+                <a:latin typeface="Liberation Sans" pitchFamily="34"/>
+                <a:ea typeface="Noto Sans CJK SC Regular" pitchFamily="2"/>
+                <a:cs typeface="Liberation Sans" pitchFamily="34"/>
+              </a:rPr>
+              <a:t>C</a:t>
+            </a:r>
+            <a:r>
+              <a:rPr lang="he-IL" sz="4000" b="0" i="0" u="none" strike="noStrike" kern="1200" cap="none">
+                <a:ln>
+                  <a:noFill/>
+                </a:ln>
+                <a:latin typeface="Liberation Sans" pitchFamily="34"/>
+                <a:ea typeface="Noto Sans CJK SC Regular" pitchFamily="2"/>
+                <a:cs typeface="Liberation Sans" pitchFamily="34"/>
+              </a:rPr>
+              <a:t>.</a:t>
+            </a:r>
+            <a:endParaRPr lang="en-US" sz="4000" b="0" i="0" u="none" strike="noStrike" kern="1200" cap="none">
+              <a:ln>
+                <a:noFill/>
+              </a:ln>
+              <a:latin typeface="Liberation Sans" pitchFamily="34"/>
+              <a:ea typeface="Noto Sans CJK SC Regular" pitchFamily="2"/>
+              <a:cs typeface="Liberation Sans" pitchFamily="34"/>
+            </a:endParaRPr>
+          </a:p>
+          <a:p>
+            <a:pPr marL="0" marR="0" lvl="0" indent="0" algn="r" rtl="1" hangingPunct="0">
+              <a:lnSpc>
+                <a:spcPct val="100000"/>
+              </a:lnSpc>
+              <a:spcBef>
+                <a:spcPts val="0"/>
+              </a:spcBef>
+              <a:spcAft>
+                <a:spcPts val="0"/>
+              </a:spcAft>
+              <a:buSzPct val="45000"/>
+              <a:buFont typeface="StarSymbol"/>
+              <a:buChar char="●"/>
+              <a:tabLst/>
+            </a:pPr>
+            <a:r>
+              <a:rPr lang="he-IL" sz="4000" b="0" i="0" u="none" strike="noStrike" kern="1200" cap="none">
+                <a:ln>
+                  <a:noFill/>
+                </a:ln>
+                <a:solidFill>
+                  <a:srgbClr val="00CC00"/>
+                </a:solidFill>
+                <a:latin typeface="Liberation Sans" pitchFamily="34"/>
+                <a:ea typeface="Noto Sans CJK SC Regular" pitchFamily="2"/>
+                <a:cs typeface="Liberation Sans" pitchFamily="34"/>
+              </a:rPr>
+              <a:t>נושאים: </a:t>
+            </a:r>
+            <a:r>
+              <a:rPr lang="en-US" sz="4000" b="0" i="0" u="none" strike="noStrike" kern="1200" cap="none">
+                <a:ln>
+                  <a:noFill/>
+                </a:ln>
+                <a:solidFill>
+                  <a:srgbClr val="00CC00"/>
+                </a:solidFill>
+                <a:latin typeface="Liberation Sans" pitchFamily="34"/>
+                <a:ea typeface="Noto Sans CJK SC Regular" pitchFamily="2"/>
+                <a:cs typeface="Liberation Sans" pitchFamily="34"/>
+              </a:rPr>
+              <a:t>1,...,m</a:t>
+            </a:r>
+            <a:r>
+              <a:rPr lang="he-IL" sz="4000" b="0" i="0" u="none" strike="noStrike" kern="1200" cap="none">
+                <a:ln>
+                  <a:noFill/>
+                </a:ln>
+                <a:solidFill>
+                  <a:srgbClr val="00CC00"/>
+                </a:solidFill>
+                <a:latin typeface="Liberation Sans" pitchFamily="34"/>
+                <a:ea typeface="Noto Sans CJK SC Regular" pitchFamily="2"/>
+                <a:cs typeface="Liberation Sans" pitchFamily="34"/>
+              </a:rPr>
+              <a:t> (</a:t>
+            </a:r>
+            <a:r>
+              <a:rPr lang="en-US" sz="4000" b="0" i="0" u="none" strike="noStrike" kern="1200" cap="none">
+                <a:ln>
+                  <a:noFill/>
+                </a:ln>
+                <a:solidFill>
+                  <a:srgbClr val="00CC00"/>
+                </a:solidFill>
+                <a:latin typeface="Liberation Sans" pitchFamily="34"/>
+                <a:ea typeface="Noto Sans CJK SC Regular" pitchFamily="2"/>
+                <a:cs typeface="Liberation Sans" pitchFamily="34"/>
+              </a:rPr>
+              <a:t>סעיפי תקציב</a:t>
+            </a:r>
+            <a:r>
+              <a:rPr lang="he-IL" sz="4000">
+                <a:solidFill>
+                  <a:srgbClr val="00CC00"/>
+                </a:solidFill>
+                <a:latin typeface="Liberation Sans" pitchFamily="34"/>
+                <a:ea typeface="Noto Sans CJK SC Regular" pitchFamily="2"/>
+                <a:cs typeface="Liberation Sans" pitchFamily="34"/>
+              </a:rPr>
+              <a:t>).</a:t>
+            </a:r>
+            <a:endParaRPr lang="en-US" sz="4000" b="0" i="0" u="none" strike="noStrike" kern="1200" cap="none">
+              <a:ln>
+                <a:noFill/>
+              </a:ln>
+              <a:solidFill>
+                <a:srgbClr val="00CC00"/>
+              </a:solidFill>
+              <a:latin typeface="Liberation Sans" pitchFamily="34"/>
+              <a:ea typeface="Noto Sans CJK SC Regular" pitchFamily="2"/>
+              <a:cs typeface="Liberation Sans" pitchFamily="34"/>
+            </a:endParaRPr>
+          </a:p>
+          <a:p>
+            <a:pPr marL="0" marR="0" lvl="0" indent="0" algn="r" rtl="1" hangingPunct="0">
+              <a:lnSpc>
+                <a:spcPct val="100000"/>
+              </a:lnSpc>
+              <a:spcBef>
+                <a:spcPts val="0"/>
+              </a:spcBef>
+              <a:spcAft>
+                <a:spcPts val="0"/>
+              </a:spcAft>
+              <a:buSzPct val="45000"/>
+              <a:buFont typeface="StarSymbol"/>
+              <a:buChar char="●"/>
+              <a:tabLst/>
+            </a:pPr>
+            <a:r>
+              <a:rPr lang="he-IL" sz="4000" b="0" i="0" u="none" strike="noStrike" kern="1200" cap="none">
+                <a:ln>
+                  <a:noFill/>
+                </a:ln>
+                <a:solidFill>
+                  <a:srgbClr val="0066FF"/>
+                </a:solidFill>
+                <a:latin typeface="Liberation Sans" pitchFamily="34"/>
+                <a:ea typeface="Noto Sans CJK SC Regular" pitchFamily="2"/>
+                <a:cs typeface="Liberation Sans" pitchFamily="34"/>
+              </a:rPr>
+              <a:t>אזרחים: </a:t>
+            </a:r>
+            <a:r>
+              <a:rPr lang="en-US" sz="4000" b="0" i="0" u="none" strike="noStrike" kern="1200" cap="none">
+                <a:ln>
+                  <a:noFill/>
+                </a:ln>
+                <a:solidFill>
+                  <a:srgbClr val="0066FF"/>
+                </a:solidFill>
+                <a:latin typeface="Liberation Sans" pitchFamily="34"/>
+                <a:ea typeface="Noto Sans CJK SC Regular" pitchFamily="2"/>
+                <a:cs typeface="Liberation Sans" pitchFamily="34"/>
+              </a:rPr>
+              <a:t>1,...,n</a:t>
+            </a:r>
+            <a:r>
+              <a:rPr lang="he-IL" sz="4000" b="0" i="0" u="none" strike="noStrike" kern="1200" cap="none">
+                <a:ln>
+                  <a:noFill/>
+                </a:ln>
+                <a:solidFill>
+                  <a:srgbClr val="0066FF"/>
+                </a:solidFill>
+                <a:latin typeface="Liberation Sans" pitchFamily="34"/>
+                <a:ea typeface="Noto Sans CJK SC Regular" pitchFamily="2"/>
+                <a:cs typeface="Liberation Sans" pitchFamily="34"/>
+              </a:rPr>
+              <a:t>.</a:t>
+            </a:r>
+            <a:endParaRPr lang="en-US" sz="4000" b="0" i="0" u="none" strike="noStrike" kern="1200" cap="none">
+              <a:ln>
+                <a:noFill/>
+              </a:ln>
+              <a:solidFill>
+                <a:srgbClr val="0066FF"/>
+              </a:solidFill>
+              <a:latin typeface="Liberation Sans" pitchFamily="34"/>
+              <a:ea typeface="Noto Sans CJK SC Regular" pitchFamily="2"/>
+              <a:cs typeface="Liberation Sans" pitchFamily="34"/>
+            </a:endParaRPr>
+          </a:p>
+          <a:p>
+            <a:pPr marL="0" marR="0" lvl="0" indent="0" algn="r" rtl="1" hangingPunct="0">
+              <a:lnSpc>
+                <a:spcPct val="100000"/>
+              </a:lnSpc>
+              <a:spcBef>
+                <a:spcPts val="0"/>
+              </a:spcBef>
+              <a:spcAft>
+                <a:spcPts val="0"/>
+              </a:spcAft>
+              <a:buSzPct val="45000"/>
+              <a:buFont typeface="StarSymbol"/>
+              <a:buChar char="●"/>
+              <a:tabLst/>
+            </a:pPr>
+            <a:r>
+              <a:rPr lang="he-IL" sz="4000" b="0" i="0" u="none" strike="noStrike" kern="1200" cap="none">
+                <a:ln>
+                  <a:noFill/>
+                </a:ln>
+                <a:solidFill>
+                  <a:srgbClr val="00FFFF"/>
+                </a:solidFill>
+                <a:latin typeface="Liberation Sans" pitchFamily="34"/>
+                <a:ea typeface="Noto Sans CJK SC Regular" pitchFamily="2"/>
+                <a:cs typeface="Liberation Sans" pitchFamily="34"/>
+              </a:rPr>
+              <a:t>לכל אזרח </a:t>
+            </a:r>
+            <a:r>
+              <a:rPr lang="en-US" sz="4000" b="0" i="1" u="none" strike="noStrike" kern="1200" cap="none">
+                <a:ln>
+                  <a:noFill/>
+                </a:ln>
+                <a:solidFill>
+                  <a:srgbClr val="00FFFF"/>
+                </a:solidFill>
+                <a:latin typeface="Liberation Sans" pitchFamily="34"/>
+                <a:ea typeface="Noto Sans CJK SC Regular" pitchFamily="2"/>
+                <a:cs typeface="Liberation Sans" pitchFamily="34"/>
+              </a:rPr>
+              <a:t>i</a:t>
+            </a:r>
+            <a:r>
+              <a:rPr lang="he-IL" sz="4000" b="0" i="0" u="none" strike="noStrike" kern="1200" cap="none">
+                <a:ln>
+                  <a:noFill/>
+                </a:ln>
+                <a:solidFill>
+                  <a:srgbClr val="00FFFF"/>
+                </a:solidFill>
+                <a:latin typeface="Liberation Sans" pitchFamily="34"/>
+                <a:ea typeface="Noto Sans CJK SC Regular" pitchFamily="2"/>
+                <a:cs typeface="Liberation Sans" pitchFamily="34"/>
+              </a:rPr>
+              <a:t> </a:t>
+            </a:r>
+            <a:r>
+              <a:rPr lang="en-US" sz="4000" b="0" i="0" u="none" strike="noStrike" kern="1200" cap="none">
+                <a:ln>
+                  <a:noFill/>
+                </a:ln>
+                <a:solidFill>
+                  <a:srgbClr val="00FFFF"/>
+                </a:solidFill>
+                <a:latin typeface="Liberation Sans" pitchFamily="34"/>
+                <a:ea typeface="Noto Sans CJK SC Regular" pitchFamily="2"/>
+                <a:cs typeface="Liberation Sans" pitchFamily="34"/>
+              </a:rPr>
+              <a:t>יש </a:t>
+            </a:r>
+            <a:r>
+              <a:rPr lang="he-IL" sz="4000" b="1" i="0" u="none" strike="noStrike" kern="1200" cap="none">
+                <a:ln>
+                  <a:noFill/>
+                </a:ln>
+                <a:solidFill>
+                  <a:srgbClr val="00FFFF"/>
+                </a:solidFill>
+                <a:latin typeface="Liberation Sans" pitchFamily="34"/>
+                <a:ea typeface="Noto Sans CJK SC Regular" pitchFamily="2"/>
+                <a:cs typeface="Liberation Sans" pitchFamily="34"/>
+              </a:rPr>
+              <a:t>תקציב אידיאלי</a:t>
+            </a:r>
+            <a:r>
+              <a:rPr lang="en-US" sz="4000" b="0" i="0" u="none" strike="noStrike" kern="1200" cap="none">
+                <a:ln>
+                  <a:noFill/>
+                </a:ln>
+                <a:solidFill>
+                  <a:srgbClr val="00FFFF"/>
+                </a:solidFill>
+                <a:latin typeface="Liberation Sans" pitchFamily="34"/>
+                <a:ea typeface="Noto Sans CJK SC Regular" pitchFamily="2"/>
+                <a:cs typeface="Liberation Sans" pitchFamily="34"/>
+              </a:rPr>
+              <a:t>:</a:t>
+            </a:r>
+          </a:p>
+          <a:p>
+            <a:pPr marL="0" marR="0" lvl="0" indent="0" algn="l" rtl="0" hangingPunct="0">
+              <a:lnSpc>
+                <a:spcPct val="100000"/>
+              </a:lnSpc>
+              <a:spcBef>
+                <a:spcPts val="0"/>
+              </a:spcBef>
+              <a:spcAft>
+                <a:spcPts val="0"/>
+              </a:spcAft>
+              <a:buSzPct val="45000"/>
+              <a:buFont typeface="StarSymbol"/>
+              <a:buChar char="●"/>
+              <a:tabLst/>
+            </a:pPr>
+            <a:r>
+              <a:rPr lang="en-US" sz="4000" b="0" i="0" u="none" strike="noStrike" kern="1200" cap="none">
+                <a:ln>
+                  <a:noFill/>
+                </a:ln>
+                <a:solidFill>
+                  <a:srgbClr val="00FFFF"/>
+                </a:solidFill>
+                <a:latin typeface="Times New Roman" pitchFamily="18"/>
+                <a:ea typeface="Noto Sans CJK SC Regular" pitchFamily="2"/>
+                <a:cs typeface="Liberation Sans" pitchFamily="34"/>
+              </a:rPr>
+              <a:t>p</a:t>
+            </a:r>
+            <a:r>
+              <a:rPr lang="en-US" sz="4000" b="0" i="0" u="none" strike="noStrike" kern="1200" cap="none" baseline="-8000">
+                <a:ln>
+                  <a:noFill/>
+                </a:ln>
+                <a:solidFill>
+                  <a:srgbClr val="00FFFF"/>
+                </a:solidFill>
+                <a:latin typeface="Times New Roman" pitchFamily="18"/>
+                <a:ea typeface="Noto Sans CJK SC Regular" pitchFamily="2"/>
+                <a:cs typeface="Liberation Sans" pitchFamily="34"/>
+              </a:rPr>
+              <a:t>i,1</a:t>
+            </a:r>
+            <a:r>
+              <a:rPr lang="en-US" sz="4000" b="0" i="0" u="none" strike="noStrike" kern="1200" cap="none">
+                <a:ln>
+                  <a:noFill/>
+                </a:ln>
+                <a:solidFill>
+                  <a:srgbClr val="00FFFF"/>
+                </a:solidFill>
+                <a:latin typeface="Times New Roman" pitchFamily="18"/>
+                <a:ea typeface="Noto Sans CJK SC Regular" pitchFamily="2"/>
+                <a:cs typeface="Liberation Sans" pitchFamily="34"/>
+              </a:rPr>
+              <a:t>,…,p</a:t>
+            </a:r>
+            <a:r>
+              <a:rPr lang="en-US" sz="4000" b="0" i="0" u="none" strike="noStrike" kern="1200" cap="none" baseline="-8000">
+                <a:ln>
+                  <a:noFill/>
+                </a:ln>
+                <a:solidFill>
+                  <a:srgbClr val="00FFFF"/>
+                </a:solidFill>
+                <a:latin typeface="Times New Roman" pitchFamily="18"/>
+                <a:ea typeface="Noto Sans CJK SC Regular" pitchFamily="2"/>
+                <a:cs typeface="Liberation Sans" pitchFamily="34"/>
+              </a:rPr>
+              <a:t>i,m ;            </a:t>
+            </a:r>
+            <a:r>
+              <a:rPr lang="en-US" sz="4000" b="0" i="0" u="none" strike="noStrike" kern="1200" cap="none" baseline="0">
+                <a:ln>
+                  <a:noFill/>
+                </a:ln>
+                <a:solidFill>
+                  <a:srgbClr val="00FFFF"/>
+                </a:solidFill>
+                <a:latin typeface="Times New Roman" pitchFamily="18"/>
+                <a:ea typeface="Noto Sans CJK SC Regular" pitchFamily="2"/>
+                <a:cs typeface="Liberation Sans" pitchFamily="34"/>
+              </a:rPr>
+              <a:t>p</a:t>
+            </a:r>
+            <a:r>
+              <a:rPr lang="en-US" sz="4000" b="0" i="0" u="none" strike="noStrike" kern="1200" cap="none" baseline="-8000">
+                <a:ln>
+                  <a:noFill/>
+                </a:ln>
+                <a:solidFill>
+                  <a:srgbClr val="00FFFF"/>
+                </a:solidFill>
+                <a:latin typeface="Times New Roman" pitchFamily="18"/>
+                <a:ea typeface="Noto Sans CJK SC Regular" pitchFamily="2"/>
+                <a:cs typeface="Liberation Sans" pitchFamily="34"/>
+              </a:rPr>
+              <a:t>i,1 + … + </a:t>
+            </a:r>
+            <a:r>
+              <a:rPr lang="en-US" sz="4000" b="0" i="0" u="none" strike="noStrike" kern="1200" cap="none" baseline="0">
+                <a:ln>
+                  <a:noFill/>
+                </a:ln>
+                <a:solidFill>
+                  <a:srgbClr val="00FFFF"/>
+                </a:solidFill>
+                <a:latin typeface="Times New Roman" pitchFamily="18"/>
+                <a:ea typeface="Noto Sans CJK SC Regular" pitchFamily="2"/>
+                <a:cs typeface="Liberation Sans" pitchFamily="34"/>
+              </a:rPr>
+              <a:t>p</a:t>
+            </a:r>
+            <a:r>
+              <a:rPr lang="en-US" sz="4000" b="0" i="0" u="none" strike="noStrike" kern="1200" cap="none" baseline="-8000">
+                <a:ln>
+                  <a:noFill/>
+                </a:ln>
+                <a:solidFill>
+                  <a:srgbClr val="00FFFF"/>
+                </a:solidFill>
+                <a:latin typeface="Times New Roman" pitchFamily="18"/>
+                <a:ea typeface="Noto Sans CJK SC Regular" pitchFamily="2"/>
+                <a:cs typeface="Liberation Sans" pitchFamily="34"/>
+              </a:rPr>
+              <a:t>i,m</a:t>
+            </a:r>
+            <a:r>
+              <a:rPr lang="en-US" sz="4000" b="0" i="0" u="none" strike="noStrike" kern="1200" cap="none" baseline="0">
+                <a:ln>
+                  <a:noFill/>
+                </a:ln>
+                <a:solidFill>
+                  <a:srgbClr val="00FFFF"/>
+                </a:solidFill>
+                <a:latin typeface="Times New Roman" pitchFamily="18"/>
+                <a:ea typeface="Noto Sans CJK SC Regular" pitchFamily="2"/>
+                <a:cs typeface="Liberation Sans" pitchFamily="34"/>
+              </a:rPr>
+              <a:t>  = C</a:t>
+            </a:r>
+          </a:p>
+          <a:p>
+            <a:pPr marL="0" marR="0" lvl="0" indent="0" algn="l" rtl="0" hangingPunct="0">
+              <a:lnSpc>
+                <a:spcPct val="100000"/>
+              </a:lnSpc>
+              <a:spcBef>
+                <a:spcPts val="0"/>
+              </a:spcBef>
+              <a:spcAft>
+                <a:spcPts val="0"/>
+              </a:spcAft>
+              <a:buSzPct val="45000"/>
+              <a:buFont typeface="StarSymbol"/>
+              <a:buChar char="●"/>
+              <a:tabLst/>
+            </a:pPr>
+            <a:endParaRPr lang="en-US" sz="1800" b="0" i="0" u="none" strike="noStrike" kern="1200" cap="none">
+              <a:ln>
+                <a:noFill/>
+              </a:ln>
+              <a:latin typeface="Liberation Sans" pitchFamily="18"/>
+              <a:ea typeface="Noto Sans CJK SC Regular" pitchFamily="2"/>
+              <a:cs typeface="Nachlieli CLM" pitchFamily="2"/>
+            </a:endParaRPr>
+          </a:p>
+        </p:txBody>
+      </p:sp>
+      <p:sp>
+        <p:nvSpPr>
+          <p:cNvPr id="5" name="Title 1_1">
+            <a:extLst>
+              <a:ext uri="{FF2B5EF4-FFF2-40B4-BE49-F238E27FC236}">
+                <a16:creationId xmlns:a16="http://schemas.microsoft.com/office/drawing/2014/main" id="{E4A02ADF-81D7-1537-88CE-88993EC8531F}"/>
+              </a:ext>
+            </a:extLst>
+          </p:cNvPr>
+          <p:cNvSpPr txBox="1">
+            <a:spLocks noGrp="1"/>
+          </p:cNvSpPr>
+          <p:nvPr>
+            <p:ph type="title" idx="4294967295"/>
+          </p:nvPr>
+        </p:nvSpPr>
+        <p:spPr>
+          <a:xfrm>
+            <a:off x="366965" y="3637416"/>
+            <a:ext cx="9601200" cy="1460880"/>
+          </a:xfrm>
+        </p:spPr>
+        <p:txBody>
+          <a:bodyPr vert="horz" wrap="square" lIns="91440" tIns="45720" rIns="91440" bIns="45720">
+            <a:noAutofit/>
+          </a:bodyPr>
+          <a:lstStyle/>
+          <a:p>
+            <a:pPr lvl="0" rtl="1" hangingPunct="1">
+              <a:lnSpc>
+                <a:spcPct val="90000"/>
+              </a:lnSpc>
+            </a:pPr>
+            <a:r>
+              <a:rPr lang="he-IL" sz="5400">
+                <a:solidFill>
+                  <a:srgbClr val="000000"/>
+                </a:solidFill>
+                <a:latin typeface="Liberation Sans" pitchFamily="34"/>
+                <a:cs typeface="Liberation Sans" pitchFamily="34"/>
+              </a:rPr>
+              <a:t>הפלט:</a:t>
+            </a:r>
+          </a:p>
+        </p:txBody>
+      </p:sp>
+      <p:sp>
+        <p:nvSpPr>
+          <p:cNvPr id="6" name="TextBox 5">
+            <a:extLst>
+              <a:ext uri="{FF2B5EF4-FFF2-40B4-BE49-F238E27FC236}">
+                <a16:creationId xmlns:a16="http://schemas.microsoft.com/office/drawing/2014/main" id="{2C37DABC-B43F-CFF9-36F8-C4CD48B89554}"/>
+              </a:ext>
+            </a:extLst>
+          </p:cNvPr>
+          <p:cNvSpPr txBox="1"/>
+          <p:nvPr/>
+        </p:nvSpPr>
+        <p:spPr>
+          <a:xfrm>
+            <a:off x="274320" y="4754879"/>
+            <a:ext cx="9601200" cy="2480040"/>
+          </a:xfrm>
+          <a:prstGeom prst="rect">
+            <a:avLst/>
+          </a:prstGeom>
+          <a:noFill/>
+          <a:ln>
+            <a:noFill/>
+          </a:ln>
+        </p:spPr>
+        <p:txBody>
+          <a:bodyPr vert="horz" wrap="none" lIns="90000" tIns="45000" rIns="90000" bIns="45000" anchorCtr="0" compatLnSpc="0">
+            <a:spAutoFit/>
+          </a:bodyPr>
+          <a:lstStyle/>
+          <a:p>
+            <a:pPr marL="0" marR="0" lvl="0" indent="0" algn="r" rtl="1" hangingPunct="0">
+              <a:lnSpc>
+                <a:spcPct val="100000"/>
+              </a:lnSpc>
+              <a:spcBef>
+                <a:spcPts val="0"/>
+              </a:spcBef>
+              <a:spcAft>
+                <a:spcPts val="0"/>
+              </a:spcAft>
+              <a:buSzPct val="45000"/>
+              <a:buFont typeface="StarSymbol"/>
+              <a:buChar char="●"/>
+              <a:tabLst/>
+            </a:pPr>
+            <a:r>
+              <a:rPr lang="he-IL" sz="4000" b="0" i="0" u="none" strike="noStrike" kern="1200" cap="none">
+                <a:ln>
+                  <a:noFill/>
+                </a:ln>
+                <a:latin typeface="Liberation Sans" pitchFamily="34"/>
+                <a:ea typeface="Noto Sans CJK SC Regular" pitchFamily="2"/>
+                <a:cs typeface="Liberation Sans" pitchFamily="34"/>
+              </a:rPr>
+              <a:t>וקטור </a:t>
+            </a:r>
+            <a:r>
+              <a:rPr lang="en-US" sz="4000" b="1" i="0" u="none" strike="noStrike" kern="1200" cap="none">
+                <a:ln>
+                  <a:noFill/>
+                </a:ln>
+                <a:latin typeface="Liberation Sans" pitchFamily="34"/>
+                <a:ea typeface="Noto Sans CJK SC Regular" pitchFamily="2"/>
+                <a:cs typeface="Liberation Sans" pitchFamily="34"/>
+              </a:rPr>
+              <a:t>d</a:t>
+            </a:r>
+            <a:r>
+              <a:rPr lang="he-IL" sz="4000" b="0" i="0" u="none" strike="noStrike" kern="1200" cap="none">
+                <a:ln>
+                  <a:noFill/>
+                </a:ln>
+                <a:latin typeface="Liberation Sans" pitchFamily="34"/>
+                <a:ea typeface="Noto Sans CJK SC Regular" pitchFamily="2"/>
+                <a:cs typeface="Liberation Sans" pitchFamily="34"/>
+              </a:rPr>
+              <a:t> </a:t>
+            </a:r>
+            <a:r>
+              <a:rPr lang="en-US" sz="4000" b="0" i="0" u="none" strike="noStrike" kern="1200" cap="none">
+                <a:ln>
+                  <a:noFill/>
+                </a:ln>
+                <a:latin typeface="Liberation Sans" pitchFamily="34"/>
+                <a:ea typeface="Noto Sans CJK SC Regular" pitchFamily="2"/>
+                <a:cs typeface="Liberation Sans" pitchFamily="34"/>
+              </a:rPr>
+              <a:t>המייצג תקציב</a:t>
+            </a:r>
+            <a:r>
+              <a:rPr lang="he-IL" sz="4000" b="0" i="0" u="none" strike="noStrike" kern="1200" cap="none">
+                <a:ln>
+                  <a:noFill/>
+                </a:ln>
+                <a:latin typeface="Liberation Sans" pitchFamily="34"/>
+                <a:ea typeface="Noto Sans CJK SC Regular" pitchFamily="2"/>
+                <a:cs typeface="Liberation Sans" pitchFamily="34"/>
+              </a:rPr>
+              <a:t>: </a:t>
+            </a:r>
+            <a:r>
+              <a:rPr lang="en-US" sz="4000" b="0" i="0" u="none" strike="noStrike" kern="1200" cap="none">
+                <a:ln>
+                  <a:noFill/>
+                </a:ln>
+                <a:latin typeface="Liberation Sans" pitchFamily="34"/>
+                <a:ea typeface="Noto Sans CJK SC Regular" pitchFamily="2"/>
+                <a:cs typeface="Liberation Sans" pitchFamily="34"/>
+              </a:rPr>
+              <a:t>d</a:t>
+            </a:r>
+            <a:r>
+              <a:rPr lang="en-US" sz="4000" b="0" i="0" u="none" strike="noStrike" kern="1200" cap="none" baseline="-33000">
+                <a:ln>
+                  <a:noFill/>
+                </a:ln>
+                <a:latin typeface="Liberation Sans" pitchFamily="34"/>
+                <a:ea typeface="Noto Sans CJK SC Regular" pitchFamily="2"/>
+                <a:cs typeface="Liberation Sans" pitchFamily="34"/>
+              </a:rPr>
+              <a:t>1</a:t>
+            </a:r>
+            <a:r>
+              <a:rPr lang="en-US" sz="4000" b="0" i="0" u="none" strike="noStrike" kern="1200" cap="none">
+                <a:ln>
+                  <a:noFill/>
+                </a:ln>
+                <a:latin typeface="Liberation Sans" pitchFamily="34"/>
+                <a:ea typeface="Noto Sans CJK SC Regular" pitchFamily="2"/>
+                <a:cs typeface="Liberation Sans" pitchFamily="34"/>
+              </a:rPr>
+              <a:t>,…,d</a:t>
+            </a:r>
+            <a:r>
+              <a:rPr lang="en-US" sz="4000" b="0" i="0" u="none" strike="noStrike" kern="1200" cap="none" baseline="-33000">
+                <a:ln>
+                  <a:noFill/>
+                </a:ln>
+                <a:latin typeface="Liberation Sans" pitchFamily="34"/>
+                <a:ea typeface="Noto Sans CJK SC Regular" pitchFamily="2"/>
+                <a:cs typeface="Liberation Sans" pitchFamily="34"/>
+              </a:rPr>
+              <a:t>m</a:t>
+            </a:r>
+            <a:r>
+              <a:rPr lang="he-IL" sz="4000">
+                <a:latin typeface="Liberation Sans" pitchFamily="34"/>
+                <a:ea typeface="Noto Sans CJK SC Regular" pitchFamily="2"/>
+                <a:cs typeface="Liberation Sans" pitchFamily="34"/>
+              </a:rPr>
+              <a:t>.</a:t>
+            </a:r>
+            <a:endParaRPr lang="en-US" sz="4000" b="0" i="0" u="none" strike="noStrike" kern="1200" cap="none">
+              <a:ln>
+                <a:noFill/>
+              </a:ln>
+              <a:latin typeface="Liberation Sans" pitchFamily="34"/>
+              <a:ea typeface="Noto Sans CJK SC Regular" pitchFamily="2"/>
+              <a:cs typeface="Liberation Sans" pitchFamily="34"/>
+            </a:endParaRPr>
+          </a:p>
+          <a:p>
+            <a:pPr marL="571500" marR="0" lvl="1" indent="-571500" algn="l" rtl="0" hangingPunct="0">
+              <a:lnSpc>
+                <a:spcPct val="100000"/>
+              </a:lnSpc>
+              <a:spcBef>
+                <a:spcPts val="0"/>
+              </a:spcBef>
+              <a:spcAft>
+                <a:spcPts val="0"/>
+              </a:spcAft>
+              <a:buSzPct val="45000"/>
+              <a:buFont typeface="Arial" panose="020B0604020202020204" pitchFamily="34" charset="0"/>
+              <a:buChar char="•"/>
+              <a:tabLst/>
+            </a:pPr>
+            <a:r>
+              <a:rPr lang="en-US" sz="4000" b="0" i="0" u="none" strike="noStrike" kern="1200" cap="none">
+                <a:ln>
+                  <a:noFill/>
+                </a:ln>
+                <a:solidFill>
+                  <a:srgbClr val="00CC00"/>
+                </a:solidFill>
+                <a:latin typeface="Times New Roman" pitchFamily="18"/>
+                <a:ea typeface="David CLM" pitchFamily="2"/>
+                <a:cs typeface="Liberation Sans" pitchFamily="34"/>
+              </a:rPr>
+              <a:t>d</a:t>
+            </a:r>
+            <a:r>
+              <a:rPr lang="en-US" sz="4000" b="0" i="0" u="none" strike="noStrike" kern="1200" cap="none" baseline="-7000">
+                <a:ln>
+                  <a:noFill/>
+                </a:ln>
+                <a:solidFill>
+                  <a:srgbClr val="00CC00"/>
+                </a:solidFill>
+                <a:latin typeface="Times New Roman" pitchFamily="18"/>
+                <a:ea typeface="David CLM" pitchFamily="2"/>
+                <a:cs typeface="Liberation Sans" pitchFamily="34"/>
+              </a:rPr>
+              <a:t>1 </a:t>
+            </a:r>
+            <a:r>
+              <a:rPr lang="en-US" sz="4000" b="0" i="0" u="none" strike="noStrike" kern="1200" cap="none">
+                <a:ln>
+                  <a:noFill/>
+                </a:ln>
+                <a:solidFill>
+                  <a:srgbClr val="00CC00"/>
+                </a:solidFill>
+                <a:latin typeface="Times New Roman" pitchFamily="18"/>
+                <a:ea typeface="David CLM" pitchFamily="2"/>
+                <a:cs typeface="Liberation Sans" pitchFamily="34"/>
+              </a:rPr>
+              <a:t>+ … + d</a:t>
+            </a:r>
+            <a:r>
+              <a:rPr lang="en-US" sz="4000" b="0" i="0" u="none" strike="noStrike" kern="1200" cap="none" baseline="-7000">
+                <a:ln>
+                  <a:noFill/>
+                </a:ln>
+                <a:solidFill>
+                  <a:srgbClr val="00CC00"/>
+                </a:solidFill>
+                <a:latin typeface="Times New Roman" pitchFamily="18"/>
+                <a:ea typeface="David CLM" pitchFamily="2"/>
+                <a:cs typeface="Liberation Sans" pitchFamily="34"/>
+              </a:rPr>
+              <a:t>m</a:t>
+            </a:r>
+            <a:r>
+              <a:rPr lang="en-US" sz="4000" b="0" i="0" u="none" strike="noStrike" kern="1200" cap="none">
+                <a:ln>
+                  <a:noFill/>
+                </a:ln>
+                <a:solidFill>
+                  <a:srgbClr val="00CC00"/>
+                </a:solidFill>
+                <a:latin typeface="Times New Roman" pitchFamily="18"/>
+                <a:ea typeface="David CLM" pitchFamily="2"/>
+                <a:cs typeface="Liberation Sans" pitchFamily="34"/>
+              </a:rPr>
+              <a:t>=C</a:t>
+            </a:r>
+            <a:r>
+              <a:rPr lang="en-US" sz="4000">
+                <a:solidFill>
+                  <a:srgbClr val="00CC00"/>
+                </a:solidFill>
+                <a:latin typeface="Times New Roman" pitchFamily="18"/>
+                <a:ea typeface="David CLM" pitchFamily="2"/>
+                <a:cs typeface="Liberation Sans" pitchFamily="34"/>
+              </a:rPr>
+              <a:t>.</a:t>
+            </a:r>
+            <a:endParaRPr lang="en-US" sz="4000" b="0" i="0" u="none" strike="noStrike" kern="1200" cap="none">
+              <a:ln>
+                <a:noFill/>
+              </a:ln>
+              <a:solidFill>
+                <a:srgbClr val="00CC00"/>
+              </a:solidFill>
+              <a:latin typeface="Times New Roman" pitchFamily="18"/>
+              <a:ea typeface="David CLM" pitchFamily="2"/>
+              <a:cs typeface="Liberation Sans" pitchFamily="34"/>
+            </a:endParaRPr>
+          </a:p>
+          <a:p>
+            <a:pPr marL="0" marR="0" lvl="0" indent="0" algn="r" rtl="1" hangingPunct="0">
+              <a:lnSpc>
+                <a:spcPct val="100000"/>
+              </a:lnSpc>
+              <a:spcBef>
+                <a:spcPts val="0"/>
+              </a:spcBef>
+              <a:spcAft>
+                <a:spcPts val="0"/>
+              </a:spcAft>
+              <a:buSzPct val="45000"/>
+              <a:buFont typeface="StarSymbol"/>
+              <a:buChar char="●"/>
+              <a:tabLst/>
+            </a:pPr>
+            <a:r>
+              <a:rPr lang="he-IL" sz="4000" b="0" i="0" u="none" strike="noStrike" kern="1200" cap="none">
+                <a:ln>
+                  <a:noFill/>
+                </a:ln>
+                <a:solidFill>
+                  <a:srgbClr val="00FFFF"/>
+                </a:solidFill>
+                <a:latin typeface="Liberation Sans" pitchFamily="34"/>
+                <a:ea typeface="David CLM" pitchFamily="2"/>
+                <a:cs typeface="Liberation Sans" pitchFamily="34"/>
+              </a:rPr>
+              <a:t>התועלת של אזרח </a:t>
+            </a:r>
+            <a:r>
+              <a:rPr lang="en-US" sz="4000" b="0" i="0" u="none" strike="noStrike" kern="1200" cap="none">
+                <a:ln>
+                  <a:noFill/>
+                </a:ln>
+                <a:solidFill>
+                  <a:srgbClr val="00FFFF"/>
+                </a:solidFill>
+                <a:latin typeface="Liberation Sans" pitchFamily="34"/>
+                <a:ea typeface="David CLM" pitchFamily="2"/>
+                <a:cs typeface="Liberation Sans" pitchFamily="34"/>
+              </a:rPr>
+              <a:t>i</a:t>
+            </a:r>
+            <a:r>
+              <a:rPr lang="he-IL" sz="4000" b="0" i="0" u="none" strike="noStrike" kern="1200" cap="none">
+                <a:ln>
+                  <a:noFill/>
+                </a:ln>
+                <a:solidFill>
+                  <a:srgbClr val="00FFFF"/>
+                </a:solidFill>
+                <a:latin typeface="Liberation Sans" pitchFamily="34"/>
+                <a:ea typeface="David CLM" pitchFamily="2"/>
+                <a:cs typeface="Liberation Sans" pitchFamily="34"/>
+              </a:rPr>
+              <a:t> </a:t>
+            </a:r>
+            <a:r>
+              <a:rPr lang="en-US" sz="4000" b="0" i="0" u="none" strike="noStrike" kern="1200" cap="none">
+                <a:ln>
+                  <a:noFill/>
+                </a:ln>
+                <a:solidFill>
+                  <a:srgbClr val="00FFFF"/>
+                </a:solidFill>
+                <a:latin typeface="Liberation Sans" pitchFamily="34"/>
+                <a:ea typeface="David CLM" pitchFamily="2"/>
+                <a:cs typeface="Liberation Sans" pitchFamily="34"/>
+              </a:rPr>
+              <a:t>מהתקציב</a:t>
+            </a:r>
+            <a:r>
+              <a:rPr lang="he-IL" sz="4000" b="0" i="0" u="none" strike="noStrike" kern="1200" cap="none">
+                <a:ln>
+                  <a:noFill/>
+                </a:ln>
+                <a:solidFill>
+                  <a:srgbClr val="00FFFF"/>
+                </a:solidFill>
+                <a:latin typeface="Liberation Sans" pitchFamily="34"/>
+                <a:ea typeface="David CLM" pitchFamily="2"/>
+                <a:cs typeface="Liberation Sans" pitchFamily="34"/>
+              </a:rPr>
+              <a:t> </a:t>
+            </a:r>
+            <a:r>
+              <a:rPr lang="en-US" sz="4000" b="0" i="0" u="none" strike="noStrike" kern="1200" cap="none">
+                <a:ln>
+                  <a:noFill/>
+                </a:ln>
+                <a:solidFill>
+                  <a:srgbClr val="00FFFF"/>
+                </a:solidFill>
+                <a:latin typeface="Liberation Sans" pitchFamily="34"/>
+                <a:ea typeface="David CLM" pitchFamily="2"/>
+                <a:cs typeface="Liberation Sans" pitchFamily="34"/>
+              </a:rPr>
+              <a:t>d</a:t>
+            </a:r>
+            <a:r>
+              <a:rPr lang="he-IL" sz="4000" b="0" i="0" u="none" strike="noStrike" kern="1200" cap="none">
+                <a:ln>
+                  <a:noFill/>
+                </a:ln>
+                <a:solidFill>
+                  <a:srgbClr val="00FFFF"/>
+                </a:solidFill>
+                <a:latin typeface="Liberation Sans" pitchFamily="34"/>
+                <a:ea typeface="David CLM" pitchFamily="2"/>
+                <a:cs typeface="Liberation Sans" pitchFamily="34"/>
+              </a:rPr>
+              <a:t> </a:t>
+            </a:r>
+            <a:r>
+              <a:rPr lang="en-US" sz="4000" b="0" i="0" u="none" strike="noStrike" kern="1200" cap="none">
+                <a:ln>
+                  <a:noFill/>
+                </a:ln>
+                <a:solidFill>
+                  <a:srgbClr val="00FFFF"/>
+                </a:solidFill>
+                <a:latin typeface="Liberation Sans" pitchFamily="34"/>
+                <a:ea typeface="David CLM" pitchFamily="2"/>
+                <a:cs typeface="Liberation Sans" pitchFamily="34"/>
+              </a:rPr>
+              <a:t>היא:</a:t>
+            </a:r>
+          </a:p>
+          <a:p>
+            <a:pPr marL="571500" marR="0" lvl="0" indent="-571500" algn="l" rtl="0" hangingPunct="0">
+              <a:lnSpc>
+                <a:spcPct val="100000"/>
+              </a:lnSpc>
+              <a:spcBef>
+                <a:spcPts val="0"/>
+              </a:spcBef>
+              <a:spcAft>
+                <a:spcPts val="0"/>
+              </a:spcAft>
+              <a:buSzPct val="45000"/>
+              <a:buFont typeface="Arial" panose="020B0604020202020204" pitchFamily="34" charset="0"/>
+              <a:buChar char="•"/>
+              <a:tabLst/>
+            </a:pPr>
+            <a:r>
+              <a:rPr lang="en-US" sz="4000" b="0" i="0" u="none" strike="noStrike" kern="1200" cap="none">
+                <a:ln>
+                  <a:noFill/>
+                </a:ln>
+                <a:solidFill>
+                  <a:srgbClr val="00FFFF"/>
+                </a:solidFill>
+                <a:latin typeface="Times New Roman" pitchFamily="18"/>
+                <a:ea typeface="David CLM" pitchFamily="2"/>
+                <a:cs typeface="Liberation Sans" pitchFamily="34"/>
+              </a:rPr>
+              <a:t>u</a:t>
+            </a:r>
+            <a:r>
+              <a:rPr lang="en-US" sz="4000" b="0" i="0" u="none" strike="noStrike" kern="1200" cap="none" baseline="-7000">
+                <a:ln>
+                  <a:noFill/>
+                </a:ln>
+                <a:solidFill>
+                  <a:srgbClr val="00FFFF"/>
+                </a:solidFill>
+                <a:latin typeface="Times New Roman" pitchFamily="18"/>
+                <a:ea typeface="David CLM" pitchFamily="2"/>
+                <a:cs typeface="Liberation Sans" pitchFamily="34"/>
+              </a:rPr>
+              <a:t>i</a:t>
+            </a:r>
+            <a:r>
+              <a:rPr lang="en-US" sz="4000" b="0" i="0" u="none" strike="noStrike" kern="1200" cap="none">
+                <a:ln>
+                  <a:noFill/>
+                </a:ln>
+                <a:solidFill>
+                  <a:srgbClr val="00FFFF"/>
+                </a:solidFill>
+                <a:latin typeface="Times New Roman" pitchFamily="18"/>
+                <a:ea typeface="David CLM" pitchFamily="2"/>
+                <a:cs typeface="Liberation Sans" pitchFamily="34"/>
+              </a:rPr>
+              <a:t>(d) = - Sum[j=1,…,m]  |</a:t>
+            </a:r>
+            <a:r>
+              <a:rPr lang="en-US" sz="4000" b="0" i="0" u="none" strike="noStrike" kern="1200" cap="none" baseline="-7000">
+                <a:ln>
+                  <a:noFill/>
+                </a:ln>
+                <a:solidFill>
+                  <a:srgbClr val="00FFFF"/>
+                </a:solidFill>
+                <a:latin typeface="Times New Roman" pitchFamily="18"/>
+                <a:ea typeface="David CLM" pitchFamily="2"/>
+                <a:cs typeface="Liberation Sans" pitchFamily="34"/>
+              </a:rPr>
+              <a:t> </a:t>
+            </a:r>
+            <a:r>
+              <a:rPr lang="en-US" sz="4000" b="0" i="0" u="none" strike="noStrike" kern="1200" cap="none">
+                <a:ln>
+                  <a:noFill/>
+                </a:ln>
+                <a:solidFill>
+                  <a:srgbClr val="00FFFF"/>
+                </a:solidFill>
+                <a:latin typeface="Times New Roman" pitchFamily="18"/>
+                <a:ea typeface="David CLM" pitchFamily="2"/>
+                <a:cs typeface="Liberation Sans" pitchFamily="34"/>
+              </a:rPr>
+              <a:t>d</a:t>
+            </a:r>
+            <a:r>
+              <a:rPr lang="en-US" sz="4000" b="0" i="0" u="none" strike="noStrike" kern="1200" cap="none" baseline="-7000">
+                <a:ln>
+                  <a:noFill/>
+                </a:ln>
+                <a:solidFill>
+                  <a:srgbClr val="00FFFF"/>
+                </a:solidFill>
+                <a:latin typeface="Times New Roman" pitchFamily="18"/>
+                <a:ea typeface="David CLM" pitchFamily="2"/>
+                <a:cs typeface="Liberation Sans" pitchFamily="34"/>
+              </a:rPr>
+              <a:t>j –</a:t>
+            </a:r>
+            <a:r>
+              <a:rPr lang="en-US" sz="4000" b="0" i="0" u="none" strike="noStrike" kern="1200" cap="none" baseline="0">
+                <a:ln>
+                  <a:noFill/>
+                </a:ln>
+                <a:solidFill>
+                  <a:srgbClr val="00FFFF"/>
+                </a:solidFill>
+                <a:latin typeface="Times New Roman" pitchFamily="18"/>
+                <a:ea typeface="David CLM" pitchFamily="2"/>
+                <a:cs typeface="Liberation Sans" pitchFamily="34"/>
+              </a:rPr>
+              <a:t> p</a:t>
+            </a:r>
+            <a:r>
+              <a:rPr lang="en-US" sz="4000" b="0" i="0" u="none" strike="noStrike" kern="1200" cap="none" baseline="-8000">
+                <a:ln>
+                  <a:noFill/>
+                </a:ln>
+                <a:solidFill>
+                  <a:srgbClr val="00FFFF"/>
+                </a:solidFill>
+                <a:latin typeface="Times New Roman" pitchFamily="18"/>
+                <a:ea typeface="David CLM" pitchFamily="2"/>
+                <a:cs typeface="Liberation Sans" pitchFamily="34"/>
+              </a:rPr>
+              <a:t>i,j</a:t>
+            </a:r>
+            <a:r>
+              <a:rPr lang="en-US" sz="4000" b="0" i="0" u="none" strike="noStrike" kern="1200" cap="none" baseline="0">
+                <a:ln>
+                  <a:noFill/>
+                </a:ln>
+                <a:solidFill>
+                  <a:srgbClr val="00FFFF"/>
+                </a:solidFill>
+                <a:latin typeface="Times New Roman" pitchFamily="18"/>
+                <a:ea typeface="David CLM" pitchFamily="2"/>
+                <a:cs typeface="Liberation Sans" pitchFamily="34"/>
+              </a:rPr>
+              <a:t> |</a:t>
+            </a:r>
+          </a:p>
+        </p:txBody>
+      </p:sp>
+    </p:spTree>
+  </p:cSld>
+  <p:clrMapOvr>
+    <a:masterClrMapping/>
+  </p:clrMapOvr>
+  <p:timing>
+    <p:tnLst>
+      <p:par>
+        <p:cTn id="1" dur="indefinite" restart="never" nodeType="tmRoot">
+          <p:childTnLst>
+            <p:seq concurrent="1" nextAc="seek">
+              <p:cTn id="2" dur="indefinite" nodeType="mainSeq">
+                <p:childTnLst>
+                  <p:par>
+                    <p:cTn id="3" fill="hold">
+                      <p:stCondLst>
+                        <p:cond delay="indefinite"/>
+                      </p:stCondLst>
+                      <p:childTnLst>
+                        <p:par>
+                          <p:cTn id="4" fill="hold">
+                            <p:stCondLst>
+                              <p:cond delay="0"/>
+                            </p:stCondLst>
+                            <p:childTnLst>
+                              <p:par>
+                                <p:cTn id="5" presetClass="entr" fill="hold" nodeType="clickEffect">
+                                  <p:stCondLst>
+                                    <p:cond delay="0"/>
+                                  </p:stCondLst>
+                                  <p:childTnLst>
+                                    <p:set>
+                                      <p:cBhvr>
+                                        <p:cTn id="6" dur="1" fill="hold">
+                                          <p:stCondLst>
+                                            <p:cond delay="0"/>
+                                          </p:stCondLst>
+                                        </p:cTn>
+                                        <p:tgtEl>
+                                          <p:spTgt spid="5"/>
+                                        </p:tgtEl>
+                                        <p:attrNameLst>
+                                          <p:attrName>style.visibility</p:attrName>
+                                        </p:attrNameLst>
+                                      </p:cBhvr>
+                                      <p:to>
+                                        <p:strVal val="visible"/>
+                                      </p:to>
+                                    </p:set>
+                                  </p:childTnLst>
+                                </p:cTn>
+                              </p:par>
+                              <p:par>
+                                <p:cTn id="7" presetClass="entr" fill="hold" nodeType="withEffect">
+                                  <p:stCondLst>
+                                    <p:cond delay="0"/>
+                                  </p:stCondLst>
+                                  <p:childTnLst>
+                                    <p:set>
+                                      <p:cBhvr>
+                                        <p:cTn id="8" dur="1" fill="hold">
+                                          <p:stCondLst>
+                                            <p:cond delay="0"/>
+                                          </p:stCondLst>
+                                        </p:cTn>
+                                        <p:tgtEl>
+                                          <p:spTgt spid="6"/>
+                                        </p:tgtEl>
+                                        <p:attrNameLst>
+                                          <p:attrName>style.visibility</p:attrName>
+                                        </p:attrNameLst>
+                                      </p:cBhvr>
+                                      <p:to>
+                                        <p:strVal val="visible"/>
+                                      </p:to>
+                                    </p:set>
+                                  </p:childTnLst>
+                                </p:cTn>
+                              </p:par>
+                            </p:childTnLst>
+                          </p:cTn>
+                        </p:par>
+                      </p:childTnLst>
+                    </p:cTn>
+                  </p:par>
+                </p:childTnLst>
+              </p:cTn>
+              <p:prevCondLst>
+                <p:cond evt="onPrev" delay="0">
+                  <p:tgtEl>
+                    <p:sldTgt/>
+                  </p:tgtEl>
+                </p:cond>
+              </p:prevCondLst>
+              <p:nextCondLst>
+                <p:cond evt="onNext" delay="0">
+                  <p:tgtEl>
+                    <p:sldTgt/>
+                  </p:tgtEl>
+                </p:cond>
+              </p:nextCondLst>
+            </p:seq>
+          </p:childTnLst>
+        </p:cTn>
+      </p:par>
+    </p:tnLst>
+  </p:timing>
+</p:sld>
+</file>
+
+<file path=ppt/slides/slide20.xml><?xml version="1.0" encoding="utf-8"?>
 <p:sld xmlns:a="http://schemas.openxmlformats.org/drawingml/2006/main" xmlns:r="http://schemas.openxmlformats.org/officeDocument/2006/relationships" xmlns:p="http://schemas.openxmlformats.org/presentationml/2006/main">
   <p:cSld name="page19">
     <p:spTree>
@@ -29792,1350 +32123,7 @@
 </p:sld>
 </file>
 
-<file path=ppt/slides/slide2.xml><?xml version="1.0" encoding="utf-8"?>
-<p:sld xmlns:a="http://schemas.openxmlformats.org/drawingml/2006/main" xmlns:r="http://schemas.openxmlformats.org/officeDocument/2006/relationships" xmlns:p="http://schemas.openxmlformats.org/presentationml/2006/main">
-  <p:cSld name="page2">
-    <p:spTree>
-      <p:nvGrpSpPr>
-        <p:cNvPr id="1" name=""/>
-        <p:cNvGrpSpPr/>
-        <p:nvPr/>
-      </p:nvGrpSpPr>
-      <p:grpSpPr>
-        <a:xfrm>
-          <a:off x="0" y="0"/>
-          <a:ext cx="0" cy="0"/>
-          <a:chOff x="0" y="0"/>
-          <a:chExt cx="0" cy="0"/>
-        </a:xfrm>
-      </p:grpSpPr>
-      <p:sp>
-        <p:nvSpPr>
-          <p:cNvPr id="2" name="Title 1">
-            <a:extLst>
-              <a:ext uri="{FF2B5EF4-FFF2-40B4-BE49-F238E27FC236}">
-                <a16:creationId xmlns:a16="http://schemas.microsoft.com/office/drawing/2014/main" id="{B62C061A-F4E6-01BD-26E4-CA2E842B404A}"/>
-              </a:ext>
-            </a:extLst>
-          </p:cNvPr>
-          <p:cNvSpPr txBox="1">
-            <a:spLocks noGrp="1"/>
-          </p:cNvSpPr>
-          <p:nvPr>
-            <p:ph type="title" idx="4294967295"/>
-          </p:nvPr>
-        </p:nvSpPr>
-        <p:spPr>
-          <a:xfrm>
-            <a:off x="274320" y="-91440"/>
-            <a:ext cx="9601200" cy="1460880"/>
-          </a:xfrm>
-        </p:spPr>
-        <p:txBody>
-          <a:bodyPr vert="horz" wrap="square" lIns="91440" tIns="45720" rIns="91440" bIns="45720">
-            <a:noAutofit/>
-          </a:bodyPr>
-          <a:lstStyle/>
-          <a:p>
-            <a:pPr lvl="0" rtl="1" hangingPunct="1">
-              <a:lnSpc>
-                <a:spcPct val="90000"/>
-              </a:lnSpc>
-            </a:pPr>
-            <a:r>
-              <a:rPr lang="he-IL" sz="5400">
-                <a:solidFill>
-                  <a:srgbClr val="000000"/>
-                </a:solidFill>
-                <a:latin typeface="Liberation Sans" pitchFamily="34"/>
-                <a:cs typeface="Liberation Sans" pitchFamily="34"/>
-              </a:rPr>
-              <a:t>הקלט:</a:t>
-            </a:r>
-          </a:p>
-        </p:txBody>
-      </p:sp>
-      <p:sp>
-        <p:nvSpPr>
-          <p:cNvPr id="3" name="Content Placeholder 2">
-            <a:extLst>
-              <a:ext uri="{FF2B5EF4-FFF2-40B4-BE49-F238E27FC236}">
-                <a16:creationId xmlns:a16="http://schemas.microsoft.com/office/drawing/2014/main" id="{CB9C90E4-71ED-0C71-53AD-D5737E3DD942}"/>
-              </a:ext>
-            </a:extLst>
-          </p:cNvPr>
-          <p:cNvSpPr txBox="1"/>
-          <p:nvPr/>
-        </p:nvSpPr>
-        <p:spPr>
-          <a:xfrm>
-            <a:off x="457200" y="1188719"/>
-            <a:ext cx="8694360" cy="4796280"/>
-          </a:xfrm>
-          <a:prstGeom prst="rect">
-            <a:avLst/>
-          </a:prstGeom>
-          <a:noFill/>
-          <a:ln>
-            <a:noFill/>
-          </a:ln>
-        </p:spPr>
-        <p:txBody>
-          <a:bodyPr wrap="square" lIns="91440" tIns="45720" rIns="91440" bIns="45720" anchor="t" compatLnSpc="0">
-            <a:noAutofit/>
-          </a:bodyPr>
-          <a:lstStyle/>
-          <a:p>
-            <a:pPr marL="0" marR="0" lvl="0" indent="0" algn="l" hangingPunct="0">
-              <a:spcBef>
-                <a:spcPts val="2750"/>
-              </a:spcBef>
-              <a:spcAft>
-                <a:spcPts val="0"/>
-              </a:spcAft>
-              <a:buNone/>
-              <a:tabLst/>
-            </a:pPr>
-            <a:endParaRPr lang="en-US" sz="3000" b="0" i="0" u="none" strike="noStrike" kern="1200" spc="0">
-              <a:ln>
-                <a:noFill/>
-              </a:ln>
-              <a:solidFill>
-                <a:srgbClr val="000000"/>
-              </a:solidFill>
-              <a:latin typeface="ＭＳ Ｐゴシック" pitchFamily="18"/>
-              <a:ea typeface="Liberation Sans" pitchFamily="34"/>
-              <a:cs typeface="DejaVu Sans" pitchFamily="2"/>
-            </a:endParaRPr>
-          </a:p>
-        </p:txBody>
-      </p:sp>
-      <p:sp>
-        <p:nvSpPr>
-          <p:cNvPr id="4" name="TextBox 3">
-            <a:extLst>
-              <a:ext uri="{FF2B5EF4-FFF2-40B4-BE49-F238E27FC236}">
-                <a16:creationId xmlns:a16="http://schemas.microsoft.com/office/drawing/2014/main" id="{B50FAF53-F7CB-4218-592E-AB11D40D6F10}"/>
-              </a:ext>
-            </a:extLst>
-          </p:cNvPr>
-          <p:cNvSpPr txBox="1"/>
-          <p:nvPr/>
-        </p:nvSpPr>
-        <p:spPr>
-          <a:xfrm>
-            <a:off x="180709" y="695849"/>
-            <a:ext cx="9694811" cy="3305541"/>
-          </a:xfrm>
-          <a:prstGeom prst="rect">
-            <a:avLst/>
-          </a:prstGeom>
-          <a:noFill/>
-          <a:ln>
-            <a:noFill/>
-          </a:ln>
-        </p:spPr>
-        <p:txBody>
-          <a:bodyPr vert="horz" wrap="none" lIns="90000" tIns="45000" rIns="90000" bIns="45000" anchorCtr="0" compatLnSpc="0">
-            <a:spAutoFit/>
-          </a:bodyPr>
-          <a:lstStyle/>
-          <a:p>
-            <a:pPr marL="0" marR="0" lvl="0" indent="0" algn="r" rtl="1" hangingPunct="0">
-              <a:lnSpc>
-                <a:spcPct val="100000"/>
-              </a:lnSpc>
-              <a:spcBef>
-                <a:spcPts val="0"/>
-              </a:spcBef>
-              <a:spcAft>
-                <a:spcPts val="0"/>
-              </a:spcAft>
-              <a:buSzPct val="45000"/>
-              <a:buFont typeface="StarSymbol"/>
-              <a:buChar char="●"/>
-              <a:tabLst/>
-            </a:pPr>
-            <a:r>
-              <a:rPr lang="he-IL" sz="4000" b="0" i="0" u="none" strike="noStrike" kern="1200" cap="none">
-                <a:ln>
-                  <a:noFill/>
-                </a:ln>
-                <a:latin typeface="Liberation Sans" pitchFamily="34"/>
-                <a:ea typeface="Noto Sans CJK SC Regular" pitchFamily="2"/>
-                <a:cs typeface="Liberation Sans" pitchFamily="34"/>
-              </a:rPr>
-              <a:t>כסף בקופה: </a:t>
-            </a:r>
-            <a:r>
-              <a:rPr lang="en-US" sz="4000" b="0" i="0" u="none" strike="noStrike" kern="1200" cap="none">
-                <a:ln>
-                  <a:noFill/>
-                </a:ln>
-                <a:latin typeface="Liberation Sans" pitchFamily="34"/>
-                <a:ea typeface="Noto Sans CJK SC Regular" pitchFamily="2"/>
-                <a:cs typeface="Liberation Sans" pitchFamily="34"/>
-              </a:rPr>
-              <a:t>C</a:t>
-            </a:r>
-            <a:r>
-              <a:rPr lang="he-IL" sz="4000" b="0" i="0" u="none" strike="noStrike" kern="1200" cap="none">
-                <a:ln>
-                  <a:noFill/>
-                </a:ln>
-                <a:latin typeface="Liberation Sans" pitchFamily="34"/>
-                <a:ea typeface="Noto Sans CJK SC Regular" pitchFamily="2"/>
-                <a:cs typeface="Liberation Sans" pitchFamily="34"/>
-              </a:rPr>
-              <a:t>.</a:t>
-            </a:r>
-            <a:endParaRPr lang="en-US" sz="4000" b="0" i="0" u="none" strike="noStrike" kern="1200" cap="none">
-              <a:ln>
-                <a:noFill/>
-              </a:ln>
-              <a:latin typeface="Liberation Sans" pitchFamily="34"/>
-              <a:ea typeface="Noto Sans CJK SC Regular" pitchFamily="2"/>
-              <a:cs typeface="Liberation Sans" pitchFamily="34"/>
-            </a:endParaRPr>
-          </a:p>
-          <a:p>
-            <a:pPr marL="0" marR="0" lvl="0" indent="0" algn="r" rtl="1" hangingPunct="0">
-              <a:lnSpc>
-                <a:spcPct val="100000"/>
-              </a:lnSpc>
-              <a:spcBef>
-                <a:spcPts val="0"/>
-              </a:spcBef>
-              <a:spcAft>
-                <a:spcPts val="0"/>
-              </a:spcAft>
-              <a:buSzPct val="45000"/>
-              <a:buFont typeface="StarSymbol"/>
-              <a:buChar char="●"/>
-              <a:tabLst/>
-            </a:pPr>
-            <a:r>
-              <a:rPr lang="he-IL" sz="4000" b="0" i="0" u="none" strike="noStrike" kern="1200" cap="none">
-                <a:ln>
-                  <a:noFill/>
-                </a:ln>
-                <a:solidFill>
-                  <a:srgbClr val="00CC00"/>
-                </a:solidFill>
-                <a:latin typeface="Liberation Sans" pitchFamily="34"/>
-                <a:ea typeface="Noto Sans CJK SC Regular" pitchFamily="2"/>
-                <a:cs typeface="Liberation Sans" pitchFamily="34"/>
-              </a:rPr>
-              <a:t>נושאים: </a:t>
-            </a:r>
-            <a:r>
-              <a:rPr lang="en-US" sz="4000" b="0" i="0" u="none" strike="noStrike" kern="1200" cap="none">
-                <a:ln>
-                  <a:noFill/>
-                </a:ln>
-                <a:solidFill>
-                  <a:srgbClr val="00CC00"/>
-                </a:solidFill>
-                <a:latin typeface="Liberation Sans" pitchFamily="34"/>
-                <a:ea typeface="Noto Sans CJK SC Regular" pitchFamily="2"/>
-                <a:cs typeface="Liberation Sans" pitchFamily="34"/>
-              </a:rPr>
-              <a:t>1,...,m</a:t>
-            </a:r>
-            <a:r>
-              <a:rPr lang="he-IL" sz="4000" b="0" i="0" u="none" strike="noStrike" kern="1200" cap="none">
-                <a:ln>
-                  <a:noFill/>
-                </a:ln>
-                <a:solidFill>
-                  <a:srgbClr val="00CC00"/>
-                </a:solidFill>
-                <a:latin typeface="Liberation Sans" pitchFamily="34"/>
-                <a:ea typeface="Noto Sans CJK SC Regular" pitchFamily="2"/>
-                <a:cs typeface="Liberation Sans" pitchFamily="34"/>
-              </a:rPr>
-              <a:t> (</a:t>
-            </a:r>
-            <a:r>
-              <a:rPr lang="en-US" sz="4000" b="0" i="0" u="none" strike="noStrike" kern="1200" cap="none">
-                <a:ln>
-                  <a:noFill/>
-                </a:ln>
-                <a:solidFill>
-                  <a:srgbClr val="00CC00"/>
-                </a:solidFill>
-                <a:latin typeface="Liberation Sans" pitchFamily="34"/>
-                <a:ea typeface="Noto Sans CJK SC Regular" pitchFamily="2"/>
-                <a:cs typeface="Liberation Sans" pitchFamily="34"/>
-              </a:rPr>
-              <a:t>סעיפי תקציב</a:t>
-            </a:r>
-            <a:r>
-              <a:rPr lang="he-IL" sz="4000">
-                <a:solidFill>
-                  <a:srgbClr val="00CC00"/>
-                </a:solidFill>
-                <a:latin typeface="Liberation Sans" pitchFamily="34"/>
-                <a:ea typeface="Noto Sans CJK SC Regular" pitchFamily="2"/>
-                <a:cs typeface="Liberation Sans" pitchFamily="34"/>
-              </a:rPr>
-              <a:t>).</a:t>
-            </a:r>
-            <a:endParaRPr lang="en-US" sz="4000" b="0" i="0" u="none" strike="noStrike" kern="1200" cap="none">
-              <a:ln>
-                <a:noFill/>
-              </a:ln>
-              <a:solidFill>
-                <a:srgbClr val="00CC00"/>
-              </a:solidFill>
-              <a:latin typeface="Liberation Sans" pitchFamily="34"/>
-              <a:ea typeface="Noto Sans CJK SC Regular" pitchFamily="2"/>
-              <a:cs typeface="Liberation Sans" pitchFamily="34"/>
-            </a:endParaRPr>
-          </a:p>
-          <a:p>
-            <a:pPr marL="0" marR="0" lvl="0" indent="0" algn="r" rtl="1" hangingPunct="0">
-              <a:lnSpc>
-                <a:spcPct val="100000"/>
-              </a:lnSpc>
-              <a:spcBef>
-                <a:spcPts val="0"/>
-              </a:spcBef>
-              <a:spcAft>
-                <a:spcPts val="0"/>
-              </a:spcAft>
-              <a:buSzPct val="45000"/>
-              <a:buFont typeface="StarSymbol"/>
-              <a:buChar char="●"/>
-              <a:tabLst/>
-            </a:pPr>
-            <a:r>
-              <a:rPr lang="he-IL" sz="4000" b="0" i="0" u="none" strike="noStrike" kern="1200" cap="none">
-                <a:ln>
-                  <a:noFill/>
-                </a:ln>
-                <a:solidFill>
-                  <a:srgbClr val="0066FF"/>
-                </a:solidFill>
-                <a:latin typeface="Liberation Sans" pitchFamily="34"/>
-                <a:ea typeface="Noto Sans CJK SC Regular" pitchFamily="2"/>
-                <a:cs typeface="Liberation Sans" pitchFamily="34"/>
-              </a:rPr>
-              <a:t>אזרחים: </a:t>
-            </a:r>
-            <a:r>
-              <a:rPr lang="en-US" sz="4000" b="0" i="0" u="none" strike="noStrike" kern="1200" cap="none">
-                <a:ln>
-                  <a:noFill/>
-                </a:ln>
-                <a:solidFill>
-                  <a:srgbClr val="0066FF"/>
-                </a:solidFill>
-                <a:latin typeface="Liberation Sans" pitchFamily="34"/>
-                <a:ea typeface="Noto Sans CJK SC Regular" pitchFamily="2"/>
-                <a:cs typeface="Liberation Sans" pitchFamily="34"/>
-              </a:rPr>
-              <a:t>1,...,n</a:t>
-            </a:r>
-            <a:r>
-              <a:rPr lang="he-IL" sz="4000" b="0" i="0" u="none" strike="noStrike" kern="1200" cap="none">
-                <a:ln>
-                  <a:noFill/>
-                </a:ln>
-                <a:solidFill>
-                  <a:srgbClr val="0066FF"/>
-                </a:solidFill>
-                <a:latin typeface="Liberation Sans" pitchFamily="34"/>
-                <a:ea typeface="Noto Sans CJK SC Regular" pitchFamily="2"/>
-                <a:cs typeface="Liberation Sans" pitchFamily="34"/>
-              </a:rPr>
-              <a:t>.</a:t>
-            </a:r>
-            <a:endParaRPr lang="en-US" sz="4000" b="0" i="0" u="none" strike="noStrike" kern="1200" cap="none">
-              <a:ln>
-                <a:noFill/>
-              </a:ln>
-              <a:solidFill>
-                <a:srgbClr val="0066FF"/>
-              </a:solidFill>
-              <a:latin typeface="Liberation Sans" pitchFamily="34"/>
-              <a:ea typeface="Noto Sans CJK SC Regular" pitchFamily="2"/>
-              <a:cs typeface="Liberation Sans" pitchFamily="34"/>
-            </a:endParaRPr>
-          </a:p>
-          <a:p>
-            <a:pPr marL="0" marR="0" lvl="0" indent="0" algn="r" rtl="1" hangingPunct="0">
-              <a:lnSpc>
-                <a:spcPct val="100000"/>
-              </a:lnSpc>
-              <a:spcBef>
-                <a:spcPts val="0"/>
-              </a:spcBef>
-              <a:spcAft>
-                <a:spcPts val="0"/>
-              </a:spcAft>
-              <a:buSzPct val="45000"/>
-              <a:buFont typeface="StarSymbol"/>
-              <a:buChar char="●"/>
-              <a:tabLst/>
-            </a:pPr>
-            <a:r>
-              <a:rPr lang="he-IL" sz="4000" b="0" i="0" u="none" strike="noStrike" kern="1200" cap="none">
-                <a:ln>
-                  <a:noFill/>
-                </a:ln>
-                <a:solidFill>
-                  <a:srgbClr val="00FFFF"/>
-                </a:solidFill>
-                <a:latin typeface="Liberation Sans" pitchFamily="34"/>
-                <a:ea typeface="Noto Sans CJK SC Regular" pitchFamily="2"/>
-                <a:cs typeface="Liberation Sans" pitchFamily="34"/>
-              </a:rPr>
-              <a:t>לכל אזרח </a:t>
-            </a:r>
-            <a:r>
-              <a:rPr lang="en-US" sz="4000" b="0" i="1" u="none" strike="noStrike" kern="1200" cap="none">
-                <a:ln>
-                  <a:noFill/>
-                </a:ln>
-                <a:solidFill>
-                  <a:srgbClr val="00FFFF"/>
-                </a:solidFill>
-                <a:latin typeface="Liberation Sans" pitchFamily="34"/>
-                <a:ea typeface="Noto Sans CJK SC Regular" pitchFamily="2"/>
-                <a:cs typeface="Liberation Sans" pitchFamily="34"/>
-              </a:rPr>
-              <a:t>i</a:t>
-            </a:r>
-            <a:r>
-              <a:rPr lang="he-IL" sz="4000" b="0" i="0" u="none" strike="noStrike" kern="1200" cap="none">
-                <a:ln>
-                  <a:noFill/>
-                </a:ln>
-                <a:solidFill>
-                  <a:srgbClr val="00FFFF"/>
-                </a:solidFill>
-                <a:latin typeface="Liberation Sans" pitchFamily="34"/>
-                <a:ea typeface="Noto Sans CJK SC Regular" pitchFamily="2"/>
-                <a:cs typeface="Liberation Sans" pitchFamily="34"/>
-              </a:rPr>
-              <a:t> </a:t>
-            </a:r>
-            <a:r>
-              <a:rPr lang="en-US" sz="4000" b="0" i="0" u="none" strike="noStrike" kern="1200" cap="none">
-                <a:ln>
-                  <a:noFill/>
-                </a:ln>
-                <a:solidFill>
-                  <a:srgbClr val="00FFFF"/>
-                </a:solidFill>
-                <a:latin typeface="Liberation Sans" pitchFamily="34"/>
-                <a:ea typeface="Noto Sans CJK SC Regular" pitchFamily="2"/>
-                <a:cs typeface="Liberation Sans" pitchFamily="34"/>
-              </a:rPr>
-              <a:t>יש </a:t>
-            </a:r>
-            <a:r>
-              <a:rPr lang="he-IL" sz="4000" b="1" i="0" u="none" strike="noStrike" kern="1200" cap="none">
-                <a:ln>
-                  <a:noFill/>
-                </a:ln>
-                <a:solidFill>
-                  <a:srgbClr val="00FFFF"/>
-                </a:solidFill>
-                <a:latin typeface="Liberation Sans" pitchFamily="34"/>
-                <a:ea typeface="Noto Sans CJK SC Regular" pitchFamily="2"/>
-                <a:cs typeface="Liberation Sans" pitchFamily="34"/>
-              </a:rPr>
-              <a:t>תקציב אידיאלי</a:t>
-            </a:r>
-            <a:r>
-              <a:rPr lang="en-US" sz="4000" b="0" i="0" u="none" strike="noStrike" kern="1200" cap="none">
-                <a:ln>
-                  <a:noFill/>
-                </a:ln>
-                <a:solidFill>
-                  <a:srgbClr val="00FFFF"/>
-                </a:solidFill>
-                <a:latin typeface="Liberation Sans" pitchFamily="34"/>
-                <a:ea typeface="Noto Sans CJK SC Regular" pitchFamily="2"/>
-                <a:cs typeface="Liberation Sans" pitchFamily="34"/>
-              </a:rPr>
-              <a:t>:</a:t>
-            </a:r>
-          </a:p>
-          <a:p>
-            <a:pPr marL="0" marR="0" lvl="0" indent="0" algn="l" rtl="0" hangingPunct="0">
-              <a:lnSpc>
-                <a:spcPct val="100000"/>
-              </a:lnSpc>
-              <a:spcBef>
-                <a:spcPts val="0"/>
-              </a:spcBef>
-              <a:spcAft>
-                <a:spcPts val="0"/>
-              </a:spcAft>
-              <a:buSzPct val="45000"/>
-              <a:buFont typeface="StarSymbol"/>
-              <a:buChar char="●"/>
-              <a:tabLst/>
-            </a:pPr>
-            <a:r>
-              <a:rPr lang="en-US" sz="4000" b="0" i="0" u="none" strike="noStrike" kern="1200" cap="none">
-                <a:ln>
-                  <a:noFill/>
-                </a:ln>
-                <a:solidFill>
-                  <a:srgbClr val="00FFFF"/>
-                </a:solidFill>
-                <a:latin typeface="Times New Roman" pitchFamily="18"/>
-                <a:ea typeface="Noto Sans CJK SC Regular" pitchFamily="2"/>
-                <a:cs typeface="Liberation Sans" pitchFamily="34"/>
-              </a:rPr>
-              <a:t>p</a:t>
-            </a:r>
-            <a:r>
-              <a:rPr lang="en-US" sz="4000" b="0" i="0" u="none" strike="noStrike" kern="1200" cap="none" baseline="-8000">
-                <a:ln>
-                  <a:noFill/>
-                </a:ln>
-                <a:solidFill>
-                  <a:srgbClr val="00FFFF"/>
-                </a:solidFill>
-                <a:latin typeface="Times New Roman" pitchFamily="18"/>
-                <a:ea typeface="Noto Sans CJK SC Regular" pitchFamily="2"/>
-                <a:cs typeface="Liberation Sans" pitchFamily="34"/>
-              </a:rPr>
-              <a:t>i,1</a:t>
-            </a:r>
-            <a:r>
-              <a:rPr lang="en-US" sz="4000" b="0" i="0" u="none" strike="noStrike" kern="1200" cap="none">
-                <a:ln>
-                  <a:noFill/>
-                </a:ln>
-                <a:solidFill>
-                  <a:srgbClr val="00FFFF"/>
-                </a:solidFill>
-                <a:latin typeface="Times New Roman" pitchFamily="18"/>
-                <a:ea typeface="Noto Sans CJK SC Regular" pitchFamily="2"/>
-                <a:cs typeface="Liberation Sans" pitchFamily="34"/>
-              </a:rPr>
-              <a:t>,…,p</a:t>
-            </a:r>
-            <a:r>
-              <a:rPr lang="en-US" sz="4000" b="0" i="0" u="none" strike="noStrike" kern="1200" cap="none" baseline="-8000">
-                <a:ln>
-                  <a:noFill/>
-                </a:ln>
-                <a:solidFill>
-                  <a:srgbClr val="00FFFF"/>
-                </a:solidFill>
-                <a:latin typeface="Times New Roman" pitchFamily="18"/>
-                <a:ea typeface="Noto Sans CJK SC Regular" pitchFamily="2"/>
-                <a:cs typeface="Liberation Sans" pitchFamily="34"/>
-              </a:rPr>
-              <a:t>i,m ;            </a:t>
-            </a:r>
-            <a:r>
-              <a:rPr lang="en-US" sz="4000" b="0" i="0" u="none" strike="noStrike" kern="1200" cap="none" baseline="0">
-                <a:ln>
-                  <a:noFill/>
-                </a:ln>
-                <a:solidFill>
-                  <a:srgbClr val="00FFFF"/>
-                </a:solidFill>
-                <a:latin typeface="Times New Roman" pitchFamily="18"/>
-                <a:ea typeface="Noto Sans CJK SC Regular" pitchFamily="2"/>
-                <a:cs typeface="Liberation Sans" pitchFamily="34"/>
-              </a:rPr>
-              <a:t>p</a:t>
-            </a:r>
-            <a:r>
-              <a:rPr lang="en-US" sz="4000" b="0" i="0" u="none" strike="noStrike" kern="1200" cap="none" baseline="-8000">
-                <a:ln>
-                  <a:noFill/>
-                </a:ln>
-                <a:solidFill>
-                  <a:srgbClr val="00FFFF"/>
-                </a:solidFill>
-                <a:latin typeface="Times New Roman" pitchFamily="18"/>
-                <a:ea typeface="Noto Sans CJK SC Regular" pitchFamily="2"/>
-                <a:cs typeface="Liberation Sans" pitchFamily="34"/>
-              </a:rPr>
-              <a:t>i,1 + … + </a:t>
-            </a:r>
-            <a:r>
-              <a:rPr lang="en-US" sz="4000" b="0" i="0" u="none" strike="noStrike" kern="1200" cap="none" baseline="0">
-                <a:ln>
-                  <a:noFill/>
-                </a:ln>
-                <a:solidFill>
-                  <a:srgbClr val="00FFFF"/>
-                </a:solidFill>
-                <a:latin typeface="Times New Roman" pitchFamily="18"/>
-                <a:ea typeface="Noto Sans CJK SC Regular" pitchFamily="2"/>
-                <a:cs typeface="Liberation Sans" pitchFamily="34"/>
-              </a:rPr>
-              <a:t>p</a:t>
-            </a:r>
-            <a:r>
-              <a:rPr lang="en-US" sz="4000" b="0" i="0" u="none" strike="noStrike" kern="1200" cap="none" baseline="-8000">
-                <a:ln>
-                  <a:noFill/>
-                </a:ln>
-                <a:solidFill>
-                  <a:srgbClr val="00FFFF"/>
-                </a:solidFill>
-                <a:latin typeface="Times New Roman" pitchFamily="18"/>
-                <a:ea typeface="Noto Sans CJK SC Regular" pitchFamily="2"/>
-                <a:cs typeface="Liberation Sans" pitchFamily="34"/>
-              </a:rPr>
-              <a:t>i,m</a:t>
-            </a:r>
-            <a:r>
-              <a:rPr lang="en-US" sz="4000" b="0" i="0" u="none" strike="noStrike" kern="1200" cap="none" baseline="0">
-                <a:ln>
-                  <a:noFill/>
-                </a:ln>
-                <a:solidFill>
-                  <a:srgbClr val="00FFFF"/>
-                </a:solidFill>
-                <a:latin typeface="Times New Roman" pitchFamily="18"/>
-                <a:ea typeface="Noto Sans CJK SC Regular" pitchFamily="2"/>
-                <a:cs typeface="Liberation Sans" pitchFamily="34"/>
-              </a:rPr>
-              <a:t>  = C</a:t>
-            </a:r>
-          </a:p>
-          <a:p>
-            <a:pPr marL="0" marR="0" lvl="0" indent="0" algn="l" rtl="0" hangingPunct="0">
-              <a:lnSpc>
-                <a:spcPct val="100000"/>
-              </a:lnSpc>
-              <a:spcBef>
-                <a:spcPts val="0"/>
-              </a:spcBef>
-              <a:spcAft>
-                <a:spcPts val="0"/>
-              </a:spcAft>
-              <a:buSzPct val="45000"/>
-              <a:buFont typeface="StarSymbol"/>
-              <a:buChar char="●"/>
-              <a:tabLst/>
-            </a:pPr>
-            <a:endParaRPr lang="en-US" sz="1800" b="0" i="0" u="none" strike="noStrike" kern="1200" cap="none">
-              <a:ln>
-                <a:noFill/>
-              </a:ln>
-              <a:latin typeface="Liberation Sans" pitchFamily="18"/>
-              <a:ea typeface="Noto Sans CJK SC Regular" pitchFamily="2"/>
-              <a:cs typeface="Nachlieli CLM" pitchFamily="2"/>
-            </a:endParaRPr>
-          </a:p>
-        </p:txBody>
-      </p:sp>
-      <p:sp>
-        <p:nvSpPr>
-          <p:cNvPr id="5" name="Title 1_1">
-            <a:extLst>
-              <a:ext uri="{FF2B5EF4-FFF2-40B4-BE49-F238E27FC236}">
-                <a16:creationId xmlns:a16="http://schemas.microsoft.com/office/drawing/2014/main" id="{E4A02ADF-81D7-1537-88CE-88993EC8531F}"/>
-              </a:ext>
-            </a:extLst>
-          </p:cNvPr>
-          <p:cNvSpPr txBox="1">
-            <a:spLocks noGrp="1"/>
-          </p:cNvSpPr>
-          <p:nvPr>
-            <p:ph type="title" idx="4294967295"/>
-          </p:nvPr>
-        </p:nvSpPr>
-        <p:spPr>
-          <a:xfrm>
-            <a:off x="366965" y="3637416"/>
-            <a:ext cx="9601200" cy="1460880"/>
-          </a:xfrm>
-        </p:spPr>
-        <p:txBody>
-          <a:bodyPr vert="horz" wrap="square" lIns="91440" tIns="45720" rIns="91440" bIns="45720">
-            <a:noAutofit/>
-          </a:bodyPr>
-          <a:lstStyle/>
-          <a:p>
-            <a:pPr lvl="0" rtl="1" hangingPunct="1">
-              <a:lnSpc>
-                <a:spcPct val="90000"/>
-              </a:lnSpc>
-            </a:pPr>
-            <a:r>
-              <a:rPr lang="he-IL" sz="5400">
-                <a:solidFill>
-                  <a:srgbClr val="000000"/>
-                </a:solidFill>
-                <a:latin typeface="Liberation Sans" pitchFamily="34"/>
-                <a:cs typeface="Liberation Sans" pitchFamily="34"/>
-              </a:rPr>
-              <a:t>הפלט:</a:t>
-            </a:r>
-          </a:p>
-        </p:txBody>
-      </p:sp>
-      <p:sp>
-        <p:nvSpPr>
-          <p:cNvPr id="6" name="TextBox 5">
-            <a:extLst>
-              <a:ext uri="{FF2B5EF4-FFF2-40B4-BE49-F238E27FC236}">
-                <a16:creationId xmlns:a16="http://schemas.microsoft.com/office/drawing/2014/main" id="{2C37DABC-B43F-CFF9-36F8-C4CD48B89554}"/>
-              </a:ext>
-            </a:extLst>
-          </p:cNvPr>
-          <p:cNvSpPr txBox="1"/>
-          <p:nvPr/>
-        </p:nvSpPr>
-        <p:spPr>
-          <a:xfrm>
-            <a:off x="274320" y="4754879"/>
-            <a:ext cx="9601200" cy="2480040"/>
-          </a:xfrm>
-          <a:prstGeom prst="rect">
-            <a:avLst/>
-          </a:prstGeom>
-          <a:noFill/>
-          <a:ln>
-            <a:noFill/>
-          </a:ln>
-        </p:spPr>
-        <p:txBody>
-          <a:bodyPr vert="horz" wrap="none" lIns="90000" tIns="45000" rIns="90000" bIns="45000" anchorCtr="0" compatLnSpc="0">
-            <a:spAutoFit/>
-          </a:bodyPr>
-          <a:lstStyle/>
-          <a:p>
-            <a:pPr marL="0" marR="0" lvl="0" indent="0" algn="r" rtl="1" hangingPunct="0">
-              <a:lnSpc>
-                <a:spcPct val="100000"/>
-              </a:lnSpc>
-              <a:spcBef>
-                <a:spcPts val="0"/>
-              </a:spcBef>
-              <a:spcAft>
-                <a:spcPts val="0"/>
-              </a:spcAft>
-              <a:buSzPct val="45000"/>
-              <a:buFont typeface="StarSymbol"/>
-              <a:buChar char="●"/>
-              <a:tabLst/>
-            </a:pPr>
-            <a:r>
-              <a:rPr lang="he-IL" sz="4000" b="0" i="0" u="none" strike="noStrike" kern="1200" cap="none">
-                <a:ln>
-                  <a:noFill/>
-                </a:ln>
-                <a:latin typeface="Liberation Sans" pitchFamily="34"/>
-                <a:ea typeface="Noto Sans CJK SC Regular" pitchFamily="2"/>
-                <a:cs typeface="Liberation Sans" pitchFamily="34"/>
-              </a:rPr>
-              <a:t>וקטור </a:t>
-            </a:r>
-            <a:r>
-              <a:rPr lang="en-US" sz="4000" b="1" i="0" u="none" strike="noStrike" kern="1200" cap="none">
-                <a:ln>
-                  <a:noFill/>
-                </a:ln>
-                <a:latin typeface="Liberation Sans" pitchFamily="34"/>
-                <a:ea typeface="Noto Sans CJK SC Regular" pitchFamily="2"/>
-                <a:cs typeface="Liberation Sans" pitchFamily="34"/>
-              </a:rPr>
-              <a:t>d</a:t>
-            </a:r>
-            <a:r>
-              <a:rPr lang="he-IL" sz="4000" b="0" i="0" u="none" strike="noStrike" kern="1200" cap="none">
-                <a:ln>
-                  <a:noFill/>
-                </a:ln>
-                <a:latin typeface="Liberation Sans" pitchFamily="34"/>
-                <a:ea typeface="Noto Sans CJK SC Regular" pitchFamily="2"/>
-                <a:cs typeface="Liberation Sans" pitchFamily="34"/>
-              </a:rPr>
-              <a:t> </a:t>
-            </a:r>
-            <a:r>
-              <a:rPr lang="en-US" sz="4000" b="0" i="0" u="none" strike="noStrike" kern="1200" cap="none">
-                <a:ln>
-                  <a:noFill/>
-                </a:ln>
-                <a:latin typeface="Liberation Sans" pitchFamily="34"/>
-                <a:ea typeface="Noto Sans CJK SC Regular" pitchFamily="2"/>
-                <a:cs typeface="Liberation Sans" pitchFamily="34"/>
-              </a:rPr>
-              <a:t>המייצג תקציב</a:t>
-            </a:r>
-            <a:r>
-              <a:rPr lang="he-IL" sz="4000" b="0" i="0" u="none" strike="noStrike" kern="1200" cap="none">
-                <a:ln>
-                  <a:noFill/>
-                </a:ln>
-                <a:latin typeface="Liberation Sans" pitchFamily="34"/>
-                <a:ea typeface="Noto Sans CJK SC Regular" pitchFamily="2"/>
-                <a:cs typeface="Liberation Sans" pitchFamily="34"/>
-              </a:rPr>
-              <a:t>: </a:t>
-            </a:r>
-            <a:r>
-              <a:rPr lang="en-US" sz="4000" b="0" i="0" u="none" strike="noStrike" kern="1200" cap="none">
-                <a:ln>
-                  <a:noFill/>
-                </a:ln>
-                <a:latin typeface="Liberation Sans" pitchFamily="34"/>
-                <a:ea typeface="Noto Sans CJK SC Regular" pitchFamily="2"/>
-                <a:cs typeface="Liberation Sans" pitchFamily="34"/>
-              </a:rPr>
-              <a:t>d</a:t>
-            </a:r>
-            <a:r>
-              <a:rPr lang="en-US" sz="4000" b="0" i="0" u="none" strike="noStrike" kern="1200" cap="none" baseline="-33000">
-                <a:ln>
-                  <a:noFill/>
-                </a:ln>
-                <a:latin typeface="Liberation Sans" pitchFamily="34"/>
-                <a:ea typeface="Noto Sans CJK SC Regular" pitchFamily="2"/>
-                <a:cs typeface="Liberation Sans" pitchFamily="34"/>
-              </a:rPr>
-              <a:t>1</a:t>
-            </a:r>
-            <a:r>
-              <a:rPr lang="en-US" sz="4000" b="0" i="0" u="none" strike="noStrike" kern="1200" cap="none">
-                <a:ln>
-                  <a:noFill/>
-                </a:ln>
-                <a:latin typeface="Liberation Sans" pitchFamily="34"/>
-                <a:ea typeface="Noto Sans CJK SC Regular" pitchFamily="2"/>
-                <a:cs typeface="Liberation Sans" pitchFamily="34"/>
-              </a:rPr>
-              <a:t>,…,d</a:t>
-            </a:r>
-            <a:r>
-              <a:rPr lang="en-US" sz="4000" b="0" i="0" u="none" strike="noStrike" kern="1200" cap="none" baseline="-33000">
-                <a:ln>
-                  <a:noFill/>
-                </a:ln>
-                <a:latin typeface="Liberation Sans" pitchFamily="34"/>
-                <a:ea typeface="Noto Sans CJK SC Regular" pitchFamily="2"/>
-                <a:cs typeface="Liberation Sans" pitchFamily="34"/>
-              </a:rPr>
-              <a:t>m</a:t>
-            </a:r>
-            <a:r>
-              <a:rPr lang="he-IL" sz="4000">
-                <a:latin typeface="Liberation Sans" pitchFamily="34"/>
-                <a:ea typeface="Noto Sans CJK SC Regular" pitchFamily="2"/>
-                <a:cs typeface="Liberation Sans" pitchFamily="34"/>
-              </a:rPr>
-              <a:t>.</a:t>
-            </a:r>
-            <a:endParaRPr lang="en-US" sz="4000" b="0" i="0" u="none" strike="noStrike" kern="1200" cap="none">
-              <a:ln>
-                <a:noFill/>
-              </a:ln>
-              <a:latin typeface="Liberation Sans" pitchFamily="34"/>
-              <a:ea typeface="Noto Sans CJK SC Regular" pitchFamily="2"/>
-              <a:cs typeface="Liberation Sans" pitchFamily="34"/>
-            </a:endParaRPr>
-          </a:p>
-          <a:p>
-            <a:pPr marL="571500" marR="0" lvl="1" indent="-571500" algn="l" rtl="0" hangingPunct="0">
-              <a:lnSpc>
-                <a:spcPct val="100000"/>
-              </a:lnSpc>
-              <a:spcBef>
-                <a:spcPts val="0"/>
-              </a:spcBef>
-              <a:spcAft>
-                <a:spcPts val="0"/>
-              </a:spcAft>
-              <a:buSzPct val="45000"/>
-              <a:buFont typeface="Arial" panose="020B0604020202020204" pitchFamily="34" charset="0"/>
-              <a:buChar char="•"/>
-              <a:tabLst/>
-            </a:pPr>
-            <a:r>
-              <a:rPr lang="en-US" sz="4000" b="0" i="0" u="none" strike="noStrike" kern="1200" cap="none">
-                <a:ln>
-                  <a:noFill/>
-                </a:ln>
-                <a:solidFill>
-                  <a:srgbClr val="00CC00"/>
-                </a:solidFill>
-                <a:latin typeface="Times New Roman" pitchFamily="18"/>
-                <a:ea typeface="David CLM" pitchFamily="2"/>
-                <a:cs typeface="Liberation Sans" pitchFamily="34"/>
-              </a:rPr>
-              <a:t>d</a:t>
-            </a:r>
-            <a:r>
-              <a:rPr lang="en-US" sz="4000" b="0" i="0" u="none" strike="noStrike" kern="1200" cap="none" baseline="-7000">
-                <a:ln>
-                  <a:noFill/>
-                </a:ln>
-                <a:solidFill>
-                  <a:srgbClr val="00CC00"/>
-                </a:solidFill>
-                <a:latin typeface="Times New Roman" pitchFamily="18"/>
-                <a:ea typeface="David CLM" pitchFamily="2"/>
-                <a:cs typeface="Liberation Sans" pitchFamily="34"/>
-              </a:rPr>
-              <a:t>1 </a:t>
-            </a:r>
-            <a:r>
-              <a:rPr lang="en-US" sz="4000" b="0" i="0" u="none" strike="noStrike" kern="1200" cap="none">
-                <a:ln>
-                  <a:noFill/>
-                </a:ln>
-                <a:solidFill>
-                  <a:srgbClr val="00CC00"/>
-                </a:solidFill>
-                <a:latin typeface="Times New Roman" pitchFamily="18"/>
-                <a:ea typeface="David CLM" pitchFamily="2"/>
-                <a:cs typeface="Liberation Sans" pitchFamily="34"/>
-              </a:rPr>
-              <a:t>+ … + d</a:t>
-            </a:r>
-            <a:r>
-              <a:rPr lang="en-US" sz="4000" b="0" i="0" u="none" strike="noStrike" kern="1200" cap="none" baseline="-7000">
-                <a:ln>
-                  <a:noFill/>
-                </a:ln>
-                <a:solidFill>
-                  <a:srgbClr val="00CC00"/>
-                </a:solidFill>
-                <a:latin typeface="Times New Roman" pitchFamily="18"/>
-                <a:ea typeface="David CLM" pitchFamily="2"/>
-                <a:cs typeface="Liberation Sans" pitchFamily="34"/>
-              </a:rPr>
-              <a:t>m</a:t>
-            </a:r>
-            <a:r>
-              <a:rPr lang="en-US" sz="4000" b="0" i="0" u="none" strike="noStrike" kern="1200" cap="none">
-                <a:ln>
-                  <a:noFill/>
-                </a:ln>
-                <a:solidFill>
-                  <a:srgbClr val="00CC00"/>
-                </a:solidFill>
-                <a:latin typeface="Times New Roman" pitchFamily="18"/>
-                <a:ea typeface="David CLM" pitchFamily="2"/>
-                <a:cs typeface="Liberation Sans" pitchFamily="34"/>
-              </a:rPr>
-              <a:t>=C</a:t>
-            </a:r>
-            <a:r>
-              <a:rPr lang="en-US" sz="4000">
-                <a:solidFill>
-                  <a:srgbClr val="00CC00"/>
-                </a:solidFill>
-                <a:latin typeface="Times New Roman" pitchFamily="18"/>
-                <a:ea typeface="David CLM" pitchFamily="2"/>
-                <a:cs typeface="Liberation Sans" pitchFamily="34"/>
-              </a:rPr>
-              <a:t>.</a:t>
-            </a:r>
-            <a:endParaRPr lang="en-US" sz="4000" b="0" i="0" u="none" strike="noStrike" kern="1200" cap="none">
-              <a:ln>
-                <a:noFill/>
-              </a:ln>
-              <a:solidFill>
-                <a:srgbClr val="00CC00"/>
-              </a:solidFill>
-              <a:latin typeface="Times New Roman" pitchFamily="18"/>
-              <a:ea typeface="David CLM" pitchFamily="2"/>
-              <a:cs typeface="Liberation Sans" pitchFamily="34"/>
-            </a:endParaRPr>
-          </a:p>
-          <a:p>
-            <a:pPr marL="0" marR="0" lvl="0" indent="0" algn="r" rtl="1" hangingPunct="0">
-              <a:lnSpc>
-                <a:spcPct val="100000"/>
-              </a:lnSpc>
-              <a:spcBef>
-                <a:spcPts val="0"/>
-              </a:spcBef>
-              <a:spcAft>
-                <a:spcPts val="0"/>
-              </a:spcAft>
-              <a:buSzPct val="45000"/>
-              <a:buFont typeface="StarSymbol"/>
-              <a:buChar char="●"/>
-              <a:tabLst/>
-            </a:pPr>
-            <a:r>
-              <a:rPr lang="he-IL" sz="4000" b="0" i="0" u="none" strike="noStrike" kern="1200" cap="none">
-                <a:ln>
-                  <a:noFill/>
-                </a:ln>
-                <a:solidFill>
-                  <a:srgbClr val="00FFFF"/>
-                </a:solidFill>
-                <a:latin typeface="Liberation Sans" pitchFamily="34"/>
-                <a:ea typeface="David CLM" pitchFamily="2"/>
-                <a:cs typeface="Liberation Sans" pitchFamily="34"/>
-              </a:rPr>
-              <a:t>התועלת של אזרח </a:t>
-            </a:r>
-            <a:r>
-              <a:rPr lang="en-US" sz="4000" b="0" i="0" u="none" strike="noStrike" kern="1200" cap="none">
-                <a:ln>
-                  <a:noFill/>
-                </a:ln>
-                <a:solidFill>
-                  <a:srgbClr val="00FFFF"/>
-                </a:solidFill>
-                <a:latin typeface="Liberation Sans" pitchFamily="34"/>
-                <a:ea typeface="David CLM" pitchFamily="2"/>
-                <a:cs typeface="Liberation Sans" pitchFamily="34"/>
-              </a:rPr>
-              <a:t>i</a:t>
-            </a:r>
-            <a:r>
-              <a:rPr lang="he-IL" sz="4000" b="0" i="0" u="none" strike="noStrike" kern="1200" cap="none">
-                <a:ln>
-                  <a:noFill/>
-                </a:ln>
-                <a:solidFill>
-                  <a:srgbClr val="00FFFF"/>
-                </a:solidFill>
-                <a:latin typeface="Liberation Sans" pitchFamily="34"/>
-                <a:ea typeface="David CLM" pitchFamily="2"/>
-                <a:cs typeface="Liberation Sans" pitchFamily="34"/>
-              </a:rPr>
-              <a:t> </a:t>
-            </a:r>
-            <a:r>
-              <a:rPr lang="en-US" sz="4000" b="0" i="0" u="none" strike="noStrike" kern="1200" cap="none">
-                <a:ln>
-                  <a:noFill/>
-                </a:ln>
-                <a:solidFill>
-                  <a:srgbClr val="00FFFF"/>
-                </a:solidFill>
-                <a:latin typeface="Liberation Sans" pitchFamily="34"/>
-                <a:ea typeface="David CLM" pitchFamily="2"/>
-                <a:cs typeface="Liberation Sans" pitchFamily="34"/>
-              </a:rPr>
-              <a:t>מהתקציב</a:t>
-            </a:r>
-            <a:r>
-              <a:rPr lang="he-IL" sz="4000" b="0" i="0" u="none" strike="noStrike" kern="1200" cap="none">
-                <a:ln>
-                  <a:noFill/>
-                </a:ln>
-                <a:solidFill>
-                  <a:srgbClr val="00FFFF"/>
-                </a:solidFill>
-                <a:latin typeface="Liberation Sans" pitchFamily="34"/>
-                <a:ea typeface="David CLM" pitchFamily="2"/>
-                <a:cs typeface="Liberation Sans" pitchFamily="34"/>
-              </a:rPr>
-              <a:t> </a:t>
-            </a:r>
-            <a:r>
-              <a:rPr lang="en-US" sz="4000" b="0" i="0" u="none" strike="noStrike" kern="1200" cap="none">
-                <a:ln>
-                  <a:noFill/>
-                </a:ln>
-                <a:solidFill>
-                  <a:srgbClr val="00FFFF"/>
-                </a:solidFill>
-                <a:latin typeface="Liberation Sans" pitchFamily="34"/>
-                <a:ea typeface="David CLM" pitchFamily="2"/>
-                <a:cs typeface="Liberation Sans" pitchFamily="34"/>
-              </a:rPr>
-              <a:t>d</a:t>
-            </a:r>
-            <a:r>
-              <a:rPr lang="he-IL" sz="4000" b="0" i="0" u="none" strike="noStrike" kern="1200" cap="none">
-                <a:ln>
-                  <a:noFill/>
-                </a:ln>
-                <a:solidFill>
-                  <a:srgbClr val="00FFFF"/>
-                </a:solidFill>
-                <a:latin typeface="Liberation Sans" pitchFamily="34"/>
-                <a:ea typeface="David CLM" pitchFamily="2"/>
-                <a:cs typeface="Liberation Sans" pitchFamily="34"/>
-              </a:rPr>
-              <a:t> </a:t>
-            </a:r>
-            <a:r>
-              <a:rPr lang="en-US" sz="4000" b="0" i="0" u="none" strike="noStrike" kern="1200" cap="none">
-                <a:ln>
-                  <a:noFill/>
-                </a:ln>
-                <a:solidFill>
-                  <a:srgbClr val="00FFFF"/>
-                </a:solidFill>
-                <a:latin typeface="Liberation Sans" pitchFamily="34"/>
-                <a:ea typeface="David CLM" pitchFamily="2"/>
-                <a:cs typeface="Liberation Sans" pitchFamily="34"/>
-              </a:rPr>
-              <a:t>היא:</a:t>
-            </a:r>
-          </a:p>
-          <a:p>
-            <a:pPr marL="571500" marR="0" lvl="0" indent="-571500" algn="l" rtl="0" hangingPunct="0">
-              <a:lnSpc>
-                <a:spcPct val="100000"/>
-              </a:lnSpc>
-              <a:spcBef>
-                <a:spcPts val="0"/>
-              </a:spcBef>
-              <a:spcAft>
-                <a:spcPts val="0"/>
-              </a:spcAft>
-              <a:buSzPct val="45000"/>
-              <a:buFont typeface="Arial" panose="020B0604020202020204" pitchFamily="34" charset="0"/>
-              <a:buChar char="•"/>
-              <a:tabLst/>
-            </a:pPr>
-            <a:r>
-              <a:rPr lang="en-US" sz="4000" b="0" i="0" u="none" strike="noStrike" kern="1200" cap="none">
-                <a:ln>
-                  <a:noFill/>
-                </a:ln>
-                <a:solidFill>
-                  <a:srgbClr val="00FFFF"/>
-                </a:solidFill>
-                <a:latin typeface="Times New Roman" pitchFamily="18"/>
-                <a:ea typeface="David CLM" pitchFamily="2"/>
-                <a:cs typeface="Liberation Sans" pitchFamily="34"/>
-              </a:rPr>
-              <a:t>u</a:t>
-            </a:r>
-            <a:r>
-              <a:rPr lang="en-US" sz="4000" b="0" i="0" u="none" strike="noStrike" kern="1200" cap="none" baseline="-7000">
-                <a:ln>
-                  <a:noFill/>
-                </a:ln>
-                <a:solidFill>
-                  <a:srgbClr val="00FFFF"/>
-                </a:solidFill>
-                <a:latin typeface="Times New Roman" pitchFamily="18"/>
-                <a:ea typeface="David CLM" pitchFamily="2"/>
-                <a:cs typeface="Liberation Sans" pitchFamily="34"/>
-              </a:rPr>
-              <a:t>i</a:t>
-            </a:r>
-            <a:r>
-              <a:rPr lang="en-US" sz="4000" b="0" i="0" u="none" strike="noStrike" kern="1200" cap="none">
-                <a:ln>
-                  <a:noFill/>
-                </a:ln>
-                <a:solidFill>
-                  <a:srgbClr val="00FFFF"/>
-                </a:solidFill>
-                <a:latin typeface="Times New Roman" pitchFamily="18"/>
-                <a:ea typeface="David CLM" pitchFamily="2"/>
-                <a:cs typeface="Liberation Sans" pitchFamily="34"/>
-              </a:rPr>
-              <a:t>(d) = - Sum[j=1,…,m]  |</a:t>
-            </a:r>
-            <a:r>
-              <a:rPr lang="en-US" sz="4000" b="0" i="0" u="none" strike="noStrike" kern="1200" cap="none" baseline="-7000">
-                <a:ln>
-                  <a:noFill/>
-                </a:ln>
-                <a:solidFill>
-                  <a:srgbClr val="00FFFF"/>
-                </a:solidFill>
-                <a:latin typeface="Times New Roman" pitchFamily="18"/>
-                <a:ea typeface="David CLM" pitchFamily="2"/>
-                <a:cs typeface="Liberation Sans" pitchFamily="34"/>
-              </a:rPr>
-              <a:t> </a:t>
-            </a:r>
-            <a:r>
-              <a:rPr lang="en-US" sz="4000" b="0" i="0" u="none" strike="noStrike" kern="1200" cap="none">
-                <a:ln>
-                  <a:noFill/>
-                </a:ln>
-                <a:solidFill>
-                  <a:srgbClr val="00FFFF"/>
-                </a:solidFill>
-                <a:latin typeface="Times New Roman" pitchFamily="18"/>
-                <a:ea typeface="David CLM" pitchFamily="2"/>
-                <a:cs typeface="Liberation Sans" pitchFamily="34"/>
-              </a:rPr>
-              <a:t>d</a:t>
-            </a:r>
-            <a:r>
-              <a:rPr lang="en-US" sz="4000" b="0" i="0" u="none" strike="noStrike" kern="1200" cap="none" baseline="-7000">
-                <a:ln>
-                  <a:noFill/>
-                </a:ln>
-                <a:solidFill>
-                  <a:srgbClr val="00FFFF"/>
-                </a:solidFill>
-                <a:latin typeface="Times New Roman" pitchFamily="18"/>
-                <a:ea typeface="David CLM" pitchFamily="2"/>
-                <a:cs typeface="Liberation Sans" pitchFamily="34"/>
-              </a:rPr>
-              <a:t>j –</a:t>
-            </a:r>
-            <a:r>
-              <a:rPr lang="en-US" sz="4000" b="0" i="0" u="none" strike="noStrike" kern="1200" cap="none" baseline="0">
-                <a:ln>
-                  <a:noFill/>
-                </a:ln>
-                <a:solidFill>
-                  <a:srgbClr val="00FFFF"/>
-                </a:solidFill>
-                <a:latin typeface="Times New Roman" pitchFamily="18"/>
-                <a:ea typeface="David CLM" pitchFamily="2"/>
-                <a:cs typeface="Liberation Sans" pitchFamily="34"/>
-              </a:rPr>
-              <a:t> p</a:t>
-            </a:r>
-            <a:r>
-              <a:rPr lang="en-US" sz="4000" b="0" i="0" u="none" strike="noStrike" kern="1200" cap="none" baseline="-8000">
-                <a:ln>
-                  <a:noFill/>
-                </a:ln>
-                <a:solidFill>
-                  <a:srgbClr val="00FFFF"/>
-                </a:solidFill>
-                <a:latin typeface="Times New Roman" pitchFamily="18"/>
-                <a:ea typeface="David CLM" pitchFamily="2"/>
-                <a:cs typeface="Liberation Sans" pitchFamily="34"/>
-              </a:rPr>
-              <a:t>i,j</a:t>
-            </a:r>
-            <a:r>
-              <a:rPr lang="en-US" sz="4000" b="0" i="0" u="none" strike="noStrike" kern="1200" cap="none" baseline="0">
-                <a:ln>
-                  <a:noFill/>
-                </a:ln>
-                <a:solidFill>
-                  <a:srgbClr val="00FFFF"/>
-                </a:solidFill>
-                <a:latin typeface="Times New Roman" pitchFamily="18"/>
-                <a:ea typeface="David CLM" pitchFamily="2"/>
-                <a:cs typeface="Liberation Sans" pitchFamily="34"/>
-              </a:rPr>
-              <a:t> |</a:t>
-            </a:r>
-          </a:p>
-        </p:txBody>
-      </p:sp>
-    </p:spTree>
-  </p:cSld>
-  <p:clrMapOvr>
-    <a:masterClrMapping/>
-  </p:clrMapOvr>
-  <p:timing>
-    <p:tnLst>
-      <p:par>
-        <p:cTn id="1" dur="indefinite" restart="never" nodeType="tmRoot">
-          <p:childTnLst>
-            <p:seq concurrent="1" nextAc="seek">
-              <p:cTn id="2" dur="indefinite" nodeType="mainSeq">
-                <p:childTnLst>
-                  <p:par>
-                    <p:cTn id="3" fill="hold">
-                      <p:stCondLst>
-                        <p:cond delay="indefinite"/>
-                      </p:stCondLst>
-                      <p:childTnLst>
-                        <p:par>
-                          <p:cTn id="4" fill="hold">
-                            <p:stCondLst>
-                              <p:cond delay="0"/>
-                            </p:stCondLst>
-                            <p:childTnLst>
-                              <p:par>
-                                <p:cTn id="5" presetClass="entr" fill="hold" nodeType="clickEffect">
-                                  <p:stCondLst>
-                                    <p:cond delay="0"/>
-                                  </p:stCondLst>
-                                  <p:childTnLst>
-                                    <p:set>
-                                      <p:cBhvr>
-                                        <p:cTn id="6" dur="1" fill="hold">
-                                          <p:stCondLst>
-                                            <p:cond delay="0"/>
-                                          </p:stCondLst>
-                                        </p:cTn>
-                                        <p:tgtEl>
-                                          <p:spTgt spid="5"/>
-                                        </p:tgtEl>
-                                        <p:attrNameLst>
-                                          <p:attrName>style.visibility</p:attrName>
-                                        </p:attrNameLst>
-                                      </p:cBhvr>
-                                      <p:to>
-                                        <p:strVal val="visible"/>
-                                      </p:to>
-                                    </p:set>
-                                  </p:childTnLst>
-                                </p:cTn>
-                              </p:par>
-                              <p:par>
-                                <p:cTn id="7" presetClass="entr" fill="hold" nodeType="withEffect">
-                                  <p:stCondLst>
-                                    <p:cond delay="0"/>
-                                  </p:stCondLst>
-                                  <p:childTnLst>
-                                    <p:set>
-                                      <p:cBhvr>
-                                        <p:cTn id="8" dur="1" fill="hold">
-                                          <p:stCondLst>
-                                            <p:cond delay="0"/>
-                                          </p:stCondLst>
-                                        </p:cTn>
-                                        <p:tgtEl>
-                                          <p:spTgt spid="6"/>
-                                        </p:tgtEl>
-                                        <p:attrNameLst>
-                                          <p:attrName>style.visibility</p:attrName>
-                                        </p:attrNameLst>
-                                      </p:cBhvr>
-                                      <p:to>
-                                        <p:strVal val="visible"/>
-                                      </p:to>
-                                    </p:set>
-                                  </p:childTnLst>
-                                </p:cTn>
-                              </p:par>
-                            </p:childTnLst>
-                          </p:cTn>
-                        </p:par>
-                      </p:childTnLst>
-                    </p:cTn>
-                  </p:par>
-                </p:childTnLst>
-              </p:cTn>
-              <p:prevCondLst>
-                <p:cond evt="onPrev" delay="0">
-                  <p:tgtEl>
-                    <p:sldTgt/>
-                  </p:tgtEl>
-                </p:cond>
-              </p:prevCondLst>
-              <p:nextCondLst>
-                <p:cond evt="onNext" delay="0">
-                  <p:tgtEl>
-                    <p:sldTgt/>
-                  </p:tgtEl>
-                </p:cond>
-              </p:nextCondLst>
-            </p:seq>
-          </p:childTnLst>
-        </p:cTn>
-      </p:par>
-    </p:tnLst>
-  </p:timing>
-</p:sld>
-</file>
-
-<file path=ppt/slides/slide20.xml><?xml version="1.0" encoding="utf-8"?>
+<file path=ppt/slides/slide21.xml><?xml version="1.0" encoding="utf-8"?>
 <p:sld xmlns:a="http://schemas.openxmlformats.org/drawingml/2006/main" xmlns:r="http://schemas.openxmlformats.org/officeDocument/2006/relationships" xmlns:p="http://schemas.openxmlformats.org/presentationml/2006/main">
   <p:cSld name="page20">
     <p:spTree>
@@ -37551,7 +38539,7 @@
         <p:spPr>
           <a:xfrm>
             <a:off x="0" y="1390319"/>
-            <a:ext cx="10080720" cy="5989288"/>
+            <a:ext cx="10080720" cy="6581374"/>
           </a:xfrm>
           <a:prstGeom prst="rect">
             <a:avLst/>
@@ -37567,7 +38555,7 @@
           </a:bodyPr>
           <a:lstStyle/>
           <a:p>
-            <a:pPr marL="571500" marR="0" lvl="0" indent="-571500" algn="r" rtl="1" hangingPunct="0">
+            <a:pPr marL="742950" marR="0" lvl="0" indent="-742950" algn="r" rtl="1" hangingPunct="0">
               <a:lnSpc>
                 <a:spcPct val="100000"/>
               </a:lnSpc>
@@ -37578,8 +38566,8 @@
                 <a:spcPts val="0"/>
               </a:spcAft>
               <a:buSzPct val="45000"/>
-              <a:buFont typeface="Arial" panose="020B0604020202020204" pitchFamily="34" charset="0"/>
-              <a:buChar char="•"/>
+              <a:buFont typeface="+mj-lt"/>
+              <a:buAutoNum type="arabicPeriod"/>
               <a:tabLst/>
             </a:pPr>
             <a:r>
@@ -37587,6 +38575,9 @@
                 <a:ln>
                   <a:noFill/>
                 </a:ln>
+                <a:solidFill>
+                  <a:srgbClr val="7030A0"/>
+                </a:solidFill>
                 <a:latin typeface="Liberation Sans" pitchFamily="34"/>
                 <a:ea typeface="Noto Sans CJK SC Regular" pitchFamily="2"/>
                 <a:cs typeface="Liberation Sans" pitchFamily="34"/>
@@ -37598,6 +38589,9 @@
                 <a:ln>
                   <a:noFill/>
                 </a:ln>
+                <a:solidFill>
+                  <a:srgbClr val="7030A0"/>
+                </a:solidFill>
                 <a:latin typeface="Liberation Sans" pitchFamily="34"/>
                 <a:ea typeface="Noto Sans CJK SC Regular" pitchFamily="2"/>
                 <a:cs typeface="Liberation Sans" pitchFamily="34"/>
@@ -37609,6 +38603,9 @@
                 <a:ln>
                   <a:noFill/>
                 </a:ln>
+                <a:solidFill>
+                  <a:srgbClr val="7030A0"/>
+                </a:solidFill>
                 <a:latin typeface="Liberation Sans" pitchFamily="34"/>
                 <a:ea typeface="Noto Sans CJK SC Regular" pitchFamily="2"/>
                 <a:cs typeface="Liberation Sans" pitchFamily="34"/>
@@ -37620,6 +38617,9 @@
                 <a:ln>
                   <a:noFill/>
                 </a:ln>
+                <a:solidFill>
+                  <a:srgbClr val="7030A0"/>
+                </a:solidFill>
                 <a:latin typeface="Liberation Sans" pitchFamily="34"/>
                 <a:ea typeface="Noto Sans CJK SC Regular" pitchFamily="2"/>
                 <a:cs typeface="Liberation Sans" pitchFamily="34"/>
@@ -37631,15 +38631,468 @@
                 <a:ln>
                   <a:noFill/>
                 </a:ln>
+                <a:solidFill>
+                  <a:srgbClr val="7030A0"/>
+                </a:solidFill>
                 <a:latin typeface="Liberation Sans" pitchFamily="34"/>
                 <a:ea typeface="Noto Sans CJK SC Regular" pitchFamily="2"/>
                 <a:cs typeface="Liberation Sans" pitchFamily="34"/>
               </a:rPr>
               <a:t>:</a:t>
             </a:r>
-          </a:p>
-          <a:p>
-            <a:pPr marL="0" marR="0" lvl="0" indent="0" algn="l" rtl="0" hangingPunct="0">
+            <a:br>
+              <a:rPr lang="en-US" sz="4000" b="0" i="0" u="none" strike="noStrike" kern="1200" cap="none">
+                <a:ln>
+                  <a:noFill/>
+                </a:ln>
+                <a:solidFill>
+                  <a:srgbClr val="7030A0"/>
+                </a:solidFill>
+                <a:latin typeface="Liberation Sans" pitchFamily="34"/>
+                <a:ea typeface="Noto Sans CJK SC Regular" pitchFamily="2"/>
+                <a:cs typeface="Liberation Sans" pitchFamily="34"/>
+              </a:rPr>
+            </a:br>
+            <a:r>
+              <a:rPr lang="en-US" sz="4000" b="0" i="0" u="none" strike="noStrike" kern="1200" cap="none">
+                <a:ln>
+                  <a:noFill/>
+                </a:ln>
+                <a:solidFill>
+                  <a:srgbClr val="7030A0"/>
+                </a:solidFill>
+                <a:latin typeface="Times New Roman" pitchFamily="18"/>
+                <a:ea typeface="Noto Sans CJK SC Regular" pitchFamily="2"/>
+                <a:cs typeface="Liberation Sans" pitchFamily="34"/>
+              </a:rPr>
+              <a:t>f</a:t>
+            </a:r>
+            <a:r>
+              <a:rPr lang="en-US" sz="4000" b="0" i="0" u="none" strike="noStrike" kern="1200" cap="none" baseline="-8000">
+                <a:ln>
+                  <a:noFill/>
+                </a:ln>
+                <a:solidFill>
+                  <a:srgbClr val="7030A0"/>
+                </a:solidFill>
+                <a:latin typeface="Times New Roman" pitchFamily="18"/>
+                <a:ea typeface="Noto Sans CJK SC Regular" pitchFamily="2"/>
+                <a:cs typeface="Liberation Sans" pitchFamily="34"/>
+              </a:rPr>
+              <a:t>1</a:t>
+            </a:r>
+            <a:r>
+              <a:rPr lang="en-US" sz="4000" b="0" i="0" u="none" strike="noStrike" kern="1200" cap="none">
+                <a:ln>
+                  <a:noFill/>
+                </a:ln>
+                <a:solidFill>
+                  <a:srgbClr val="7030A0"/>
+                </a:solidFill>
+                <a:latin typeface="Times New Roman" pitchFamily="18"/>
+                <a:ea typeface="Noto Sans CJK SC Regular" pitchFamily="2"/>
+                <a:cs typeface="Liberation Sans" pitchFamily="34"/>
+              </a:rPr>
+              <a:t>,…,f</a:t>
+            </a:r>
+            <a:r>
+              <a:rPr lang="en-US" sz="4000" b="0" i="0" u="none" strike="noStrike" kern="1200" cap="none" baseline="-8000">
+                <a:ln>
+                  <a:noFill/>
+                </a:ln>
+                <a:solidFill>
+                  <a:srgbClr val="7030A0"/>
+                </a:solidFill>
+                <a:latin typeface="Times New Roman" pitchFamily="18"/>
+                <a:ea typeface="Noto Sans CJK SC Regular" pitchFamily="2"/>
+                <a:cs typeface="Liberation Sans" pitchFamily="34"/>
+              </a:rPr>
+              <a:t>k</a:t>
+            </a:r>
+            <a:r>
+              <a:rPr lang="en-US" sz="4000" b="0" i="0" u="none" strike="noStrike" kern="1200" cap="none">
+                <a:ln>
+                  <a:noFill/>
+                </a:ln>
+                <a:solidFill>
+                  <a:srgbClr val="7030A0"/>
+                </a:solidFill>
+                <a:latin typeface="Times New Roman" pitchFamily="18"/>
+                <a:ea typeface="Noto Sans CJK SC Regular" pitchFamily="2"/>
+                <a:cs typeface="Liberation Sans" pitchFamily="34"/>
+              </a:rPr>
+              <a:t>.</a:t>
+            </a:r>
+            <a:br>
+              <a:rPr lang="en-US" sz="4000" b="0" i="0" u="none" strike="noStrike" kern="1200" cap="none">
+                <a:ln>
+                  <a:noFill/>
+                </a:ln>
+                <a:solidFill>
+                  <a:srgbClr val="7030A0"/>
+                </a:solidFill>
+                <a:latin typeface="Times New Roman" pitchFamily="18"/>
+                <a:ea typeface="Noto Sans CJK SC Regular" pitchFamily="2"/>
+                <a:cs typeface="Liberation Sans" pitchFamily="34"/>
+              </a:rPr>
+            </a:br>
+            <a:r>
+              <a:rPr lang="he-IL" sz="4000" b="0" i="0" u="none" strike="noStrike" kern="1200" cap="none">
+                <a:ln>
+                  <a:noFill/>
+                </a:ln>
+                <a:solidFill>
+                  <a:srgbClr val="7030A0"/>
+                </a:solidFill>
+                <a:latin typeface="Times New Roman" pitchFamily="18"/>
+                <a:ea typeface="Noto Sans CJK SC Regular" pitchFamily="2"/>
+                <a:cs typeface="Liberation Sans" pitchFamily="34"/>
+              </a:rPr>
+              <a:t>   </a:t>
+            </a:r>
+            <a:r>
+              <a:rPr lang="he-IL" sz="4000">
+                <a:solidFill>
+                  <a:srgbClr val="7030A0"/>
+                </a:solidFill>
+                <a:latin typeface="Times New Roman" pitchFamily="18"/>
+                <a:ea typeface="Noto Sans CJK SC Regular" pitchFamily="2"/>
+                <a:cs typeface="Liberation Sans" pitchFamily="34"/>
+              </a:rPr>
+              <a:t> [נקראות גם "פנטומים"</a:t>
+            </a:r>
+            <a:r>
+              <a:rPr lang="en-US" sz="4000">
+                <a:solidFill>
+                  <a:srgbClr val="7030A0"/>
+                </a:solidFill>
+                <a:latin typeface="Times New Roman" pitchFamily="18"/>
+                <a:ea typeface="Noto Sans CJK SC Regular" pitchFamily="2"/>
+                <a:cs typeface="Liberation Sans" pitchFamily="34"/>
+              </a:rPr>
+              <a:t> </a:t>
+            </a:r>
+            <a:r>
+              <a:rPr lang="he-IL" sz="4000">
+                <a:solidFill>
+                  <a:srgbClr val="7030A0"/>
+                </a:solidFill>
+                <a:latin typeface="Times New Roman" pitchFamily="18"/>
+                <a:ea typeface="Noto Sans CJK SC Regular" pitchFamily="2"/>
+                <a:cs typeface="Liberation Sans" pitchFamily="34"/>
+              </a:rPr>
+              <a:t>– </a:t>
+            </a:r>
+            <a:r>
+              <a:rPr lang="en-US" sz="4000">
+                <a:solidFill>
+                  <a:srgbClr val="7030A0"/>
+                </a:solidFill>
+                <a:latin typeface="Times New Roman" pitchFamily="18"/>
+                <a:ea typeface="Noto Sans CJK SC Regular" pitchFamily="2"/>
+                <a:cs typeface="Liberation Sans" pitchFamily="34"/>
+              </a:rPr>
+              <a:t>phantoms</a:t>
+            </a:r>
+            <a:r>
+              <a:rPr lang="he-IL" sz="4000">
+                <a:solidFill>
+                  <a:srgbClr val="7030A0"/>
+                </a:solidFill>
+                <a:latin typeface="Times New Roman" pitchFamily="18"/>
+                <a:ea typeface="Noto Sans CJK SC Regular" pitchFamily="2"/>
+                <a:cs typeface="Liberation Sans" pitchFamily="34"/>
+              </a:rPr>
+              <a:t>].</a:t>
+            </a:r>
+            <a:br>
+              <a:rPr lang="en-US" sz="4000">
+                <a:solidFill>
+                  <a:srgbClr val="7030A0"/>
+                </a:solidFill>
+                <a:latin typeface="Times New Roman" pitchFamily="18"/>
+                <a:ea typeface="Noto Sans CJK SC Regular" pitchFamily="2"/>
+                <a:cs typeface="Liberation Sans" pitchFamily="34"/>
+              </a:rPr>
+            </a:br>
+            <a:endParaRPr lang="en-US" sz="4000" b="0" i="0" u="none" strike="noStrike" kern="1200" cap="none">
+              <a:ln>
+                <a:noFill/>
+              </a:ln>
+              <a:solidFill>
+                <a:srgbClr val="7030A0"/>
+              </a:solidFill>
+              <a:latin typeface="Times New Roman" pitchFamily="18"/>
+              <a:ea typeface="Noto Sans CJK SC Regular" pitchFamily="2"/>
+              <a:cs typeface="Liberation Sans" pitchFamily="34"/>
+            </a:endParaRPr>
+          </a:p>
+          <a:p>
+            <a:pPr marL="742950" marR="0" lvl="0" indent="-742950" algn="r" rtl="1" hangingPunct="0">
+              <a:lnSpc>
+                <a:spcPct val="100000"/>
+              </a:lnSpc>
+              <a:spcBef>
+                <a:spcPts val="0"/>
+              </a:spcBef>
+              <a:spcAft>
+                <a:spcPts val="0"/>
+              </a:spcAft>
+              <a:buSzPct val="45000"/>
+              <a:buFont typeface="+mj-lt"/>
+              <a:buAutoNum type="arabicPeriod"/>
+              <a:tabLst/>
+            </a:pPr>
+            <a:r>
+              <a:rPr lang="he-IL" sz="4000" b="0" i="0" u="none" strike="noStrike" kern="1200" cap="none">
+                <a:ln>
+                  <a:noFill/>
+                </a:ln>
+                <a:solidFill>
+                  <a:srgbClr val="00B050"/>
+                </a:solidFill>
+                <a:latin typeface="Liberation Sans" pitchFamily="34"/>
+                <a:ea typeface="Noto Sans CJK SC Regular" pitchFamily="2"/>
+                <a:cs typeface="Liberation Sans" pitchFamily="34"/>
+              </a:rPr>
+              <a:t>הוסף אותן לקבוצת הצבעות האזרחים:</a:t>
+            </a:r>
+            <a:br>
+              <a:rPr lang="en-US" sz="4000" b="0" i="0" u="none" strike="noStrike" kern="1200" cap="none">
+                <a:ln>
+                  <a:noFill/>
+                </a:ln>
+                <a:solidFill>
+                  <a:srgbClr val="00B050"/>
+                </a:solidFill>
+                <a:latin typeface="Liberation Sans" pitchFamily="34"/>
+                <a:ea typeface="Noto Sans CJK SC Regular" pitchFamily="2"/>
+                <a:cs typeface="Liberation Sans" pitchFamily="34"/>
+              </a:rPr>
+            </a:br>
+            <a:r>
+              <a:rPr lang="en-US" sz="4000" b="0" i="0" u="none" strike="noStrike" kern="1200" cap="none">
+                <a:ln>
+                  <a:noFill/>
+                </a:ln>
+                <a:solidFill>
+                  <a:srgbClr val="00B050"/>
+                </a:solidFill>
+                <a:latin typeface="Times New Roman" pitchFamily="18"/>
+                <a:ea typeface="Noto Sans CJK SC Regular" pitchFamily="2"/>
+                <a:cs typeface="Liberation Sans" pitchFamily="34"/>
+              </a:rPr>
+              <a:t>p</a:t>
+            </a:r>
+            <a:r>
+              <a:rPr lang="en-US" sz="4000" b="0" i="0" u="none" strike="noStrike" kern="1200" cap="none" baseline="-8000">
+                <a:ln>
+                  <a:noFill/>
+                </a:ln>
+                <a:solidFill>
+                  <a:srgbClr val="00B050"/>
+                </a:solidFill>
+                <a:latin typeface="Times New Roman" pitchFamily="18"/>
+                <a:ea typeface="Noto Sans CJK SC Regular" pitchFamily="2"/>
+                <a:cs typeface="Liberation Sans" pitchFamily="34"/>
+              </a:rPr>
+              <a:t>1</a:t>
+            </a:r>
+            <a:r>
+              <a:rPr lang="en-US" sz="4000" b="0" i="0" u="none" strike="noStrike" kern="1200" cap="none">
+                <a:ln>
+                  <a:noFill/>
+                </a:ln>
+                <a:solidFill>
+                  <a:srgbClr val="00B050"/>
+                </a:solidFill>
+                <a:latin typeface="Times New Roman" pitchFamily="18"/>
+                <a:ea typeface="Noto Sans CJK SC Regular" pitchFamily="2"/>
+                <a:cs typeface="Liberation Sans" pitchFamily="34"/>
+              </a:rPr>
+              <a:t>,…,p</a:t>
+            </a:r>
+            <a:r>
+              <a:rPr lang="en-US" sz="4000" b="0" i="0" u="none" strike="noStrike" kern="1200" cap="none" baseline="-8000">
+                <a:ln>
+                  <a:noFill/>
+                </a:ln>
+                <a:solidFill>
+                  <a:srgbClr val="00B050"/>
+                </a:solidFill>
+                <a:latin typeface="Times New Roman" pitchFamily="18"/>
+                <a:ea typeface="Noto Sans CJK SC Regular" pitchFamily="2"/>
+                <a:cs typeface="Liberation Sans" pitchFamily="34"/>
+              </a:rPr>
+              <a:t>n</a:t>
+            </a:r>
+            <a:r>
+              <a:rPr lang="en-US" sz="4000" b="0" i="0" u="none" strike="noStrike" kern="1200" cap="none">
+                <a:ln>
+                  <a:noFill/>
+                </a:ln>
+                <a:solidFill>
+                  <a:srgbClr val="00B050"/>
+                </a:solidFill>
+                <a:latin typeface="Times New Roman" pitchFamily="18"/>
+                <a:ea typeface="Noto Sans CJK SC Regular" pitchFamily="2"/>
+                <a:cs typeface="Liberation Sans" pitchFamily="34"/>
+              </a:rPr>
+              <a:t>.</a:t>
+            </a:r>
+            <a:br>
+              <a:rPr lang="en-US" sz="4000" b="0" i="0" u="none" strike="noStrike" kern="1200" cap="none">
+                <a:ln>
+                  <a:noFill/>
+                </a:ln>
+                <a:solidFill>
+                  <a:srgbClr val="00B050"/>
+                </a:solidFill>
+                <a:latin typeface="Times New Roman" pitchFamily="18"/>
+                <a:ea typeface="Noto Sans CJK SC Regular" pitchFamily="2"/>
+                <a:cs typeface="Liberation Sans" pitchFamily="34"/>
+              </a:rPr>
+            </a:br>
+            <a:endParaRPr lang="en-US" sz="4000" b="0" i="0" u="none" strike="noStrike" kern="1200" cap="none">
+              <a:ln>
+                <a:noFill/>
+              </a:ln>
+              <a:solidFill>
+                <a:srgbClr val="00B050"/>
+              </a:solidFill>
+              <a:latin typeface="Times New Roman" pitchFamily="18"/>
+              <a:ea typeface="Noto Sans CJK SC Regular" pitchFamily="2"/>
+              <a:cs typeface="Liberation Sans" pitchFamily="34"/>
+            </a:endParaRPr>
+          </a:p>
+          <a:p>
+            <a:pPr marL="742950" marR="0" lvl="0" indent="-742950" algn="r" rtl="1" hangingPunct="0">
+              <a:lnSpc>
+                <a:spcPct val="100000"/>
+              </a:lnSpc>
+              <a:spcBef>
+                <a:spcPts val="0"/>
+              </a:spcBef>
+              <a:spcAft>
+                <a:spcPts val="0"/>
+              </a:spcAft>
+              <a:buSzPct val="45000"/>
+              <a:buFont typeface="+mj-lt"/>
+              <a:buAutoNum type="arabicPeriod"/>
+              <a:tabLst/>
+            </a:pPr>
+            <a:r>
+              <a:rPr lang="he-IL" sz="4000" b="0" i="0" u="none" strike="noStrike" kern="1200" cap="none">
+                <a:ln>
+                  <a:noFill/>
+                </a:ln>
+                <a:solidFill>
+                  <a:srgbClr val="0070C0"/>
+                </a:solidFill>
+                <a:latin typeface="Liberation Sans" pitchFamily="34"/>
+                <a:ea typeface="Noto Sans CJK SC Regular" pitchFamily="2"/>
+                <a:cs typeface="Liberation Sans" pitchFamily="34"/>
+              </a:rPr>
+              <a:t>הפעל את אלגוריתם החציון המקורי על קבוצת </a:t>
+            </a:r>
+            <a:r>
+              <a:rPr lang="en-US" sz="4000" b="0" i="0" u="none" strike="noStrike" kern="1200" cap="none">
+                <a:ln>
+                  <a:noFill/>
+                </a:ln>
+                <a:solidFill>
+                  <a:srgbClr val="0070C0"/>
+                </a:solidFill>
+                <a:latin typeface="Liberation Sans" pitchFamily="34"/>
+                <a:ea typeface="Noto Sans CJK SC Regular" pitchFamily="2"/>
+                <a:cs typeface="Liberation Sans" pitchFamily="34"/>
+              </a:rPr>
+              <a:t>n+k</a:t>
+            </a:r>
+            <a:r>
+              <a:rPr lang="he-IL" sz="4000" b="0" i="0" u="none" strike="noStrike" kern="1200" cap="none">
+                <a:ln>
+                  <a:noFill/>
+                </a:ln>
+                <a:solidFill>
+                  <a:srgbClr val="0070C0"/>
+                </a:solidFill>
+                <a:latin typeface="Liberation Sans" pitchFamily="34"/>
+                <a:ea typeface="Noto Sans CJK SC Regular" pitchFamily="2"/>
+                <a:cs typeface="Liberation Sans" pitchFamily="34"/>
+              </a:rPr>
+              <a:t> </a:t>
+            </a:r>
+            <a:r>
+              <a:rPr lang="en-US" sz="4000" b="0" i="0" u="none" strike="noStrike" kern="1200" cap="none">
+                <a:ln>
+                  <a:noFill/>
+                </a:ln>
+                <a:solidFill>
+                  <a:srgbClr val="0070C0"/>
+                </a:solidFill>
+                <a:latin typeface="Liberation Sans" pitchFamily="34"/>
+                <a:ea typeface="Noto Sans CJK SC Regular" pitchFamily="2"/>
+                <a:cs typeface="Liberation Sans" pitchFamily="34"/>
+              </a:rPr>
+              <a:t>ההצבעות </a:t>
+            </a:r>
+            <a:r>
+              <a:rPr lang="he-IL" sz="4000" b="0" i="0" u="none" strike="noStrike" kern="1200" cap="none">
+                <a:ln>
+                  <a:noFill/>
+                </a:ln>
+                <a:solidFill>
+                  <a:srgbClr val="0070C0"/>
+                </a:solidFill>
+                <a:latin typeface="Liberation Sans" pitchFamily="34"/>
+                <a:ea typeface="Noto Sans CJK SC Regular" pitchFamily="2"/>
+                <a:cs typeface="Liberation Sans" pitchFamily="34"/>
+              </a:rPr>
+              <a:t>(</a:t>
+            </a:r>
+            <a:r>
+              <a:rPr lang="en-US" sz="4000" b="0" i="0" u="none" strike="noStrike" kern="1200" cap="none">
+                <a:ln>
+                  <a:noFill/>
+                </a:ln>
+                <a:solidFill>
+                  <a:srgbClr val="0070C0"/>
+                </a:solidFill>
+                <a:latin typeface="Liberation Sans" pitchFamily="34"/>
+                <a:ea typeface="Noto Sans CJK SC Regular" pitchFamily="2"/>
+                <a:cs typeface="Liberation Sans" pitchFamily="34"/>
+              </a:rPr>
+              <a:t>הקבועות ושל האזרחים</a:t>
+            </a:r>
+            <a:r>
+              <a:rPr lang="he-IL" sz="4000" b="0" i="0" u="none" strike="noStrike" kern="1200" cap="none">
+                <a:ln>
+                  <a:noFill/>
+                </a:ln>
+                <a:solidFill>
+                  <a:srgbClr val="0070C0"/>
+                </a:solidFill>
+                <a:latin typeface="Liberation Sans" pitchFamily="34"/>
+                <a:ea typeface="Noto Sans CJK SC Regular" pitchFamily="2"/>
+                <a:cs typeface="Liberation Sans" pitchFamily="34"/>
+              </a:rPr>
+              <a:t>).</a:t>
+            </a:r>
+            <a:endParaRPr lang="en-US" sz="4000" b="0" i="0" u="none" strike="noStrike" kern="1200" cap="none">
+              <a:ln>
+                <a:noFill/>
+              </a:ln>
+              <a:solidFill>
+                <a:srgbClr val="0070C0"/>
+              </a:solidFill>
+              <a:latin typeface="Liberation Sans" pitchFamily="34"/>
+              <a:ea typeface="Noto Sans CJK SC Regular" pitchFamily="2"/>
+              <a:cs typeface="Liberation Sans" pitchFamily="34"/>
+            </a:endParaRPr>
+          </a:p>
+          <a:p>
+            <a:pPr marR="0" lvl="0" algn="r" rtl="1" hangingPunct="0">
               <a:lnSpc>
                 <a:spcPct val="100000"/>
               </a:lnSpc>
@@ -37653,235 +39106,7 @@
               <a:tabLst/>
             </a:pPr>
             <a:r>
-              <a:rPr lang="en-US" sz="4000" b="0" i="0" u="none" strike="noStrike" kern="1200" cap="none">
-                <a:ln>
-                  <a:noFill/>
-                </a:ln>
-                <a:latin typeface="Times New Roman" pitchFamily="18"/>
-                <a:ea typeface="Noto Sans CJK SC Regular" pitchFamily="2"/>
-                <a:cs typeface="Liberation Sans" pitchFamily="34"/>
-              </a:rPr>
-              <a:t>f</a:t>
-            </a:r>
-            <a:r>
-              <a:rPr lang="en-US" sz="4000" b="0" i="0" u="none" strike="noStrike" kern="1200" cap="none" baseline="-8000">
-                <a:ln>
-                  <a:noFill/>
-                </a:ln>
-                <a:latin typeface="Times New Roman" pitchFamily="18"/>
-                <a:ea typeface="Noto Sans CJK SC Regular" pitchFamily="2"/>
-                <a:cs typeface="Liberation Sans" pitchFamily="34"/>
-              </a:rPr>
-              <a:t>1</a:t>
-            </a:r>
-            <a:r>
-              <a:rPr lang="en-US" sz="4000" b="0" i="0" u="none" strike="noStrike" kern="1200" cap="none">
-                <a:ln>
-                  <a:noFill/>
-                </a:ln>
-                <a:latin typeface="Times New Roman" pitchFamily="18"/>
-                <a:ea typeface="Noto Sans CJK SC Regular" pitchFamily="2"/>
-                <a:cs typeface="Liberation Sans" pitchFamily="34"/>
-              </a:rPr>
-              <a:t>,…,f</a:t>
-            </a:r>
-            <a:r>
-              <a:rPr lang="en-US" sz="4000" b="0" i="0" u="none" strike="noStrike" kern="1200" cap="none" baseline="-8000">
-                <a:ln>
-                  <a:noFill/>
-                </a:ln>
-                <a:latin typeface="Times New Roman" pitchFamily="18"/>
-                <a:ea typeface="Noto Sans CJK SC Regular" pitchFamily="2"/>
-                <a:cs typeface="Liberation Sans" pitchFamily="34"/>
-              </a:rPr>
-              <a:t>k</a:t>
-            </a:r>
-            <a:r>
-              <a:rPr lang="en-US" sz="4000" b="0" i="0" u="none" strike="noStrike" kern="1200" cap="none">
-                <a:ln>
-                  <a:noFill/>
-                </a:ln>
-                <a:latin typeface="Times New Roman" pitchFamily="18"/>
-                <a:ea typeface="Noto Sans CJK SC Regular" pitchFamily="2"/>
-                <a:cs typeface="Liberation Sans" pitchFamily="34"/>
-              </a:rPr>
-              <a:t>.</a:t>
-            </a:r>
-            <a:br>
-              <a:rPr lang="en-US" sz="4000" b="0" i="0" u="none" strike="noStrike" kern="1200" cap="none">
-                <a:ln>
-                  <a:noFill/>
-                </a:ln>
-                <a:latin typeface="Times New Roman" pitchFamily="18"/>
-                <a:ea typeface="Noto Sans CJK SC Regular" pitchFamily="2"/>
-                <a:cs typeface="Liberation Sans" pitchFamily="34"/>
-              </a:rPr>
-            </a:br>
-            <a:endParaRPr lang="en-US" sz="4000" b="0" i="0" u="none" strike="noStrike" kern="1200" cap="none">
-              <a:ln>
-                <a:noFill/>
-              </a:ln>
-              <a:latin typeface="Times New Roman" pitchFamily="18"/>
-              <a:ea typeface="Noto Sans CJK SC Regular" pitchFamily="2"/>
-              <a:cs typeface="Liberation Sans" pitchFamily="34"/>
-            </a:endParaRPr>
-          </a:p>
-          <a:p>
-            <a:pPr marL="571500" marR="0" lvl="0" indent="-571500" algn="r" rtl="1" hangingPunct="0">
-              <a:lnSpc>
-                <a:spcPct val="100000"/>
-              </a:lnSpc>
-              <a:spcBef>
-                <a:spcPts val="0"/>
-              </a:spcBef>
-              <a:spcAft>
-                <a:spcPts val="0"/>
-              </a:spcAft>
-              <a:buSzPct val="45000"/>
-              <a:buFont typeface="Arial" panose="020B0604020202020204" pitchFamily="34" charset="0"/>
-              <a:buChar char="•"/>
-              <a:tabLst/>
-            </a:pPr>
-            <a:r>
-              <a:rPr lang="he-IL" sz="4000" b="0" i="0" u="none" strike="noStrike" kern="1200" cap="none">
-                <a:ln>
-                  <a:noFill/>
-                </a:ln>
-                <a:latin typeface="Liberation Sans" pitchFamily="34"/>
-                <a:ea typeface="Noto Sans CJK SC Regular" pitchFamily="2"/>
-                <a:cs typeface="Liberation Sans" pitchFamily="34"/>
-              </a:rPr>
-              <a:t>הוסף אותן לקבוצת הצבעות האזרחים:</a:t>
-            </a:r>
-          </a:p>
-          <a:p>
-            <a:pPr marL="0" marR="0" lvl="0" indent="0" algn="l" rtl="0" hangingPunct="0">
-              <a:lnSpc>
-                <a:spcPct val="100000"/>
-              </a:lnSpc>
-              <a:spcBef>
-                <a:spcPts val="0"/>
-              </a:spcBef>
-              <a:spcAft>
-                <a:spcPts val="0"/>
-              </a:spcAft>
-              <a:buSzPct val="45000"/>
-              <a:tabLst/>
-            </a:pPr>
-            <a:r>
-              <a:rPr lang="en-US" sz="4000" b="0" i="0" u="none" strike="noStrike" kern="1200" cap="none">
-                <a:ln>
-                  <a:noFill/>
-                </a:ln>
-                <a:latin typeface="Times New Roman" pitchFamily="18"/>
-                <a:ea typeface="Noto Sans CJK SC Regular" pitchFamily="2"/>
-                <a:cs typeface="Liberation Sans" pitchFamily="34"/>
-              </a:rPr>
-              <a:t>p</a:t>
-            </a:r>
-            <a:r>
-              <a:rPr lang="en-US" sz="4000" b="0" i="0" u="none" strike="noStrike" kern="1200" cap="none" baseline="-8000">
-                <a:ln>
-                  <a:noFill/>
-                </a:ln>
-                <a:latin typeface="Times New Roman" pitchFamily="18"/>
-                <a:ea typeface="Noto Sans CJK SC Regular" pitchFamily="2"/>
-                <a:cs typeface="Liberation Sans" pitchFamily="34"/>
-              </a:rPr>
-              <a:t>1</a:t>
-            </a:r>
-            <a:r>
-              <a:rPr lang="en-US" sz="4000" b="0" i="0" u="none" strike="noStrike" kern="1200" cap="none">
-                <a:ln>
-                  <a:noFill/>
-                </a:ln>
-                <a:latin typeface="Times New Roman" pitchFamily="18"/>
-                <a:ea typeface="Noto Sans CJK SC Regular" pitchFamily="2"/>
-                <a:cs typeface="Liberation Sans" pitchFamily="34"/>
-              </a:rPr>
-              <a:t>,…,p</a:t>
-            </a:r>
-            <a:r>
-              <a:rPr lang="en-US" sz="4000" b="0" i="0" u="none" strike="noStrike" kern="1200" cap="none" baseline="-8000">
-                <a:ln>
-                  <a:noFill/>
-                </a:ln>
-                <a:latin typeface="Times New Roman" pitchFamily="18"/>
-                <a:ea typeface="Noto Sans CJK SC Regular" pitchFamily="2"/>
-                <a:cs typeface="Liberation Sans" pitchFamily="34"/>
-              </a:rPr>
-              <a:t>n</a:t>
-            </a:r>
-            <a:r>
-              <a:rPr lang="en-US" sz="4000" b="0" i="0" u="none" strike="noStrike" kern="1200" cap="none">
-                <a:ln>
-                  <a:noFill/>
-                </a:ln>
-                <a:latin typeface="Times New Roman" pitchFamily="18"/>
-                <a:ea typeface="Noto Sans CJK SC Regular" pitchFamily="2"/>
-                <a:cs typeface="Liberation Sans" pitchFamily="34"/>
-              </a:rPr>
-              <a:t>.</a:t>
-            </a:r>
-            <a:br>
-              <a:rPr lang="en-US" sz="4000" b="0" i="0" u="none" strike="noStrike" kern="1200" cap="none">
-                <a:ln>
-                  <a:noFill/>
-                </a:ln>
-                <a:latin typeface="Times New Roman" pitchFamily="18"/>
-                <a:ea typeface="Noto Sans CJK SC Regular" pitchFamily="2"/>
-                <a:cs typeface="Liberation Sans" pitchFamily="34"/>
-              </a:rPr>
-            </a:br>
-            <a:endParaRPr lang="en-US" sz="4000" b="0" i="0" u="none" strike="noStrike" kern="1200" cap="none">
-              <a:ln>
-                <a:noFill/>
-              </a:ln>
-              <a:latin typeface="Times New Roman" pitchFamily="18"/>
-              <a:ea typeface="Noto Sans CJK SC Regular" pitchFamily="2"/>
-              <a:cs typeface="Liberation Sans" pitchFamily="34"/>
-            </a:endParaRPr>
-          </a:p>
-          <a:p>
-            <a:pPr marL="571500" marR="0" lvl="0" indent="-571500" algn="r" rtl="1" hangingPunct="0">
-              <a:lnSpc>
-                <a:spcPct val="100000"/>
-              </a:lnSpc>
-              <a:spcBef>
-                <a:spcPts val="0"/>
-              </a:spcBef>
-              <a:spcAft>
-                <a:spcPts val="0"/>
-              </a:spcAft>
-              <a:buSzPct val="45000"/>
-              <a:buFont typeface="Arial" panose="020B0604020202020204" pitchFamily="34" charset="0"/>
-              <a:buChar char="•"/>
-              <a:tabLst/>
-            </a:pPr>
-            <a:r>
-              <a:rPr lang="he-IL" sz="4000" b="0" i="0" u="none" strike="noStrike" kern="1200" cap="none">
-                <a:ln>
-                  <a:noFill/>
-                </a:ln>
-                <a:latin typeface="Liberation Sans" pitchFamily="34"/>
-                <a:ea typeface="Noto Sans CJK SC Regular" pitchFamily="2"/>
-                <a:cs typeface="Liberation Sans" pitchFamily="34"/>
-              </a:rPr>
-              <a:t>הפעל את אלגוריתם החציון המקורי על קבוצת </a:t>
-            </a:r>
-            <a:r>
-              <a:rPr lang="en-US" sz="4000" b="0" i="0" u="none" strike="noStrike" kern="1200" cap="none">
-                <a:ln>
-                  <a:noFill/>
-                </a:ln>
-                <a:latin typeface="Liberation Sans" pitchFamily="34"/>
-                <a:ea typeface="Noto Sans CJK SC Regular" pitchFamily="2"/>
-                <a:cs typeface="Liberation Sans" pitchFamily="34"/>
-              </a:rPr>
-              <a:t>n+k</a:t>
-            </a:r>
-            <a:r>
-              <a:rPr lang="he-IL" sz="4000" b="0" i="0" u="none" strike="noStrike" kern="1200" cap="none">
+              <a:rPr lang="he-IL" sz="4000" b="0" i="0" u="none" strike="noStrike" kern="1200" cap="none" baseline="0">
                 <a:ln>
                   <a:noFill/>
                 </a:ln>
@@ -37891,75 +39116,6 @@
               </a:rPr>
               <a:t> </a:t>
             </a:r>
-            <a:r>
-              <a:rPr lang="en-US" sz="4000" b="0" i="0" u="none" strike="noStrike" kern="1200" cap="none">
-                <a:ln>
-                  <a:noFill/>
-                </a:ln>
-                <a:latin typeface="Liberation Sans" pitchFamily="34"/>
-                <a:ea typeface="Noto Sans CJK SC Regular" pitchFamily="2"/>
-                <a:cs typeface="Liberation Sans" pitchFamily="34"/>
-              </a:rPr>
-              <a:t>ההצבעות </a:t>
-            </a:r>
-            <a:r>
-              <a:rPr lang="he-IL" sz="4000" b="0" i="0" u="none" strike="noStrike" kern="1200" cap="none">
-                <a:ln>
-                  <a:noFill/>
-                </a:ln>
-                <a:latin typeface="Liberation Sans" pitchFamily="34"/>
-                <a:ea typeface="Noto Sans CJK SC Regular" pitchFamily="2"/>
-                <a:cs typeface="Liberation Sans" pitchFamily="34"/>
-              </a:rPr>
-              <a:t>(</a:t>
-            </a:r>
-            <a:r>
-              <a:rPr lang="en-US" sz="4000" b="0" i="0" u="none" strike="noStrike" kern="1200" cap="none">
-                <a:ln>
-                  <a:noFill/>
-                </a:ln>
-                <a:latin typeface="Liberation Sans" pitchFamily="34"/>
-                <a:ea typeface="Noto Sans CJK SC Regular" pitchFamily="2"/>
-                <a:cs typeface="Liberation Sans" pitchFamily="34"/>
-              </a:rPr>
-              <a:t>הקבועות ושל האזרחים</a:t>
-            </a:r>
-            <a:r>
-              <a:rPr lang="he-IL" sz="4000" b="0" i="0" u="none" strike="noStrike" kern="1200" cap="none">
-                <a:ln>
-                  <a:noFill/>
-                </a:ln>
-                <a:latin typeface="Liberation Sans" pitchFamily="34"/>
-                <a:ea typeface="Noto Sans CJK SC Regular" pitchFamily="2"/>
-                <a:cs typeface="Liberation Sans" pitchFamily="34"/>
-              </a:rPr>
-              <a:t>).</a:t>
-            </a:r>
-            <a:endParaRPr lang="en-US" sz="4000" b="0" i="0" u="none" strike="noStrike" kern="1200" cap="none">
-              <a:ln>
-                <a:noFill/>
-              </a:ln>
-              <a:latin typeface="Liberation Sans" pitchFamily="34"/>
-              <a:ea typeface="Noto Sans CJK SC Regular" pitchFamily="2"/>
-              <a:cs typeface="Liberation Sans" pitchFamily="34"/>
-            </a:endParaRPr>
-          </a:p>
-          <a:p>
-            <a:pPr marL="0" marR="0" lvl="0" indent="0" algn="r" rtl="1" hangingPunct="0">
-              <a:lnSpc>
-                <a:spcPct val="100000"/>
-              </a:lnSpc>
-              <a:spcBef>
-                <a:spcPts val="0"/>
-              </a:spcBef>
-              <a:spcAft>
-                <a:spcPts val="0"/>
-              </a:spcAft>
-              <a:buSzPct val="45000"/>
-              <a:buFont typeface="StarSymbol"/>
-              <a:buChar char="●"/>
-              <a:tabLst/>
-            </a:pPr>
             <a:endParaRPr lang="en-US" sz="4000" b="0" i="0" u="none" strike="noStrike" kern="1200" cap="none" baseline="0">
               <a:ln>
                 <a:noFill/>
